--- a/buskarov_pwp.pptx
+++ b/buskarov_pwp.pptx
@@ -1,23 +1,24 @@
 
 <file path=ppt/presentation.xml><?xml version="1.0" encoding="utf-8"?>
-<p:presentation xmlns:a="http://schemas.openxmlformats.org/drawingml/2006/main" xmlns:r="http://schemas.openxmlformats.org/officeDocument/2006/relationships" xmlns:p="http://schemas.openxmlformats.org/presentationml/2006/main" xmlns:m="http://schemas.openxmlformats.org/officeDocument/2006/math" xmlns:a14="http://schemas.microsoft.com/office/drawing/2010/main">
+<p:presentation xmlns:a="http://schemas.openxmlformats.org/drawingml/2006/main" xmlns:r="http://schemas.openxmlformats.org/officeDocument/2006/relationships" xmlns:p="http://schemas.openxmlformats.org/presentationml/2006/main">
   <p:sldMasterIdLst>
-    <p:sldMasterId id="2147483648" r:id="rId5"/>
+    <p:sldMasterId id="2147483648" r:id="rId1"/>
   </p:sldMasterIdLst>
   <p:notesMasterIdLst>
-    <p:notesMasterId r:id="rId7"/>
+    <p:notesMasterId r:id="rId13"/>
   </p:notesMasterIdLst>
   <p:sldIdLst>
-    <p:sldId id="256" r:id="rId8"/>
-    <p:sldId id="257" r:id="rId9"/>
-    <p:sldId id="258" r:id="rId10"/>
-    <p:sldId id="259" r:id="rId11"/>
-    <p:sldId id="260" r:id="rId12"/>
-    <p:sldId id="261" r:id="rId13"/>
-    <p:sldId id="262" r:id="rId14"/>
-    <p:sldId id="263" r:id="rId15"/>
-    <p:sldId id="264" r:id="rId16"/>
-    <p:sldId id="265" r:id="rId17"/>
+    <p:sldId id="256" r:id="rId2"/>
+    <p:sldId id="257" r:id="rId3"/>
+    <p:sldId id="259" r:id="rId4"/>
+    <p:sldId id="260" r:id="rId5"/>
+    <p:sldId id="261" r:id="rId6"/>
+    <p:sldId id="262" r:id="rId7"/>
+    <p:sldId id="263" r:id="rId8"/>
+    <p:sldId id="264" r:id="rId9"/>
+    <p:sldId id="267" r:id="rId10"/>
+    <p:sldId id="266" r:id="rId11"/>
+    <p:sldId id="265" r:id="rId12"/>
   </p:sldIdLst>
   <p:sldSz cx="24384000" cy="13716000"/>
   <p:notesSz cx="6858000" cy="9144000"/>
@@ -37,7 +38,7 @@
       <a:buFontTx/>
       <a:buNone/>
       <a:tabLst/>
-      <a:defRPr b="0" baseline="0" cap="none" i="0" spc="0" strike="noStrike" sz="1800" u="none" kumimoji="0" normalizeH="0">
+      <a:defRPr kumimoji="0" sz="1800" b="0" i="0" u="none" strike="noStrike" cap="none" spc="0" normalizeH="0" baseline="0">
         <a:ln>
           <a:noFill/>
         </a:ln>
@@ -63,7 +64,7 @@
       <a:buFontTx/>
       <a:buNone/>
       <a:tabLst/>
-      <a:defRPr b="0" baseline="0" cap="none" i="0" spc="0" strike="noStrike" sz="2400" u="none" kumimoji="0" normalizeH="0">
+      <a:defRPr kumimoji="0" sz="2400" b="0" i="0" u="none" strike="noStrike" cap="none" spc="0" normalizeH="0" baseline="0">
         <a:ln>
           <a:noFill/>
         </a:ln>
@@ -93,7 +94,7 @@
       <a:buFontTx/>
       <a:buNone/>
       <a:tabLst/>
-      <a:defRPr b="0" baseline="0" cap="none" i="0" spc="0" strike="noStrike" sz="2400" u="none" kumimoji="0" normalizeH="0">
+      <a:defRPr kumimoji="0" sz="2400" b="0" i="0" u="none" strike="noStrike" cap="none" spc="0" normalizeH="0" baseline="0">
         <a:ln>
           <a:noFill/>
         </a:ln>
@@ -123,7 +124,7 @@
       <a:buFontTx/>
       <a:buNone/>
       <a:tabLst/>
-      <a:defRPr b="0" baseline="0" cap="none" i="0" spc="0" strike="noStrike" sz="2400" u="none" kumimoji="0" normalizeH="0">
+      <a:defRPr kumimoji="0" sz="2400" b="0" i="0" u="none" strike="noStrike" cap="none" spc="0" normalizeH="0" baseline="0">
         <a:ln>
           <a:noFill/>
         </a:ln>
@@ -153,7 +154,7 @@
       <a:buFontTx/>
       <a:buNone/>
       <a:tabLst/>
-      <a:defRPr b="0" baseline="0" cap="none" i="0" spc="0" strike="noStrike" sz="2400" u="none" kumimoji="0" normalizeH="0">
+      <a:defRPr kumimoji="0" sz="2400" b="0" i="0" u="none" strike="noStrike" cap="none" spc="0" normalizeH="0" baseline="0">
         <a:ln>
           <a:noFill/>
         </a:ln>
@@ -183,7 +184,7 @@
       <a:buFontTx/>
       <a:buNone/>
       <a:tabLst/>
-      <a:defRPr b="0" baseline="0" cap="none" i="0" spc="0" strike="noStrike" sz="2400" u="none" kumimoji="0" normalizeH="0">
+      <a:defRPr kumimoji="0" sz="2400" b="0" i="0" u="none" strike="noStrike" cap="none" spc="0" normalizeH="0" baseline="0">
         <a:ln>
           <a:noFill/>
         </a:ln>
@@ -213,7 +214,7 @@
       <a:buFontTx/>
       <a:buNone/>
       <a:tabLst/>
-      <a:defRPr b="0" baseline="0" cap="none" i="0" spc="0" strike="noStrike" sz="2400" u="none" kumimoji="0" normalizeH="0">
+      <a:defRPr kumimoji="0" sz="2400" b="0" i="0" u="none" strike="noStrike" cap="none" spc="0" normalizeH="0" baseline="0">
         <a:ln>
           <a:noFill/>
         </a:ln>
@@ -243,7 +244,7 @@
       <a:buFontTx/>
       <a:buNone/>
       <a:tabLst/>
-      <a:defRPr b="0" baseline="0" cap="none" i="0" spc="0" strike="noStrike" sz="2400" u="none" kumimoji="0" normalizeH="0">
+      <a:defRPr kumimoji="0" sz="2400" b="0" i="0" u="none" strike="noStrike" cap="none" spc="0" normalizeH="0" baseline="0">
         <a:ln>
           <a:noFill/>
         </a:ln>
@@ -273,7 +274,7 @@
       <a:buFontTx/>
       <a:buNone/>
       <a:tabLst/>
-      <a:defRPr b="0" baseline="0" cap="none" i="0" spc="0" strike="noStrike" sz="2400" u="none" kumimoji="0" normalizeH="0">
+      <a:defRPr kumimoji="0" sz="2400" b="0" i="0" u="none" strike="noStrike" cap="none" spc="0" normalizeH="0" baseline="0">
         <a:ln>
           <a:noFill/>
         </a:ln>
@@ -303,7 +304,7 @@
       <a:buFontTx/>
       <a:buNone/>
       <a:tabLst/>
-      <a:defRPr b="0" baseline="0" cap="none" i="0" spc="0" strike="noStrike" sz="2400" u="none" kumimoji="0" normalizeH="0">
+      <a:defRPr kumimoji="0" sz="2400" b="0" i="0" u="none" strike="noStrike" cap="none" spc="0" normalizeH="0" baseline="0">
         <a:ln>
           <a:noFill/>
         </a:ln>
@@ -322,13 +323,14 @@
 </p:presentation>
 </file>
 
-<file path=ppt/commentAuthors.xml><?xml version="1.0" encoding="utf-8"?>
-<p:cmAuthorLst xmlns:a="http://schemas.openxmlformats.org/drawingml/2006/main" xmlns:r="http://schemas.openxmlformats.org/officeDocument/2006/relationships" xmlns:p="http://schemas.openxmlformats.org/presentationml/2006/main" xmlns:m="http://schemas.openxmlformats.org/officeDocument/2006/math" xmlns:a14="http://schemas.microsoft.com/office/drawing/2010/main"/>
-</file>
-
 <file path=ppt/notesMasters/notesMaster1.xml><?xml version="1.0" encoding="utf-8"?>
-<p:notesMaster xmlns:a="http://schemas.openxmlformats.org/drawingml/2006/main" xmlns:r="http://schemas.openxmlformats.org/officeDocument/2006/relationships" xmlns:p="http://schemas.openxmlformats.org/presentationml/2006/main" xmlns:m="http://schemas.openxmlformats.org/officeDocument/2006/math" xmlns:a14="http://schemas.microsoft.com/office/drawing/2010/main">
+<p:notesMaster xmlns:a="http://schemas.openxmlformats.org/drawingml/2006/main" xmlns:r="http://schemas.openxmlformats.org/officeDocument/2006/relationships" xmlns:p="http://schemas.openxmlformats.org/presentationml/2006/main">
   <p:cSld>
+    <p:bg>
+      <p:bgRef idx="1001">
+        <a:schemeClr val="bg1"/>
+      </p:bgRef>
+    </p:bg>
     <p:spTree>
       <p:nvGrpSpPr>
         <p:cNvPr id="1" name=""/>
@@ -346,7 +348,9 @@
       <p:sp>
         <p:nvSpPr>
           <p:cNvPr id="148" name="Shape 148"/>
-          <p:cNvSpPr/>
+          <p:cNvSpPr>
+            <a:spLocks noGrp="1" noRot="1" noChangeAspect="1"/>
+          </p:cNvSpPr>
           <p:nvPr>
             <p:ph type="sldImg"/>
           </p:nvPr>
@@ -364,14 +368,16 @@
           <a:bodyPr/>
           <a:lstStyle/>
           <a:p>
-            <a:pPr/>
+            <a:endParaRPr/>
           </a:p>
         </p:txBody>
       </p:sp>
       <p:sp>
         <p:nvSpPr>
           <p:cNvPr id="149" name="Shape 149"/>
-          <p:cNvSpPr/>
+          <p:cNvSpPr>
+            <a:spLocks noGrp="1"/>
+          </p:cNvSpPr>
           <p:nvPr>
             <p:ph type="body" sz="quarter" idx="1"/>
           </p:nvPr>
@@ -389,7 +395,7 @@
           <a:bodyPr/>
           <a:lstStyle/>
           <a:p>
-            <a:pPr/>
+            <a:endParaRPr/>
           </a:p>
         </p:txBody>
       </p:sp>
@@ -501,7 +507,7 @@
 </file>
 
 <file path=ppt/slideLayouts/slideLayout1.xml><?xml version="1.0" encoding="utf-8"?>
-<p:sldLayout xmlns:a="http://schemas.openxmlformats.org/drawingml/2006/main" xmlns:r="http://schemas.openxmlformats.org/officeDocument/2006/relationships" xmlns:p="http://schemas.openxmlformats.org/presentationml/2006/main" xmlns:m="http://schemas.openxmlformats.org/officeDocument/2006/math" xmlns:a14="http://schemas.microsoft.com/office/drawing/2010/main" type="title" showMasterSp="1" showMasterPhAnim="1">
+<p:sldLayout xmlns:a="http://schemas.openxmlformats.org/drawingml/2006/main" xmlns:r="http://schemas.openxmlformats.org/officeDocument/2006/relationships" xmlns:p="http://schemas.openxmlformats.org/presentationml/2006/main" type="title">
   <p:cSld name="Заголовок">
     <p:spTree>
       <p:nvGrpSpPr>
@@ -520,7 +526,9 @@
       <p:sp>
         <p:nvSpPr>
           <p:cNvPr id="11" name="Автор и дата"/>
-          <p:cNvSpPr txBox="1"/>
+          <p:cNvSpPr txBox="1">
+            <a:spLocks noGrp="1"/>
+          </p:cNvSpPr>
           <p:nvPr>
             <p:ph type="body" sz="quarter" idx="21" hasCustomPrompt="1"/>
           </p:nvPr>
@@ -546,7 +554,7 @@
               </a:spcBef>
               <a:buSzTx/>
               <a:buNone/>
-              <a:defRPr spc="-29" sz="2940">
+              <a:defRPr sz="2940" spc="-29">
                 <a:latin typeface="Avenir Next Medium"/>
                 <a:ea typeface="Avenir Next Medium"/>
                 <a:cs typeface="Avenir Next Medium"/>
@@ -555,7 +563,6 @@
             </a:lvl1pPr>
           </a:lstStyle>
           <a:p>
-            <a:pPr/>
             <a:r>
               <a:t>Автор и дата</a:t>
             </a:r>
@@ -565,7 +572,9 @@
       <p:sp>
         <p:nvSpPr>
           <p:cNvPr id="12" name="Заголовок презентации"/>
-          <p:cNvSpPr txBox="1"/>
+          <p:cNvSpPr txBox="1">
+            <a:spLocks noGrp="1"/>
+          </p:cNvSpPr>
           <p:nvPr>
             <p:ph type="title" hasCustomPrompt="1"/>
           </p:nvPr>
@@ -583,11 +592,10 @@
           <a:bodyPr anchor="b"/>
           <a:lstStyle>
             <a:lvl1pPr>
-              <a:defRPr spc="-128" sz="12800"/>
+              <a:defRPr sz="12800" spc="-128"/>
             </a:lvl1pPr>
           </a:lstStyle>
           <a:p>
-            <a:pPr/>
             <a:r>
               <a:t>Заголовок презентации</a:t>
             </a:r>
@@ -597,7 +605,9 @@
       <p:sp>
         <p:nvSpPr>
           <p:cNvPr id="13" name="Уровень текста 1…"/>
-          <p:cNvSpPr txBox="1"/>
+          <p:cNvSpPr txBox="1">
+            <a:spLocks noGrp="1"/>
+          </p:cNvSpPr>
           <p:nvPr>
             <p:ph type="body" sz="quarter" idx="1" hasCustomPrompt="1"/>
           </p:nvPr>
@@ -623,7 +633,7 @@
               </a:spcBef>
               <a:buSzTx/>
               <a:buNone/>
-              <a:defRPr spc="-59" sz="6000">
+              <a:defRPr sz="6000" spc="-59">
                 <a:latin typeface="Avenir Next Demi Bold"/>
                 <a:ea typeface="Avenir Next Demi Bold"/>
                 <a:cs typeface="Avenir Next Demi Bold"/>
@@ -639,7 +649,7 @@
               </a:spcBef>
               <a:buSzTx/>
               <a:buNone/>
-              <a:defRPr spc="-59" sz="6000">
+              <a:defRPr sz="6000" spc="-59">
                 <a:latin typeface="Avenir Next Demi Bold"/>
                 <a:ea typeface="Avenir Next Demi Bold"/>
                 <a:cs typeface="Avenir Next Demi Bold"/>
@@ -655,7 +665,7 @@
               </a:spcBef>
               <a:buSzTx/>
               <a:buNone/>
-              <a:defRPr spc="-59" sz="6000">
+              <a:defRPr sz="6000" spc="-59">
                 <a:latin typeface="Avenir Next Demi Bold"/>
                 <a:ea typeface="Avenir Next Demi Bold"/>
                 <a:cs typeface="Avenir Next Demi Bold"/>
@@ -671,7 +681,7 @@
               </a:spcBef>
               <a:buSzTx/>
               <a:buNone/>
-              <a:defRPr spc="-59" sz="6000">
+              <a:defRPr sz="6000" spc="-59">
                 <a:latin typeface="Avenir Next Demi Bold"/>
                 <a:ea typeface="Avenir Next Demi Bold"/>
                 <a:cs typeface="Avenir Next Demi Bold"/>
@@ -687,7 +697,7 @@
               </a:spcBef>
               <a:buSzTx/>
               <a:buNone/>
-              <a:defRPr spc="-59" sz="6000">
+              <a:defRPr sz="6000" spc="-59">
                 <a:latin typeface="Avenir Next Demi Bold"/>
                 <a:ea typeface="Avenir Next Demi Bold"/>
                 <a:cs typeface="Avenir Next Demi Bold"/>
@@ -696,41 +706,34 @@
             </a:lvl5pPr>
           </a:lstStyle>
           <a:p>
-            <a:pPr/>
             <a:r>
               <a:t>Подзаголовок презентации</a:t>
             </a:r>
           </a:p>
           <a:p>
             <a:pPr lvl="1"/>
-            <a:r>
-              <a:t/>
-            </a:r>
+            <a:endParaRPr/>
           </a:p>
           <a:p>
             <a:pPr lvl="2"/>
-            <a:r>
-              <a:t/>
-            </a:r>
+            <a:endParaRPr/>
           </a:p>
           <a:p>
             <a:pPr lvl="3"/>
-            <a:r>
-              <a:t/>
-            </a:r>
+            <a:endParaRPr/>
           </a:p>
           <a:p>
             <a:pPr lvl="4"/>
-            <a:r>
-              <a:t/>
-            </a:r>
+            <a:endParaRPr/>
           </a:p>
         </p:txBody>
       </p:sp>
       <p:sp>
         <p:nvSpPr>
           <p:cNvPr id="14" name="Номер слайда"/>
-          <p:cNvSpPr txBox="1"/>
+          <p:cNvSpPr txBox="1">
+            <a:spLocks noGrp="1"/>
+          </p:cNvSpPr>
           <p:nvPr>
             <p:ph type="sldNum" sz="quarter" idx="2"/>
           </p:nvPr>
@@ -748,8 +751,10 @@
           <a:bodyPr/>
           <a:lstStyle/>
           <a:p>
-            <a:pPr/>
-            <a:fld id="{86CB4B4D-7CA3-9044-876B-883B54F8677D}" type="slidenum"/>
+            <a:fld id="{86CB4B4D-7CA3-9044-876B-883B54F8677D}" type="slidenum">
+              <a:t>‹#›</a:t>
+            </a:fld>
+            <a:endParaRPr/>
           </a:p>
         </p:txBody>
       </p:sp>
@@ -758,12 +763,12 @@
   <p:clrMapOvr>
     <a:masterClrMapping/>
   </p:clrMapOvr>
-  <p:transition xmlns:p14="http://schemas.microsoft.com/office/powerpoint/2010/main" spd="med" advClick="1"/>
+  <p:transition spd="med"/>
 </p:sldLayout>
 </file>
 
 <file path=ppt/slideLayouts/slideLayout10.xml><?xml version="1.0" encoding="utf-8"?>
-<p:sldLayout xmlns:a="http://schemas.openxmlformats.org/drawingml/2006/main" xmlns:r="http://schemas.openxmlformats.org/officeDocument/2006/relationships" xmlns:p="http://schemas.openxmlformats.org/presentationml/2006/main" xmlns:m="http://schemas.openxmlformats.org/officeDocument/2006/math" xmlns:a14="http://schemas.microsoft.com/office/drawing/2010/main" type="tx" showMasterSp="1" showMasterPhAnim="1">
+<p:sldLayout xmlns:a="http://schemas.openxmlformats.org/drawingml/2006/main" xmlns:r="http://schemas.openxmlformats.org/officeDocument/2006/relationships" xmlns:p="http://schemas.openxmlformats.org/presentationml/2006/main" type="tx">
   <p:cSld name="Информационное сообщение">
     <p:spTree>
       <p:nvGrpSpPr>
@@ -782,7 +787,9 @@
       <p:sp>
         <p:nvSpPr>
           <p:cNvPr id="98" name="Уровень текста 1…"/>
-          <p:cNvSpPr txBox="1"/>
+          <p:cNvSpPr txBox="1">
+            <a:spLocks noGrp="1"/>
+          </p:cNvSpPr>
           <p:nvPr>
             <p:ph type="body" idx="1" hasCustomPrompt="1"/>
           </p:nvPr>
@@ -881,41 +888,34 @@
             </a:lvl5pPr>
           </a:lstStyle>
           <a:p>
-            <a:pPr/>
             <a:r>
               <a:t>Информационное сообщение</a:t>
             </a:r>
           </a:p>
           <a:p>
             <a:pPr lvl="1"/>
-            <a:r>
-              <a:t/>
-            </a:r>
+            <a:endParaRPr/>
           </a:p>
           <a:p>
             <a:pPr lvl="2"/>
-            <a:r>
-              <a:t/>
-            </a:r>
+            <a:endParaRPr/>
           </a:p>
           <a:p>
             <a:pPr lvl="3"/>
-            <a:r>
-              <a:t/>
-            </a:r>
+            <a:endParaRPr/>
           </a:p>
           <a:p>
             <a:pPr lvl="4"/>
-            <a:r>
-              <a:t/>
-            </a:r>
+            <a:endParaRPr/>
           </a:p>
         </p:txBody>
       </p:sp>
       <p:sp>
         <p:nvSpPr>
           <p:cNvPr id="99" name="Номер слайда"/>
-          <p:cNvSpPr txBox="1"/>
+          <p:cNvSpPr txBox="1">
+            <a:spLocks noGrp="1"/>
+          </p:cNvSpPr>
           <p:nvPr>
             <p:ph type="sldNum" sz="quarter" idx="2"/>
           </p:nvPr>
@@ -929,8 +929,10 @@
           <a:bodyPr/>
           <a:lstStyle/>
           <a:p>
-            <a:pPr/>
-            <a:fld id="{86CB4B4D-7CA3-9044-876B-883B54F8677D}" type="slidenum"/>
+            <a:fld id="{86CB4B4D-7CA3-9044-876B-883B54F8677D}" type="slidenum">
+              <a:t>‹#›</a:t>
+            </a:fld>
+            <a:endParaRPr/>
           </a:p>
         </p:txBody>
       </p:sp>
@@ -939,12 +941,12 @@
   <p:clrMapOvr>
     <a:masterClrMapping/>
   </p:clrMapOvr>
-  <p:transition xmlns:p14="http://schemas.microsoft.com/office/powerpoint/2010/main" spd="med" advClick="1"/>
+  <p:transition spd="med"/>
 </p:sldLayout>
 </file>
 
 <file path=ppt/slideLayouts/slideLayout11.xml><?xml version="1.0" encoding="utf-8"?>
-<p:sldLayout xmlns:a="http://schemas.openxmlformats.org/drawingml/2006/main" xmlns:r="http://schemas.openxmlformats.org/officeDocument/2006/relationships" xmlns:p="http://schemas.openxmlformats.org/presentationml/2006/main" xmlns:m="http://schemas.openxmlformats.org/officeDocument/2006/math" xmlns:a14="http://schemas.microsoft.com/office/drawing/2010/main" type="tx" showMasterSp="1" showMasterPhAnim="1">
+<p:sldLayout xmlns:a="http://schemas.openxmlformats.org/drawingml/2006/main" xmlns:r="http://schemas.openxmlformats.org/officeDocument/2006/relationships" xmlns:p="http://schemas.openxmlformats.org/presentationml/2006/main" type="tx">
   <p:cSld name="Важный факт">
     <p:spTree>
       <p:nvGrpSpPr>
@@ -963,7 +965,9 @@
       <p:sp>
         <p:nvSpPr>
           <p:cNvPr id="106" name="Информация о факте"/>
-          <p:cNvSpPr txBox="1"/>
+          <p:cNvSpPr txBox="1">
+            <a:spLocks noGrp="1"/>
+          </p:cNvSpPr>
           <p:nvPr>
             <p:ph type="body" sz="quarter" idx="21" hasCustomPrompt="1"/>
           </p:nvPr>
@@ -989,7 +993,7 @@
               </a:spcBef>
               <a:buSzTx/>
               <a:buNone/>
-              <a:defRPr spc="-42" sz="4224">
+              <a:defRPr sz="4224" spc="-42">
                 <a:latin typeface="Avenir Next Demi Bold"/>
                 <a:ea typeface="Avenir Next Demi Bold"/>
                 <a:cs typeface="Avenir Next Demi Bold"/>
@@ -998,7 +1002,6 @@
             </a:lvl1pPr>
           </a:lstStyle>
           <a:p>
-            <a:pPr/>
             <a:r>
               <a:t>Информация о факте</a:t>
             </a:r>
@@ -1008,7 +1011,9 @@
       <p:sp>
         <p:nvSpPr>
           <p:cNvPr id="107" name="Уровень текста 1…"/>
-          <p:cNvSpPr txBox="1"/>
+          <p:cNvSpPr txBox="1">
+            <a:spLocks noGrp="1"/>
+          </p:cNvSpPr>
           <p:nvPr>
             <p:ph type="body" sz="half" idx="1" hasCustomPrompt="1"/>
           </p:nvPr>
@@ -1107,41 +1112,34 @@
             </a:lvl5pPr>
           </a:lstStyle>
           <a:p>
-            <a:pPr/>
             <a:r>
               <a:t>100 %</a:t>
             </a:r>
           </a:p>
           <a:p>
             <a:pPr lvl="1"/>
-            <a:r>
-              <a:t/>
-            </a:r>
+            <a:endParaRPr/>
           </a:p>
           <a:p>
             <a:pPr lvl="2"/>
-            <a:r>
-              <a:t/>
-            </a:r>
+            <a:endParaRPr/>
           </a:p>
           <a:p>
             <a:pPr lvl="3"/>
-            <a:r>
-              <a:t/>
-            </a:r>
+            <a:endParaRPr/>
           </a:p>
           <a:p>
             <a:pPr lvl="4"/>
-            <a:r>
-              <a:t/>
-            </a:r>
+            <a:endParaRPr/>
           </a:p>
         </p:txBody>
       </p:sp>
       <p:sp>
         <p:nvSpPr>
           <p:cNvPr id="108" name="Номер слайда"/>
-          <p:cNvSpPr txBox="1"/>
+          <p:cNvSpPr txBox="1">
+            <a:spLocks noGrp="1"/>
+          </p:cNvSpPr>
           <p:nvPr>
             <p:ph type="sldNum" sz="quarter" idx="2"/>
           </p:nvPr>
@@ -1155,8 +1153,10 @@
           <a:bodyPr/>
           <a:lstStyle/>
           <a:p>
-            <a:pPr/>
-            <a:fld id="{86CB4B4D-7CA3-9044-876B-883B54F8677D}" type="slidenum"/>
+            <a:fld id="{86CB4B4D-7CA3-9044-876B-883B54F8677D}" type="slidenum">
+              <a:t>‹#›</a:t>
+            </a:fld>
+            <a:endParaRPr/>
           </a:p>
         </p:txBody>
       </p:sp>
@@ -1165,12 +1165,12 @@
   <p:clrMapOvr>
     <a:masterClrMapping/>
   </p:clrMapOvr>
-  <p:transition xmlns:p14="http://schemas.microsoft.com/office/powerpoint/2010/main" spd="med" advClick="1"/>
+  <p:transition spd="med"/>
 </p:sldLayout>
 </file>
 
 <file path=ppt/slideLayouts/slideLayout12.xml><?xml version="1.0" encoding="utf-8"?>
-<p:sldLayout xmlns:a="http://schemas.openxmlformats.org/drawingml/2006/main" xmlns:r="http://schemas.openxmlformats.org/officeDocument/2006/relationships" xmlns:p="http://schemas.openxmlformats.org/presentationml/2006/main" xmlns:m="http://schemas.openxmlformats.org/officeDocument/2006/math" xmlns:a14="http://schemas.microsoft.com/office/drawing/2010/main" type="tx" showMasterSp="1" showMasterPhAnim="1">
+<p:sldLayout xmlns:a="http://schemas.openxmlformats.org/drawingml/2006/main" xmlns:r="http://schemas.openxmlformats.org/officeDocument/2006/relationships" xmlns:p="http://schemas.openxmlformats.org/presentationml/2006/main" type="tx">
   <p:cSld name="Цитата">
     <p:spTree>
       <p:nvGrpSpPr>
@@ -1189,7 +1189,9 @@
       <p:sp>
         <p:nvSpPr>
           <p:cNvPr id="115" name="Авторство"/>
-          <p:cNvSpPr txBox="1"/>
+          <p:cNvSpPr txBox="1">
+            <a:spLocks noGrp="1"/>
+          </p:cNvSpPr>
           <p:nvPr>
             <p:ph type="body" sz="quarter" idx="21" hasCustomPrompt="1"/>
           </p:nvPr>
@@ -1215,7 +1217,7 @@
               </a:spcBef>
               <a:buSzTx/>
               <a:buNone/>
-              <a:defRPr spc="-42" sz="4224">
+              <a:defRPr sz="4224" spc="-42">
                 <a:latin typeface="Avenir Next Demi Bold"/>
                 <a:ea typeface="Avenir Next Demi Bold"/>
                 <a:cs typeface="Avenir Next Demi Bold"/>
@@ -1224,7 +1226,6 @@
             </a:lvl1pPr>
           </a:lstStyle>
           <a:p>
-            <a:pPr/>
             <a:r>
               <a:t>Авторство</a:t>
             </a:r>
@@ -1234,7 +1235,9 @@
       <p:sp>
         <p:nvSpPr>
           <p:cNvPr id="116" name="Уровень текста 1…"/>
-          <p:cNvSpPr txBox="1"/>
+          <p:cNvSpPr txBox="1">
+            <a:spLocks noGrp="1"/>
+          </p:cNvSpPr>
           <p:nvPr>
             <p:ph type="body" sz="half" idx="1" hasCustomPrompt="1"/>
           </p:nvPr>
@@ -1333,41 +1336,34 @@
             </a:lvl5pPr>
           </a:lstStyle>
           <a:p>
-            <a:pPr/>
             <a:r>
               <a:t>«Важная цитата»</a:t>
             </a:r>
           </a:p>
           <a:p>
             <a:pPr lvl="1"/>
-            <a:r>
-              <a:t/>
-            </a:r>
+            <a:endParaRPr/>
           </a:p>
           <a:p>
             <a:pPr lvl="2"/>
-            <a:r>
-              <a:t/>
-            </a:r>
+            <a:endParaRPr/>
           </a:p>
           <a:p>
             <a:pPr lvl="3"/>
-            <a:r>
-              <a:t/>
-            </a:r>
+            <a:endParaRPr/>
           </a:p>
           <a:p>
             <a:pPr lvl="4"/>
-            <a:r>
-              <a:t/>
-            </a:r>
+            <a:endParaRPr/>
           </a:p>
         </p:txBody>
       </p:sp>
       <p:sp>
         <p:nvSpPr>
           <p:cNvPr id="117" name="Номер слайда"/>
-          <p:cNvSpPr txBox="1"/>
+          <p:cNvSpPr txBox="1">
+            <a:spLocks noGrp="1"/>
+          </p:cNvSpPr>
           <p:nvPr>
             <p:ph type="sldNum" sz="quarter" idx="2"/>
           </p:nvPr>
@@ -1385,8 +1381,10 @@
           <a:bodyPr/>
           <a:lstStyle/>
           <a:p>
-            <a:pPr/>
-            <a:fld id="{86CB4B4D-7CA3-9044-876B-883B54F8677D}" type="slidenum"/>
+            <a:fld id="{86CB4B4D-7CA3-9044-876B-883B54F8677D}" type="slidenum">
+              <a:t>‹#›</a:t>
+            </a:fld>
+            <a:endParaRPr/>
           </a:p>
         </p:txBody>
       </p:sp>
@@ -1395,12 +1393,12 @@
   <p:clrMapOvr>
     <a:masterClrMapping/>
   </p:clrMapOvr>
-  <p:transition xmlns:p14="http://schemas.microsoft.com/office/powerpoint/2010/main" spd="med" advClick="1"/>
+  <p:transition spd="med"/>
 </p:sldLayout>
 </file>
 
 <file path=ppt/slideLayouts/slideLayout13.xml><?xml version="1.0" encoding="utf-8"?>
-<p:sldLayout xmlns:a="http://schemas.openxmlformats.org/drawingml/2006/main" xmlns:r="http://schemas.openxmlformats.org/officeDocument/2006/relationships" xmlns:p="http://schemas.openxmlformats.org/presentationml/2006/main" xmlns:m="http://schemas.openxmlformats.org/officeDocument/2006/math" xmlns:a14="http://schemas.microsoft.com/office/drawing/2010/main" type="tx" showMasterSp="1" showMasterPhAnim="1">
+<p:sldLayout xmlns:a="http://schemas.openxmlformats.org/drawingml/2006/main" xmlns:r="http://schemas.openxmlformats.org/officeDocument/2006/relationships" xmlns:p="http://schemas.openxmlformats.org/presentationml/2006/main" type="tx">
   <p:cSld name="Фото (3 шт.)">
     <p:spTree>
       <p:nvGrpSpPr>
@@ -1419,7 +1417,9 @@
       <p:sp>
         <p:nvSpPr>
           <p:cNvPr id="124" name="Море и небо на закате 2"/>
-          <p:cNvSpPr/>
+          <p:cNvSpPr>
+            <a:spLocks noGrp="1"/>
+          </p:cNvSpPr>
           <p:nvPr>
             <p:ph type="pic" sz="quarter" idx="21"/>
           </p:nvPr>
@@ -1439,14 +1439,16 @@
           </a:bodyPr>
           <a:lstStyle/>
           <a:p>
-            <a:pPr/>
+            <a:endParaRPr/>
           </a:p>
         </p:txBody>
       </p:sp>
       <p:sp>
         <p:nvSpPr>
           <p:cNvPr id="125" name="Море и небо на закате 1"/>
-          <p:cNvSpPr/>
+          <p:cNvSpPr>
+            <a:spLocks noGrp="1"/>
+          </p:cNvSpPr>
           <p:nvPr>
             <p:ph type="pic" sz="quarter" idx="22"/>
           </p:nvPr>
@@ -1466,14 +1468,16 @@
           </a:bodyPr>
           <a:lstStyle/>
           <a:p>
-            <a:pPr/>
+            <a:endParaRPr/>
           </a:p>
         </p:txBody>
       </p:sp>
       <p:sp>
         <p:nvSpPr>
           <p:cNvPr id="126" name="Пляж и море на закате"/>
-          <p:cNvSpPr/>
+          <p:cNvSpPr>
+            <a:spLocks noGrp="1"/>
+          </p:cNvSpPr>
           <p:nvPr>
             <p:ph type="pic" idx="23"/>
           </p:nvPr>
@@ -1493,14 +1497,16 @@
           </a:bodyPr>
           <a:lstStyle/>
           <a:p>
-            <a:pPr/>
+            <a:endParaRPr/>
           </a:p>
         </p:txBody>
       </p:sp>
       <p:sp>
         <p:nvSpPr>
           <p:cNvPr id="127" name="Номер слайда"/>
-          <p:cNvSpPr txBox="1"/>
+          <p:cNvSpPr txBox="1">
+            <a:spLocks noGrp="1"/>
+          </p:cNvSpPr>
           <p:nvPr>
             <p:ph type="sldNum" sz="quarter" idx="2"/>
           </p:nvPr>
@@ -1518,8 +1524,10 @@
           <a:bodyPr/>
           <a:lstStyle/>
           <a:p>
-            <a:pPr/>
-            <a:fld id="{86CB4B4D-7CA3-9044-876B-883B54F8677D}" type="slidenum"/>
+            <a:fld id="{86CB4B4D-7CA3-9044-876B-883B54F8677D}" type="slidenum">
+              <a:t>‹#›</a:t>
+            </a:fld>
+            <a:endParaRPr/>
           </a:p>
         </p:txBody>
       </p:sp>
@@ -1528,12 +1536,12 @@
   <p:clrMapOvr>
     <a:masterClrMapping/>
   </p:clrMapOvr>
-  <p:transition xmlns:p14="http://schemas.microsoft.com/office/powerpoint/2010/main" spd="med" advClick="1"/>
+  <p:transition spd="med"/>
 </p:sldLayout>
 </file>
 
 <file path=ppt/slideLayouts/slideLayout14.xml><?xml version="1.0" encoding="utf-8"?>
-<p:sldLayout xmlns:a="http://schemas.openxmlformats.org/drawingml/2006/main" xmlns:r="http://schemas.openxmlformats.org/officeDocument/2006/relationships" xmlns:p="http://schemas.openxmlformats.org/presentationml/2006/main" xmlns:m="http://schemas.openxmlformats.org/officeDocument/2006/math" xmlns:a14="http://schemas.microsoft.com/office/drawing/2010/main" type="tx" showMasterSp="1" showMasterPhAnim="1">
+<p:sldLayout xmlns:a="http://schemas.openxmlformats.org/drawingml/2006/main" xmlns:r="http://schemas.openxmlformats.org/officeDocument/2006/relationships" xmlns:p="http://schemas.openxmlformats.org/presentationml/2006/main" type="tx">
   <p:cSld name="Фото">
     <p:spTree>
       <p:nvGrpSpPr>
@@ -1552,7 +1560,9 @@
       <p:sp>
         <p:nvSpPr>
           <p:cNvPr id="134" name="пляж и море на закате"/>
-          <p:cNvSpPr/>
+          <p:cNvSpPr>
+            <a:spLocks noGrp="1"/>
+          </p:cNvSpPr>
           <p:nvPr>
             <p:ph type="pic" idx="21"/>
           </p:nvPr>
@@ -1572,14 +1582,16 @@
           </a:bodyPr>
           <a:lstStyle/>
           <a:p>
-            <a:pPr/>
+            <a:endParaRPr/>
           </a:p>
         </p:txBody>
       </p:sp>
       <p:sp>
         <p:nvSpPr>
           <p:cNvPr id="135" name="Номер слайда"/>
-          <p:cNvSpPr txBox="1"/>
+          <p:cNvSpPr txBox="1">
+            <a:spLocks noGrp="1"/>
+          </p:cNvSpPr>
           <p:nvPr>
             <p:ph type="sldNum" sz="quarter" idx="2"/>
           </p:nvPr>
@@ -1597,8 +1609,10 @@
           <a:bodyPr/>
           <a:lstStyle/>
           <a:p>
-            <a:pPr/>
-            <a:fld id="{86CB4B4D-7CA3-9044-876B-883B54F8677D}" type="slidenum"/>
+            <a:fld id="{86CB4B4D-7CA3-9044-876B-883B54F8677D}" type="slidenum">
+              <a:t>‹#›</a:t>
+            </a:fld>
+            <a:endParaRPr/>
           </a:p>
         </p:txBody>
       </p:sp>
@@ -1607,12 +1621,12 @@
   <p:clrMapOvr>
     <a:masterClrMapping/>
   </p:clrMapOvr>
-  <p:transition xmlns:p14="http://schemas.microsoft.com/office/powerpoint/2010/main" spd="med" advClick="1"/>
+  <p:transition spd="med"/>
 </p:sldLayout>
 </file>
 
 <file path=ppt/slideLayouts/slideLayout15.xml><?xml version="1.0" encoding="utf-8"?>
-<p:sldLayout xmlns:a="http://schemas.openxmlformats.org/drawingml/2006/main" xmlns:r="http://schemas.openxmlformats.org/officeDocument/2006/relationships" xmlns:p="http://schemas.openxmlformats.org/presentationml/2006/main" xmlns:m="http://schemas.openxmlformats.org/officeDocument/2006/math" xmlns:a14="http://schemas.microsoft.com/office/drawing/2010/main" type="tx" showMasterSp="1" showMasterPhAnim="1">
+<p:sldLayout xmlns:a="http://schemas.openxmlformats.org/drawingml/2006/main" xmlns:r="http://schemas.openxmlformats.org/officeDocument/2006/relationships" xmlns:p="http://schemas.openxmlformats.org/presentationml/2006/main" type="tx">
   <p:cSld name="Пустой">
     <p:spTree>
       <p:nvGrpSpPr>
@@ -1631,7 +1645,9 @@
       <p:sp>
         <p:nvSpPr>
           <p:cNvPr id="142" name="Номер слайда"/>
-          <p:cNvSpPr txBox="1"/>
+          <p:cNvSpPr txBox="1">
+            <a:spLocks noGrp="1"/>
+          </p:cNvSpPr>
           <p:nvPr>
             <p:ph type="sldNum" sz="quarter" idx="2"/>
           </p:nvPr>
@@ -1649,8 +1665,10 @@
           <a:bodyPr/>
           <a:lstStyle/>
           <a:p>
-            <a:pPr/>
-            <a:fld id="{86CB4B4D-7CA3-9044-876B-883B54F8677D}" type="slidenum"/>
+            <a:fld id="{86CB4B4D-7CA3-9044-876B-883B54F8677D}" type="slidenum">
+              <a:t>‹#›</a:t>
+            </a:fld>
+            <a:endParaRPr/>
           </a:p>
         </p:txBody>
       </p:sp>
@@ -1659,12 +1677,12 @@
   <p:clrMapOvr>
     <a:masterClrMapping/>
   </p:clrMapOvr>
-  <p:transition xmlns:p14="http://schemas.microsoft.com/office/powerpoint/2010/main" spd="med" advClick="1"/>
+  <p:transition spd="med"/>
 </p:sldLayout>
 </file>
 
 <file path=ppt/slideLayouts/slideLayout2.xml><?xml version="1.0" encoding="utf-8"?>
-<p:sldLayout xmlns:a="http://schemas.openxmlformats.org/drawingml/2006/main" xmlns:r="http://schemas.openxmlformats.org/officeDocument/2006/relationships" xmlns:p="http://schemas.openxmlformats.org/presentationml/2006/main" xmlns:m="http://schemas.openxmlformats.org/officeDocument/2006/math" xmlns:a14="http://schemas.microsoft.com/office/drawing/2010/main" type="tx" showMasterSp="1" showMasterPhAnim="1">
+<p:sldLayout xmlns:a="http://schemas.openxmlformats.org/drawingml/2006/main" xmlns:r="http://schemas.openxmlformats.org/officeDocument/2006/relationships" xmlns:p="http://schemas.openxmlformats.org/presentationml/2006/main" type="tx">
   <p:cSld name="Заголовок и фото">
     <p:spTree>
       <p:nvGrpSpPr>
@@ -1683,7 +1701,9 @@
       <p:sp>
         <p:nvSpPr>
           <p:cNvPr id="21" name="Пляж и море на закате"/>
-          <p:cNvSpPr/>
+          <p:cNvSpPr>
+            <a:spLocks noGrp="1"/>
+          </p:cNvSpPr>
           <p:nvPr>
             <p:ph type="pic" idx="21"/>
           </p:nvPr>
@@ -1703,14 +1723,16 @@
           </a:bodyPr>
           <a:lstStyle/>
           <a:p>
-            <a:pPr/>
+            <a:endParaRPr/>
           </a:p>
         </p:txBody>
       </p:sp>
       <p:sp>
         <p:nvSpPr>
           <p:cNvPr id="22" name="Заголовок презентации"/>
-          <p:cNvSpPr txBox="1"/>
+          <p:cNvSpPr txBox="1">
+            <a:spLocks noGrp="1"/>
+          </p:cNvSpPr>
           <p:nvPr>
             <p:ph type="title" hasCustomPrompt="1"/>
           </p:nvPr>
@@ -1728,7 +1750,7 @@
           <a:bodyPr anchor="b"/>
           <a:lstStyle>
             <a:lvl1pPr>
-              <a:defRPr spc="-128" sz="12800">
+              <a:defRPr sz="12800" spc="-128">
                 <a:solidFill>
                   <a:srgbClr val="FFFFFF"/>
                 </a:solidFill>
@@ -1736,7 +1758,6 @@
             </a:lvl1pPr>
           </a:lstStyle>
           <a:p>
-            <a:pPr/>
             <a:r>
               <a:t>Заголовок презентации</a:t>
             </a:r>
@@ -1746,7 +1767,9 @@
       <p:sp>
         <p:nvSpPr>
           <p:cNvPr id="23" name="Уровень текста 1…"/>
-          <p:cNvSpPr txBox="1"/>
+          <p:cNvSpPr txBox="1">
+            <a:spLocks noGrp="1"/>
+          </p:cNvSpPr>
           <p:nvPr>
             <p:ph type="body" sz="quarter" idx="1" hasCustomPrompt="1"/>
           </p:nvPr>
@@ -1772,7 +1795,7 @@
               </a:spcBef>
               <a:buSzTx/>
               <a:buNone/>
-              <a:defRPr spc="-59" sz="6000">
+              <a:defRPr sz="6000" spc="-59">
                 <a:solidFill>
                   <a:srgbClr val="FFFFFF"/>
                 </a:solidFill>
@@ -1791,7 +1814,7 @@
               </a:spcBef>
               <a:buSzTx/>
               <a:buNone/>
-              <a:defRPr spc="-59" sz="6000">
+              <a:defRPr sz="6000" spc="-59">
                 <a:solidFill>
                   <a:srgbClr val="FFFFFF"/>
                 </a:solidFill>
@@ -1810,7 +1833,7 @@
               </a:spcBef>
               <a:buSzTx/>
               <a:buNone/>
-              <a:defRPr spc="-59" sz="6000">
+              <a:defRPr sz="6000" spc="-59">
                 <a:solidFill>
                   <a:srgbClr val="FFFFFF"/>
                 </a:solidFill>
@@ -1829,7 +1852,7 @@
               </a:spcBef>
               <a:buSzTx/>
               <a:buNone/>
-              <a:defRPr spc="-59" sz="6000">
+              <a:defRPr sz="6000" spc="-59">
                 <a:solidFill>
                   <a:srgbClr val="FFFFFF"/>
                 </a:solidFill>
@@ -1848,7 +1871,7 @@
               </a:spcBef>
               <a:buSzTx/>
               <a:buNone/>
-              <a:defRPr spc="-59" sz="6000">
+              <a:defRPr sz="6000" spc="-59">
                 <a:solidFill>
                   <a:srgbClr val="FFFFFF"/>
                 </a:solidFill>
@@ -1860,41 +1883,34 @@
             </a:lvl5pPr>
           </a:lstStyle>
           <a:p>
-            <a:pPr/>
             <a:r>
               <a:t>Подзаголовок презентации</a:t>
             </a:r>
           </a:p>
           <a:p>
             <a:pPr lvl="1"/>
-            <a:r>
-              <a:t/>
-            </a:r>
+            <a:endParaRPr/>
           </a:p>
           <a:p>
             <a:pPr lvl="2"/>
-            <a:r>
-              <a:t/>
-            </a:r>
+            <a:endParaRPr/>
           </a:p>
           <a:p>
             <a:pPr lvl="3"/>
-            <a:r>
-              <a:t/>
-            </a:r>
+            <a:endParaRPr/>
           </a:p>
           <a:p>
             <a:pPr lvl="4"/>
-            <a:r>
-              <a:t/>
-            </a:r>
+            <a:endParaRPr/>
           </a:p>
         </p:txBody>
       </p:sp>
       <p:sp>
         <p:nvSpPr>
           <p:cNvPr id="24" name="Автор и дата"/>
-          <p:cNvSpPr txBox="1"/>
+          <p:cNvSpPr txBox="1">
+            <a:spLocks noGrp="1"/>
+          </p:cNvSpPr>
           <p:nvPr>
             <p:ph type="body" sz="quarter" idx="22" hasCustomPrompt="1"/>
           </p:nvPr>
@@ -1920,7 +1936,7 @@
               </a:spcBef>
               <a:buSzTx/>
               <a:buNone/>
-              <a:defRPr spc="-29" sz="2940">
+              <a:defRPr sz="2940" spc="-29">
                 <a:solidFill>
                   <a:srgbClr val="FFFFFF"/>
                 </a:solidFill>
@@ -1932,7 +1948,6 @@
             </a:lvl1pPr>
           </a:lstStyle>
           <a:p>
-            <a:pPr/>
             <a:r>
               <a:t>Автор и дата</a:t>
             </a:r>
@@ -1942,7 +1957,9 @@
       <p:sp>
         <p:nvSpPr>
           <p:cNvPr id="25" name="Номер слайда"/>
-          <p:cNvSpPr txBox="1"/>
+          <p:cNvSpPr txBox="1">
+            <a:spLocks noGrp="1"/>
+          </p:cNvSpPr>
           <p:nvPr>
             <p:ph type="sldNum" sz="quarter" idx="2"/>
           </p:nvPr>
@@ -1964,8 +1981,10 @@
             </a:lvl1pPr>
           </a:lstStyle>
           <a:p>
-            <a:pPr/>
-            <a:fld id="{86CB4B4D-7CA3-9044-876B-883B54F8677D}" type="slidenum"/>
+            <a:fld id="{86CB4B4D-7CA3-9044-876B-883B54F8677D}" type="slidenum">
+              <a:t>‹#›</a:t>
+            </a:fld>
+            <a:endParaRPr/>
           </a:p>
         </p:txBody>
       </p:sp>
@@ -1974,12 +1993,12 @@
   <p:clrMapOvr>
     <a:masterClrMapping/>
   </p:clrMapOvr>
-  <p:transition xmlns:p14="http://schemas.microsoft.com/office/powerpoint/2010/main" spd="med" advClick="1"/>
+  <p:transition spd="med"/>
 </p:sldLayout>
 </file>
 
 <file path=ppt/slideLayouts/slideLayout3.xml><?xml version="1.0" encoding="utf-8"?>
-<p:sldLayout xmlns:a="http://schemas.openxmlformats.org/drawingml/2006/main" xmlns:r="http://schemas.openxmlformats.org/officeDocument/2006/relationships" xmlns:p="http://schemas.openxmlformats.org/presentationml/2006/main" xmlns:m="http://schemas.openxmlformats.org/officeDocument/2006/math" xmlns:a14="http://schemas.microsoft.com/office/drawing/2010/main" type="tx" showMasterSp="1" showMasterPhAnim="1">
+<p:sldLayout xmlns:a="http://schemas.openxmlformats.org/drawingml/2006/main" xmlns:r="http://schemas.openxmlformats.org/officeDocument/2006/relationships" xmlns:p="http://schemas.openxmlformats.org/presentationml/2006/main" type="tx">
   <p:cSld name="Заголовок и фото (вариант)">
     <p:spTree>
       <p:nvGrpSpPr>
@@ -1998,7 +2017,9 @@
       <p:sp>
         <p:nvSpPr>
           <p:cNvPr id="32" name="Заголовок слайда"/>
-          <p:cNvSpPr txBox="1"/>
+          <p:cNvSpPr txBox="1">
+            <a:spLocks noGrp="1"/>
+          </p:cNvSpPr>
           <p:nvPr>
             <p:ph type="title" hasCustomPrompt="1"/>
           </p:nvPr>
@@ -2016,7 +2037,6 @@
           <a:bodyPr anchor="b"/>
           <a:lstStyle/>
           <a:p>
-            <a:pPr/>
             <a:r>
               <a:t>Заголовок слайда</a:t>
             </a:r>
@@ -2026,7 +2046,9 @@
       <p:sp>
         <p:nvSpPr>
           <p:cNvPr id="33" name="Море и небо на закате"/>
-          <p:cNvSpPr/>
+          <p:cNvSpPr>
+            <a:spLocks noGrp="1"/>
+          </p:cNvSpPr>
           <p:nvPr>
             <p:ph type="pic" idx="21"/>
           </p:nvPr>
@@ -2046,14 +2068,16 @@
           </a:bodyPr>
           <a:lstStyle/>
           <a:p>
-            <a:pPr/>
+            <a:endParaRPr/>
           </a:p>
         </p:txBody>
       </p:sp>
       <p:sp>
         <p:nvSpPr>
           <p:cNvPr id="34" name="Уровень текста 1…"/>
-          <p:cNvSpPr txBox="1"/>
+          <p:cNvSpPr txBox="1">
+            <a:spLocks noGrp="1"/>
+          </p:cNvSpPr>
           <p:nvPr>
             <p:ph type="body" sz="quarter" idx="1" hasCustomPrompt="1"/>
           </p:nvPr>
@@ -2152,41 +2176,34 @@
             </a:lvl5pPr>
           </a:lstStyle>
           <a:p>
-            <a:pPr/>
             <a:r>
               <a:t>Подзаголовок слайда</a:t>
             </a:r>
           </a:p>
           <a:p>
             <a:pPr lvl="1"/>
-            <a:r>
-              <a:t/>
-            </a:r>
+            <a:endParaRPr/>
           </a:p>
           <a:p>
             <a:pPr lvl="2"/>
-            <a:r>
-              <a:t/>
-            </a:r>
+            <a:endParaRPr/>
           </a:p>
           <a:p>
             <a:pPr lvl="3"/>
-            <a:r>
-              <a:t/>
-            </a:r>
+            <a:endParaRPr/>
           </a:p>
           <a:p>
             <a:pPr lvl="4"/>
-            <a:r>
-              <a:t/>
-            </a:r>
+            <a:endParaRPr/>
           </a:p>
         </p:txBody>
       </p:sp>
       <p:sp>
         <p:nvSpPr>
           <p:cNvPr id="35" name="Номер слайда"/>
-          <p:cNvSpPr txBox="1"/>
+          <p:cNvSpPr txBox="1">
+            <a:spLocks noGrp="1"/>
+          </p:cNvSpPr>
           <p:nvPr>
             <p:ph type="sldNum" sz="quarter" idx="2"/>
           </p:nvPr>
@@ -2200,8 +2217,10 @@
           <a:bodyPr/>
           <a:lstStyle/>
           <a:p>
-            <a:pPr/>
-            <a:fld id="{86CB4B4D-7CA3-9044-876B-883B54F8677D}" type="slidenum"/>
+            <a:fld id="{86CB4B4D-7CA3-9044-876B-883B54F8677D}" type="slidenum">
+              <a:t>‹#›</a:t>
+            </a:fld>
+            <a:endParaRPr/>
           </a:p>
         </p:txBody>
       </p:sp>
@@ -2210,12 +2229,12 @@
   <p:clrMapOvr>
     <a:masterClrMapping/>
   </p:clrMapOvr>
-  <p:transition xmlns:p14="http://schemas.microsoft.com/office/powerpoint/2010/main" spd="med" advClick="1"/>
+  <p:transition spd="med"/>
 </p:sldLayout>
 </file>
 
 <file path=ppt/slideLayouts/slideLayout4.xml><?xml version="1.0" encoding="utf-8"?>
-<p:sldLayout xmlns:a="http://schemas.openxmlformats.org/drawingml/2006/main" xmlns:r="http://schemas.openxmlformats.org/officeDocument/2006/relationships" xmlns:p="http://schemas.openxmlformats.org/presentationml/2006/main" xmlns:m="http://schemas.openxmlformats.org/officeDocument/2006/math" xmlns:a14="http://schemas.microsoft.com/office/drawing/2010/main" type="tx" showMasterSp="1" showMasterPhAnim="1">
+<p:sldLayout xmlns:a="http://schemas.openxmlformats.org/drawingml/2006/main" xmlns:r="http://schemas.openxmlformats.org/officeDocument/2006/relationships" xmlns:p="http://schemas.openxmlformats.org/presentationml/2006/main" type="tx">
   <p:cSld name="Заголовок и пункты">
     <p:spTree>
       <p:nvGrpSpPr>
@@ -2234,7 +2253,9 @@
       <p:sp>
         <p:nvSpPr>
           <p:cNvPr id="42" name="Заголовок слайда"/>
-          <p:cNvSpPr txBox="1"/>
+          <p:cNvSpPr txBox="1">
+            <a:spLocks noGrp="1"/>
+          </p:cNvSpPr>
           <p:nvPr>
             <p:ph type="title" hasCustomPrompt="1"/>
           </p:nvPr>
@@ -2248,7 +2269,6 @@
           <a:bodyPr/>
           <a:lstStyle/>
           <a:p>
-            <a:pPr/>
             <a:r>
               <a:t>Заголовок слайда</a:t>
             </a:r>
@@ -2258,7 +2278,9 @@
       <p:sp>
         <p:nvSpPr>
           <p:cNvPr id="43" name="Уровень текста 1…"/>
-          <p:cNvSpPr txBox="1"/>
+          <p:cNvSpPr txBox="1">
+            <a:spLocks noGrp="1"/>
+          </p:cNvSpPr>
           <p:nvPr>
             <p:ph type="body" idx="1" hasCustomPrompt="1"/>
           </p:nvPr>
@@ -2272,41 +2294,34 @@
           <a:bodyPr/>
           <a:lstStyle/>
           <a:p>
-            <a:pPr/>
             <a:r>
               <a:t>Текст пункта на слайде</a:t>
             </a:r>
           </a:p>
           <a:p>
             <a:pPr lvl="1"/>
-            <a:r>
-              <a:t/>
-            </a:r>
+            <a:endParaRPr/>
           </a:p>
           <a:p>
             <a:pPr lvl="2"/>
-            <a:r>
-              <a:t/>
-            </a:r>
+            <a:endParaRPr/>
           </a:p>
           <a:p>
             <a:pPr lvl="3"/>
-            <a:r>
-              <a:t/>
-            </a:r>
+            <a:endParaRPr/>
           </a:p>
           <a:p>
             <a:pPr lvl="4"/>
-            <a:r>
-              <a:t/>
-            </a:r>
+            <a:endParaRPr/>
           </a:p>
         </p:txBody>
       </p:sp>
       <p:sp>
         <p:nvSpPr>
           <p:cNvPr id="44" name="Подзаголовок слайда"/>
-          <p:cNvSpPr txBox="1"/>
+          <p:cNvSpPr txBox="1">
+            <a:spLocks noGrp="1"/>
+          </p:cNvSpPr>
           <p:nvPr>
             <p:ph type="body" sz="quarter" idx="21" hasCustomPrompt="1"/>
           </p:nvPr>
@@ -2332,7 +2347,7 @@
               </a:spcBef>
               <a:buSzTx/>
               <a:buNone/>
-              <a:defRPr spc="-42" sz="4224">
+              <a:defRPr sz="4224" spc="-42">
                 <a:latin typeface="Avenir Next Demi Bold"/>
                 <a:ea typeface="Avenir Next Demi Bold"/>
                 <a:cs typeface="Avenir Next Demi Bold"/>
@@ -2341,7 +2356,6 @@
             </a:lvl1pPr>
           </a:lstStyle>
           <a:p>
-            <a:pPr/>
             <a:r>
               <a:t>Подзаголовок слайда</a:t>
             </a:r>
@@ -2351,7 +2365,9 @@
       <p:sp>
         <p:nvSpPr>
           <p:cNvPr id="45" name="Номер слайда"/>
-          <p:cNvSpPr txBox="1"/>
+          <p:cNvSpPr txBox="1">
+            <a:spLocks noGrp="1"/>
+          </p:cNvSpPr>
           <p:nvPr>
             <p:ph type="sldNum" sz="quarter" idx="2"/>
           </p:nvPr>
@@ -2365,8 +2381,10 @@
           <a:bodyPr/>
           <a:lstStyle/>
           <a:p>
-            <a:pPr/>
-            <a:fld id="{86CB4B4D-7CA3-9044-876B-883B54F8677D}" type="slidenum"/>
+            <a:fld id="{86CB4B4D-7CA3-9044-876B-883B54F8677D}" type="slidenum">
+              <a:t>‹#›</a:t>
+            </a:fld>
+            <a:endParaRPr/>
           </a:p>
         </p:txBody>
       </p:sp>
@@ -2375,12 +2393,12 @@
   <p:clrMapOvr>
     <a:masterClrMapping/>
   </p:clrMapOvr>
-  <p:transition xmlns:p14="http://schemas.microsoft.com/office/powerpoint/2010/main" spd="med" advClick="1"/>
+  <p:transition spd="med"/>
 </p:sldLayout>
 </file>
 
 <file path=ppt/slideLayouts/slideLayout5.xml><?xml version="1.0" encoding="utf-8"?>
-<p:sldLayout xmlns:a="http://schemas.openxmlformats.org/drawingml/2006/main" xmlns:r="http://schemas.openxmlformats.org/officeDocument/2006/relationships" xmlns:p="http://schemas.openxmlformats.org/presentationml/2006/main" xmlns:m="http://schemas.openxmlformats.org/officeDocument/2006/math" xmlns:a14="http://schemas.microsoft.com/office/drawing/2010/main" type="tx" showMasterSp="1" showMasterPhAnim="1">
+<p:sldLayout xmlns:a="http://schemas.openxmlformats.org/drawingml/2006/main" xmlns:r="http://schemas.openxmlformats.org/officeDocument/2006/relationships" xmlns:p="http://schemas.openxmlformats.org/presentationml/2006/main" type="tx">
   <p:cSld name="Пункты">
     <p:spTree>
       <p:nvGrpSpPr>
@@ -2399,7 +2417,9 @@
       <p:sp>
         <p:nvSpPr>
           <p:cNvPr id="52" name="Уровень текста 1…"/>
-          <p:cNvSpPr txBox="1"/>
+          <p:cNvSpPr txBox="1">
+            <a:spLocks noGrp="1"/>
+          </p:cNvSpPr>
           <p:nvPr>
             <p:ph type="body" idx="1" hasCustomPrompt="1"/>
           </p:nvPr>
@@ -2417,41 +2437,34 @@
           <a:bodyPr numCol="2" spcCol="2558384"/>
           <a:lstStyle/>
           <a:p>
-            <a:pPr/>
             <a:r>
               <a:t>Текст пункта на слайде</a:t>
             </a:r>
           </a:p>
           <a:p>
             <a:pPr lvl="1"/>
-            <a:r>
-              <a:t/>
-            </a:r>
+            <a:endParaRPr/>
           </a:p>
           <a:p>
             <a:pPr lvl="2"/>
-            <a:r>
-              <a:t/>
-            </a:r>
+            <a:endParaRPr/>
           </a:p>
           <a:p>
             <a:pPr lvl="3"/>
-            <a:r>
-              <a:t/>
-            </a:r>
+            <a:endParaRPr/>
           </a:p>
           <a:p>
             <a:pPr lvl="4"/>
-            <a:r>
-              <a:t/>
-            </a:r>
+            <a:endParaRPr/>
           </a:p>
         </p:txBody>
       </p:sp>
       <p:sp>
         <p:nvSpPr>
           <p:cNvPr id="53" name="Номер слайда"/>
-          <p:cNvSpPr txBox="1"/>
+          <p:cNvSpPr txBox="1">
+            <a:spLocks noGrp="1"/>
+          </p:cNvSpPr>
           <p:nvPr>
             <p:ph type="sldNum" sz="quarter" idx="2"/>
           </p:nvPr>
@@ -2469,8 +2482,10 @@
           <a:bodyPr/>
           <a:lstStyle/>
           <a:p>
-            <a:pPr/>
-            <a:fld id="{86CB4B4D-7CA3-9044-876B-883B54F8677D}" type="slidenum"/>
+            <a:fld id="{86CB4B4D-7CA3-9044-876B-883B54F8677D}" type="slidenum">
+              <a:t>‹#›</a:t>
+            </a:fld>
+            <a:endParaRPr/>
           </a:p>
         </p:txBody>
       </p:sp>
@@ -2479,12 +2494,12 @@
   <p:clrMapOvr>
     <a:masterClrMapping/>
   </p:clrMapOvr>
-  <p:transition xmlns:p14="http://schemas.microsoft.com/office/powerpoint/2010/main" spd="med" advClick="1"/>
+  <p:transition spd="med"/>
 </p:sldLayout>
 </file>
 
 <file path=ppt/slideLayouts/slideLayout6.xml><?xml version="1.0" encoding="utf-8"?>
-<p:sldLayout xmlns:a="http://schemas.openxmlformats.org/drawingml/2006/main" xmlns:r="http://schemas.openxmlformats.org/officeDocument/2006/relationships" xmlns:p="http://schemas.openxmlformats.org/presentationml/2006/main" xmlns:m="http://schemas.openxmlformats.org/officeDocument/2006/math" xmlns:a14="http://schemas.microsoft.com/office/drawing/2010/main" type="tx" showMasterSp="1" showMasterPhAnim="1">
+<p:sldLayout xmlns:a="http://schemas.openxmlformats.org/drawingml/2006/main" xmlns:r="http://schemas.openxmlformats.org/officeDocument/2006/relationships" xmlns:p="http://schemas.openxmlformats.org/presentationml/2006/main" type="tx">
   <p:cSld name="Заголовок, пункты и фото">
     <p:spTree>
       <p:nvGrpSpPr>
@@ -2503,7 +2518,9 @@
       <p:sp>
         <p:nvSpPr>
           <p:cNvPr id="60" name="Заголовок слайда"/>
-          <p:cNvSpPr txBox="1"/>
+          <p:cNvSpPr txBox="1">
+            <a:spLocks noGrp="1"/>
+          </p:cNvSpPr>
           <p:nvPr>
             <p:ph type="title" hasCustomPrompt="1"/>
           </p:nvPr>
@@ -2521,7 +2538,6 @@
           <a:bodyPr/>
           <a:lstStyle/>
           <a:p>
-            <a:pPr/>
             <a:r>
               <a:t>Заголовок слайда</a:t>
             </a:r>
@@ -2531,7 +2547,9 @@
       <p:sp>
         <p:nvSpPr>
           <p:cNvPr id="61" name="Море и небо на закате"/>
-          <p:cNvSpPr/>
+          <p:cNvSpPr>
+            <a:spLocks noGrp="1"/>
+          </p:cNvSpPr>
           <p:nvPr>
             <p:ph type="pic" idx="21"/>
           </p:nvPr>
@@ -2551,14 +2569,16 @@
           </a:bodyPr>
           <a:lstStyle/>
           <a:p>
-            <a:pPr/>
+            <a:endParaRPr/>
           </a:p>
         </p:txBody>
       </p:sp>
       <p:sp>
         <p:nvSpPr>
           <p:cNvPr id="62" name="Подзаголовок слайда"/>
-          <p:cNvSpPr txBox="1"/>
+          <p:cNvSpPr txBox="1">
+            <a:spLocks noGrp="1"/>
+          </p:cNvSpPr>
           <p:nvPr>
             <p:ph type="body" sz="quarter" idx="22" hasCustomPrompt="1"/>
           </p:nvPr>
@@ -2584,7 +2604,7 @@
               </a:spcBef>
               <a:buSzTx/>
               <a:buNone/>
-              <a:defRPr spc="-42" sz="4224">
+              <a:defRPr sz="4224" spc="-42">
                 <a:latin typeface="Avenir Next Demi Bold"/>
                 <a:ea typeface="Avenir Next Demi Bold"/>
                 <a:cs typeface="Avenir Next Demi Bold"/>
@@ -2593,7 +2613,6 @@
             </a:lvl1pPr>
           </a:lstStyle>
           <a:p>
-            <a:pPr/>
             <a:r>
               <a:t>Подзаголовок слайда</a:t>
             </a:r>
@@ -2603,7 +2622,9 @@
       <p:sp>
         <p:nvSpPr>
           <p:cNvPr id="63" name="Уровень текста 1…"/>
-          <p:cNvSpPr txBox="1"/>
+          <p:cNvSpPr txBox="1">
+            <a:spLocks noGrp="1"/>
+          </p:cNvSpPr>
           <p:nvPr>
             <p:ph type="body" sz="half" idx="1" hasCustomPrompt="1"/>
           </p:nvPr>
@@ -2621,41 +2642,34 @@
           <a:bodyPr/>
           <a:lstStyle/>
           <a:p>
-            <a:pPr/>
             <a:r>
               <a:t>Текст пункта на слайде</a:t>
             </a:r>
           </a:p>
           <a:p>
             <a:pPr lvl="1"/>
-            <a:r>
-              <a:t/>
-            </a:r>
+            <a:endParaRPr/>
           </a:p>
           <a:p>
             <a:pPr lvl="2"/>
-            <a:r>
-              <a:t/>
-            </a:r>
+            <a:endParaRPr/>
           </a:p>
           <a:p>
             <a:pPr lvl="3"/>
-            <a:r>
-              <a:t/>
-            </a:r>
+            <a:endParaRPr/>
           </a:p>
           <a:p>
             <a:pPr lvl="4"/>
-            <a:r>
-              <a:t/>
-            </a:r>
+            <a:endParaRPr/>
           </a:p>
         </p:txBody>
       </p:sp>
       <p:sp>
         <p:nvSpPr>
           <p:cNvPr id="64" name="Номер слайда"/>
-          <p:cNvSpPr txBox="1"/>
+          <p:cNvSpPr txBox="1">
+            <a:spLocks noGrp="1"/>
+          </p:cNvSpPr>
           <p:nvPr>
             <p:ph type="sldNum" sz="quarter" idx="2"/>
           </p:nvPr>
@@ -2673,8 +2687,10 @@
           <a:bodyPr/>
           <a:lstStyle/>
           <a:p>
-            <a:pPr/>
-            <a:fld id="{86CB4B4D-7CA3-9044-876B-883B54F8677D}" type="slidenum"/>
+            <a:fld id="{86CB4B4D-7CA3-9044-876B-883B54F8677D}" type="slidenum">
+              <a:t>‹#›</a:t>
+            </a:fld>
+            <a:endParaRPr/>
           </a:p>
         </p:txBody>
       </p:sp>
@@ -2683,12 +2699,12 @@
   <p:clrMapOvr>
     <a:masterClrMapping/>
   </p:clrMapOvr>
-  <p:transition xmlns:p14="http://schemas.microsoft.com/office/powerpoint/2010/main" spd="med" advClick="1"/>
+  <p:transition spd="med"/>
 </p:sldLayout>
 </file>
 
 <file path=ppt/slideLayouts/slideLayout7.xml><?xml version="1.0" encoding="utf-8"?>
-<p:sldLayout xmlns:a="http://schemas.openxmlformats.org/drawingml/2006/main" xmlns:r="http://schemas.openxmlformats.org/officeDocument/2006/relationships" xmlns:p="http://schemas.openxmlformats.org/presentationml/2006/main" xmlns:m="http://schemas.openxmlformats.org/officeDocument/2006/math" xmlns:a14="http://schemas.microsoft.com/office/drawing/2010/main" type="tx" showMasterSp="1" showMasterPhAnim="1">
+<p:sldLayout xmlns:a="http://schemas.openxmlformats.org/drawingml/2006/main" xmlns:r="http://schemas.openxmlformats.org/officeDocument/2006/relationships" xmlns:p="http://schemas.openxmlformats.org/presentationml/2006/main" type="tx">
   <p:cSld name="Раздел">
     <p:spTree>
       <p:nvGrpSpPr>
@@ -2707,7 +2723,9 @@
       <p:sp>
         <p:nvSpPr>
           <p:cNvPr id="71" name="Заголовок раздела"/>
-          <p:cNvSpPr txBox="1"/>
+          <p:cNvSpPr txBox="1">
+            <a:spLocks noGrp="1"/>
+          </p:cNvSpPr>
           <p:nvPr>
             <p:ph type="title" hasCustomPrompt="1"/>
           </p:nvPr>
@@ -2725,11 +2743,10 @@
           <a:bodyPr anchor="ctr"/>
           <a:lstStyle>
             <a:lvl1pPr>
-              <a:defRPr spc="0" sz="12800"/>
+              <a:defRPr sz="12800" spc="0"/>
             </a:lvl1pPr>
           </a:lstStyle>
           <a:p>
-            <a:pPr/>
             <a:r>
               <a:t>Заголовок раздела</a:t>
             </a:r>
@@ -2739,7 +2756,9 @@
       <p:sp>
         <p:nvSpPr>
           <p:cNvPr id="72" name="Номер слайда"/>
-          <p:cNvSpPr txBox="1"/>
+          <p:cNvSpPr txBox="1">
+            <a:spLocks noGrp="1"/>
+          </p:cNvSpPr>
           <p:nvPr>
             <p:ph type="sldNum" sz="quarter" idx="2"/>
           </p:nvPr>
@@ -2757,8 +2776,10 @@
           <a:bodyPr/>
           <a:lstStyle/>
           <a:p>
-            <a:pPr/>
-            <a:fld id="{86CB4B4D-7CA3-9044-876B-883B54F8677D}" type="slidenum"/>
+            <a:fld id="{86CB4B4D-7CA3-9044-876B-883B54F8677D}" type="slidenum">
+              <a:t>‹#›</a:t>
+            </a:fld>
+            <a:endParaRPr/>
           </a:p>
         </p:txBody>
       </p:sp>
@@ -2767,12 +2788,12 @@
   <p:clrMapOvr>
     <a:masterClrMapping/>
   </p:clrMapOvr>
-  <p:transition xmlns:p14="http://schemas.microsoft.com/office/powerpoint/2010/main" spd="med" advClick="1"/>
+  <p:transition spd="med"/>
 </p:sldLayout>
 </file>
 
 <file path=ppt/slideLayouts/slideLayout8.xml><?xml version="1.0" encoding="utf-8"?>
-<p:sldLayout xmlns:a="http://schemas.openxmlformats.org/drawingml/2006/main" xmlns:r="http://schemas.openxmlformats.org/officeDocument/2006/relationships" xmlns:p="http://schemas.openxmlformats.org/presentationml/2006/main" xmlns:m="http://schemas.openxmlformats.org/officeDocument/2006/math" xmlns:a14="http://schemas.microsoft.com/office/drawing/2010/main" type="tx" showMasterSp="1" showMasterPhAnim="1">
+<p:sldLayout xmlns:a="http://schemas.openxmlformats.org/drawingml/2006/main" xmlns:r="http://schemas.openxmlformats.org/officeDocument/2006/relationships" xmlns:p="http://schemas.openxmlformats.org/presentationml/2006/main" type="tx">
   <p:cSld name="Только заголовок">
     <p:spTree>
       <p:nvGrpSpPr>
@@ -2791,7 +2812,9 @@
       <p:sp>
         <p:nvSpPr>
           <p:cNvPr id="79" name="Заголовок слайда"/>
-          <p:cNvSpPr txBox="1"/>
+          <p:cNvSpPr txBox="1">
+            <a:spLocks noGrp="1"/>
+          </p:cNvSpPr>
           <p:nvPr>
             <p:ph type="title" hasCustomPrompt="1"/>
           </p:nvPr>
@@ -2805,7 +2828,6 @@
           <a:bodyPr/>
           <a:lstStyle/>
           <a:p>
-            <a:pPr/>
             <a:r>
               <a:t>Заголовок слайда</a:t>
             </a:r>
@@ -2815,7 +2837,9 @@
       <p:sp>
         <p:nvSpPr>
           <p:cNvPr id="80" name="Подзаголовок слайда"/>
-          <p:cNvSpPr txBox="1"/>
+          <p:cNvSpPr txBox="1">
+            <a:spLocks noGrp="1"/>
+          </p:cNvSpPr>
           <p:nvPr>
             <p:ph type="body" sz="quarter" idx="21" hasCustomPrompt="1"/>
           </p:nvPr>
@@ -2841,7 +2865,7 @@
               </a:spcBef>
               <a:buSzTx/>
               <a:buNone/>
-              <a:defRPr spc="-42" sz="4224">
+              <a:defRPr sz="4224" spc="-42">
                 <a:latin typeface="Avenir Next Demi Bold"/>
                 <a:ea typeface="Avenir Next Demi Bold"/>
                 <a:cs typeface="Avenir Next Demi Bold"/>
@@ -2850,7 +2874,6 @@
             </a:lvl1pPr>
           </a:lstStyle>
           <a:p>
-            <a:pPr/>
             <a:r>
               <a:t>Подзаголовок слайда</a:t>
             </a:r>
@@ -2860,7 +2883,9 @@
       <p:sp>
         <p:nvSpPr>
           <p:cNvPr id="81" name="Номер слайда"/>
-          <p:cNvSpPr txBox="1"/>
+          <p:cNvSpPr txBox="1">
+            <a:spLocks noGrp="1"/>
+          </p:cNvSpPr>
           <p:nvPr>
             <p:ph type="sldNum" sz="quarter" idx="2"/>
           </p:nvPr>
@@ -2878,8 +2903,10 @@
           <a:bodyPr/>
           <a:lstStyle/>
           <a:p>
-            <a:pPr/>
-            <a:fld id="{86CB4B4D-7CA3-9044-876B-883B54F8677D}" type="slidenum"/>
+            <a:fld id="{86CB4B4D-7CA3-9044-876B-883B54F8677D}" type="slidenum">
+              <a:t>‹#›</a:t>
+            </a:fld>
+            <a:endParaRPr/>
           </a:p>
         </p:txBody>
       </p:sp>
@@ -2888,12 +2915,12 @@
   <p:clrMapOvr>
     <a:masterClrMapping/>
   </p:clrMapOvr>
-  <p:transition xmlns:p14="http://schemas.microsoft.com/office/powerpoint/2010/main" spd="med" advClick="1"/>
+  <p:transition spd="med"/>
 </p:sldLayout>
 </file>
 
 <file path=ppt/slideLayouts/slideLayout9.xml><?xml version="1.0" encoding="utf-8"?>
-<p:sldLayout xmlns:a="http://schemas.openxmlformats.org/drawingml/2006/main" xmlns:r="http://schemas.openxmlformats.org/officeDocument/2006/relationships" xmlns:p="http://schemas.openxmlformats.org/presentationml/2006/main" xmlns:m="http://schemas.openxmlformats.org/officeDocument/2006/math" xmlns:a14="http://schemas.microsoft.com/office/drawing/2010/main" type="tx" showMasterSp="1" showMasterPhAnim="1">
+<p:sldLayout xmlns:a="http://schemas.openxmlformats.org/drawingml/2006/main" xmlns:r="http://schemas.openxmlformats.org/officeDocument/2006/relationships" xmlns:p="http://schemas.openxmlformats.org/presentationml/2006/main" type="tx">
   <p:cSld name="Повестка дня">
     <p:spTree>
       <p:nvGrpSpPr>
@@ -2912,7 +2939,9 @@
       <p:sp>
         <p:nvSpPr>
           <p:cNvPr id="88" name="Заголовок повестки дня"/>
-          <p:cNvSpPr txBox="1"/>
+          <p:cNvSpPr txBox="1">
+            <a:spLocks noGrp="1"/>
+          </p:cNvSpPr>
           <p:nvPr>
             <p:ph type="title" hasCustomPrompt="1"/>
           </p:nvPr>
@@ -2926,7 +2955,6 @@
           <a:bodyPr/>
           <a:lstStyle/>
           <a:p>
-            <a:pPr/>
             <a:r>
               <a:t>Заголовок повестки дня</a:t>
             </a:r>
@@ -2936,7 +2964,9 @@
       <p:sp>
         <p:nvSpPr>
           <p:cNvPr id="89" name="Уровень текста 1…"/>
-          <p:cNvSpPr txBox="1"/>
+          <p:cNvSpPr txBox="1">
+            <a:spLocks noGrp="1"/>
+          </p:cNvSpPr>
           <p:nvPr>
             <p:ph type="body" idx="1" hasCustomPrompt="1"/>
           </p:nvPr>
@@ -2959,7 +2989,7 @@
               </a:lnSpc>
               <a:buSzTx/>
               <a:buNone/>
-              <a:defRPr spc="-136" sz="6800">
+              <a:defRPr sz="6800" spc="-136">
                 <a:latin typeface="Canela Deck Regular"/>
                 <a:ea typeface="Canela Deck Regular"/>
                 <a:cs typeface="Canela Deck Regular"/>
@@ -2972,7 +3002,7 @@
               </a:lnSpc>
               <a:buSzTx/>
               <a:buNone/>
-              <a:defRPr spc="-136" sz="6800">
+              <a:defRPr sz="6800" spc="-136">
                 <a:latin typeface="Canela Deck Regular"/>
                 <a:ea typeface="Canela Deck Regular"/>
                 <a:cs typeface="Canela Deck Regular"/>
@@ -2985,7 +3015,7 @@
               </a:lnSpc>
               <a:buSzTx/>
               <a:buNone/>
-              <a:defRPr spc="-136" sz="6800">
+              <a:defRPr sz="6800" spc="-136">
                 <a:latin typeface="Canela Deck Regular"/>
                 <a:ea typeface="Canela Deck Regular"/>
                 <a:cs typeface="Canela Deck Regular"/>
@@ -2998,7 +3028,7 @@
               </a:lnSpc>
               <a:buSzTx/>
               <a:buNone/>
-              <a:defRPr spc="-136" sz="6800">
+              <a:defRPr sz="6800" spc="-136">
                 <a:latin typeface="Canela Deck Regular"/>
                 <a:ea typeface="Canela Deck Regular"/>
                 <a:cs typeface="Canela Deck Regular"/>
@@ -3011,7 +3041,7 @@
               </a:lnSpc>
               <a:buSzTx/>
               <a:buNone/>
-              <a:defRPr spc="-136" sz="6800">
+              <a:defRPr sz="6800" spc="-136">
                 <a:latin typeface="Canela Deck Regular"/>
                 <a:ea typeface="Canela Deck Regular"/>
                 <a:cs typeface="Canela Deck Regular"/>
@@ -3020,41 +3050,34 @@
             </a:lvl5pPr>
           </a:lstStyle>
           <a:p>
-            <a:pPr/>
             <a:r>
               <a:t>Темы повестки дня</a:t>
             </a:r>
           </a:p>
           <a:p>
             <a:pPr lvl="1"/>
-            <a:r>
-              <a:t/>
-            </a:r>
+            <a:endParaRPr/>
           </a:p>
           <a:p>
             <a:pPr lvl="2"/>
-            <a:r>
-              <a:t/>
-            </a:r>
+            <a:endParaRPr/>
           </a:p>
           <a:p>
             <a:pPr lvl="3"/>
-            <a:r>
-              <a:t/>
-            </a:r>
+            <a:endParaRPr/>
           </a:p>
           <a:p>
             <a:pPr lvl="4"/>
-            <a:r>
-              <a:t/>
-            </a:r>
+            <a:endParaRPr/>
           </a:p>
         </p:txBody>
       </p:sp>
       <p:sp>
         <p:nvSpPr>
           <p:cNvPr id="90" name="Подзаголовок повестки дня"/>
-          <p:cNvSpPr txBox="1"/>
+          <p:cNvSpPr txBox="1">
+            <a:spLocks noGrp="1"/>
+          </p:cNvSpPr>
           <p:nvPr>
             <p:ph type="body" sz="quarter" idx="21" hasCustomPrompt="1"/>
           </p:nvPr>
@@ -3080,7 +3103,7 @@
               </a:spcBef>
               <a:buSzTx/>
               <a:buNone/>
-              <a:defRPr spc="-42" sz="4224">
+              <a:defRPr sz="4224" spc="-42">
                 <a:latin typeface="Avenir Next Demi Bold"/>
                 <a:ea typeface="Avenir Next Demi Bold"/>
                 <a:cs typeface="Avenir Next Demi Bold"/>
@@ -3089,7 +3112,6 @@
             </a:lvl1pPr>
           </a:lstStyle>
           <a:p>
-            <a:pPr/>
             <a:r>
               <a:t>Подзаголовок повестки дня</a:t>
             </a:r>
@@ -3099,7 +3121,9 @@
       <p:sp>
         <p:nvSpPr>
           <p:cNvPr id="91" name="Номер слайда"/>
-          <p:cNvSpPr txBox="1"/>
+          <p:cNvSpPr txBox="1">
+            <a:spLocks noGrp="1"/>
+          </p:cNvSpPr>
           <p:nvPr>
             <p:ph type="sldNum" sz="quarter" idx="2"/>
           </p:nvPr>
@@ -3117,8 +3141,10 @@
           <a:bodyPr/>
           <a:lstStyle/>
           <a:p>
-            <a:pPr/>
-            <a:fld id="{86CB4B4D-7CA3-9044-876B-883B54F8677D}" type="slidenum"/>
+            <a:fld id="{86CB4B4D-7CA3-9044-876B-883B54F8677D}" type="slidenum">
+              <a:t>‹#›</a:t>
+            </a:fld>
+            <a:endParaRPr/>
           </a:p>
         </p:txBody>
       </p:sp>
@@ -3127,18 +3153,19 @@
   <p:clrMapOvr>
     <a:masterClrMapping/>
   </p:clrMapOvr>
-  <p:transition xmlns:p14="http://schemas.microsoft.com/office/powerpoint/2010/main" spd="med" advClick="1"/>
+  <p:transition spd="med"/>
 </p:sldLayout>
 </file>
 
 <file path=ppt/slideMasters/slideMaster1.xml><?xml version="1.0" encoding="utf-8"?>
-<p:sldMaster xmlns:a="http://schemas.openxmlformats.org/drawingml/2006/main" xmlns:r="http://schemas.openxmlformats.org/officeDocument/2006/relationships" xmlns:p="http://schemas.openxmlformats.org/presentationml/2006/main" xmlns:m="http://schemas.openxmlformats.org/officeDocument/2006/math" xmlns:a14="http://schemas.microsoft.com/office/drawing/2010/main">
+<p:sldMaster xmlns:a="http://schemas.openxmlformats.org/drawingml/2006/main" xmlns:r="http://schemas.openxmlformats.org/officeDocument/2006/relationships" xmlns:p="http://schemas.openxmlformats.org/presentationml/2006/main">
   <p:cSld>
     <p:bg>
       <p:bgPr>
         <a:solidFill>
           <a:srgbClr val="FFFFFF"/>
         </a:solidFill>
+        <a:effectLst/>
       </p:bgPr>
     </p:bg>
     <p:spTree>
@@ -3158,7 +3185,9 @@
       <p:sp>
         <p:nvSpPr>
           <p:cNvPr id="2" name="Заголовок слайда"/>
-          <p:cNvSpPr txBox="1"/>
+          <p:cNvSpPr txBox="1">
+            <a:spLocks noGrp="1"/>
+          </p:cNvSpPr>
           <p:nvPr>
             <p:ph type="title" hasCustomPrompt="1"/>
           </p:nvPr>
@@ -3176,17 +3205,16 @@
           </a:ln>
           <a:extLst>
             <a:ext uri="{C572A759-6A51-4108-AA02-DFA0A04FC94B}">
-              <ma14:wrappingTextBoxFlag xmlns:ma14="http://schemas.microsoft.com/office/mac/drawingml/2011/main" val="1"/>
+              <ma14:wrappingTextBoxFlag xmlns:ma14="http://schemas.microsoft.com/office/mac/drawingml/2011/main" xmlns:a14="http://schemas.microsoft.com/office/drawing/2010/main" xmlns:m="http://schemas.openxmlformats.org/officeDocument/2006/math" xmlns="" val="1"/>
             </a:ext>
           </a:extLst>
         </p:spPr>
         <p:txBody>
           <a:bodyPr lIns="50800" tIns="50800" rIns="50800" bIns="50800">
-            <a:normAutofit fontScale="100000" lnSpcReduction="0"/>
+            <a:normAutofit/>
           </a:bodyPr>
           <a:lstStyle/>
           <a:p>
-            <a:pPr/>
             <a:r>
               <a:t>Заголовок слайда</a:t>
             </a:r>
@@ -3196,7 +3224,9 @@
       <p:sp>
         <p:nvSpPr>
           <p:cNvPr id="3" name="Уровень текста 1…"/>
-          <p:cNvSpPr txBox="1"/>
+          <p:cNvSpPr txBox="1">
+            <a:spLocks noGrp="1"/>
+          </p:cNvSpPr>
           <p:nvPr>
             <p:ph type="body" idx="1" hasCustomPrompt="1"/>
           </p:nvPr>
@@ -3214,51 +3244,44 @@
           </a:ln>
           <a:extLst>
             <a:ext uri="{C572A759-6A51-4108-AA02-DFA0A04FC94B}">
-              <ma14:wrappingTextBoxFlag xmlns:ma14="http://schemas.microsoft.com/office/mac/drawingml/2011/main" val="1"/>
+              <ma14:wrappingTextBoxFlag xmlns:ma14="http://schemas.microsoft.com/office/mac/drawingml/2011/main" xmlns:a14="http://schemas.microsoft.com/office/drawing/2010/main" xmlns:m="http://schemas.openxmlformats.org/officeDocument/2006/math" xmlns="" val="1"/>
             </a:ext>
           </a:extLst>
         </p:spPr>
         <p:txBody>
           <a:bodyPr lIns="50800" tIns="50800" rIns="50800" bIns="50800">
-            <a:normAutofit fontScale="100000" lnSpcReduction="0"/>
+            <a:normAutofit/>
           </a:bodyPr>
           <a:lstStyle/>
           <a:p>
-            <a:pPr/>
             <a:r>
               <a:t>Текст пункта на слайде</a:t>
             </a:r>
           </a:p>
           <a:p>
             <a:pPr lvl="1"/>
-            <a:r>
-              <a:t/>
-            </a:r>
+            <a:endParaRPr/>
           </a:p>
           <a:p>
             <a:pPr lvl="2"/>
-            <a:r>
-              <a:t/>
-            </a:r>
+            <a:endParaRPr/>
           </a:p>
           <a:p>
             <a:pPr lvl="3"/>
-            <a:r>
-              <a:t/>
-            </a:r>
+            <a:endParaRPr/>
           </a:p>
           <a:p>
             <a:pPr lvl="4"/>
-            <a:r>
-              <a:t/>
-            </a:r>
+            <a:endParaRPr/>
           </a:p>
         </p:txBody>
       </p:sp>
       <p:sp>
         <p:nvSpPr>
           <p:cNvPr id="4" name="Номер слайда"/>
-          <p:cNvSpPr txBox="1"/>
+          <p:cNvSpPr txBox="1">
+            <a:spLocks noGrp="1"/>
+          </p:cNvSpPr>
           <p:nvPr>
             <p:ph type="sldNum" sz="quarter" idx="2"/>
           </p:nvPr>
@@ -3296,8 +3319,10 @@
             </a:lvl1pPr>
           </a:lstStyle>
           <a:p>
-            <a:pPr/>
-            <a:fld id="{86CB4B4D-7CA3-9044-876B-883B54F8677D}" type="slidenum"/>
+            <a:fld id="{86CB4B4D-7CA3-9044-876B-883B54F8677D}" type="slidenum">
+              <a:t>‹#›</a:t>
+            </a:fld>
+            <a:endParaRPr/>
           </a:p>
         </p:txBody>
       </p:sp>
@@ -3305,23 +3330,23 @@
   </p:cSld>
   <p:clrMap bg1="lt1" tx1="dk1" bg2="lt2" tx2="dk2" accent1="accent1" accent2="accent2" accent3="accent3" accent4="accent4" accent5="accent5" accent6="accent6" hlink="hlink" folHlink="folHlink"/>
   <p:sldLayoutIdLst>
-    <p:sldLayoutId id="2147483649" r:id="rId2"/>
-    <p:sldLayoutId id="2147483650" r:id="rId3"/>
-    <p:sldLayoutId id="2147483651" r:id="rId4"/>
-    <p:sldLayoutId id="2147483652" r:id="rId5"/>
-    <p:sldLayoutId id="2147483653" r:id="rId6"/>
-    <p:sldLayoutId id="2147483654" r:id="rId7"/>
-    <p:sldLayoutId id="2147483655" r:id="rId8"/>
-    <p:sldLayoutId id="2147483656" r:id="rId9"/>
-    <p:sldLayoutId id="2147483657" r:id="rId10"/>
-    <p:sldLayoutId id="2147483658" r:id="rId11"/>
-    <p:sldLayoutId id="2147483659" r:id="rId12"/>
-    <p:sldLayoutId id="2147483660" r:id="rId13"/>
-    <p:sldLayoutId id="2147483661" r:id="rId14"/>
-    <p:sldLayoutId id="2147483662" r:id="rId15"/>
-    <p:sldLayoutId id="2147483663" r:id="rId16"/>
+    <p:sldLayoutId id="2147483649" r:id="rId1"/>
+    <p:sldLayoutId id="2147483650" r:id="rId2"/>
+    <p:sldLayoutId id="2147483651" r:id="rId3"/>
+    <p:sldLayoutId id="2147483652" r:id="rId4"/>
+    <p:sldLayoutId id="2147483653" r:id="rId5"/>
+    <p:sldLayoutId id="2147483654" r:id="rId6"/>
+    <p:sldLayoutId id="2147483655" r:id="rId7"/>
+    <p:sldLayoutId id="2147483656" r:id="rId8"/>
+    <p:sldLayoutId id="2147483657" r:id="rId9"/>
+    <p:sldLayoutId id="2147483658" r:id="rId10"/>
+    <p:sldLayoutId id="2147483659" r:id="rId11"/>
+    <p:sldLayoutId id="2147483660" r:id="rId12"/>
+    <p:sldLayoutId id="2147483661" r:id="rId13"/>
+    <p:sldLayoutId id="2147483662" r:id="rId14"/>
+    <p:sldLayoutId id="2147483663" r:id="rId15"/>
   </p:sldLayoutIdLst>
-  <p:transition xmlns:p14="http://schemas.microsoft.com/office/powerpoint/2010/main" spd="med" advClick="1"/>
+  <p:transition spd="med"/>
   <p:txStyles>
     <p:titleStyle>
       <a:lvl1pPr marL="0" marR="0" indent="0" algn="ctr" defTabSz="2438400" rtl="0" latinLnBrk="0">
@@ -3339,7 +3364,7 @@
         <a:buFontTx/>
         <a:buNone/>
         <a:tabLst/>
-        <a:defRPr b="0" baseline="0" cap="none" i="0" spc="-84" strike="noStrike" sz="8400" u="none">
+        <a:defRPr sz="8400" b="0" i="0" u="none" strike="noStrike" cap="none" spc="-84" baseline="0">
           <a:solidFill>
             <a:srgbClr val="000000"/>
           </a:solidFill>
@@ -3365,7 +3390,7 @@
         <a:buFontTx/>
         <a:buNone/>
         <a:tabLst/>
-        <a:defRPr b="0" baseline="0" cap="none" i="0" spc="-84" strike="noStrike" sz="8400" u="none">
+        <a:defRPr sz="8400" b="0" i="0" u="none" strike="noStrike" cap="none" spc="-84" baseline="0">
           <a:solidFill>
             <a:srgbClr val="000000"/>
           </a:solidFill>
@@ -3391,7 +3416,7 @@
         <a:buFontTx/>
         <a:buNone/>
         <a:tabLst/>
-        <a:defRPr b="0" baseline="0" cap="none" i="0" spc="-84" strike="noStrike" sz="8400" u="none">
+        <a:defRPr sz="8400" b="0" i="0" u="none" strike="noStrike" cap="none" spc="-84" baseline="0">
           <a:solidFill>
             <a:srgbClr val="000000"/>
           </a:solidFill>
@@ -3417,7 +3442,7 @@
         <a:buFontTx/>
         <a:buNone/>
         <a:tabLst/>
-        <a:defRPr b="0" baseline="0" cap="none" i="0" spc="-84" strike="noStrike" sz="8400" u="none">
+        <a:defRPr sz="8400" b="0" i="0" u="none" strike="noStrike" cap="none" spc="-84" baseline="0">
           <a:solidFill>
             <a:srgbClr val="000000"/>
           </a:solidFill>
@@ -3443,7 +3468,7 @@
         <a:buFontTx/>
         <a:buNone/>
         <a:tabLst/>
-        <a:defRPr b="0" baseline="0" cap="none" i="0" spc="-84" strike="noStrike" sz="8400" u="none">
+        <a:defRPr sz="8400" b="0" i="0" u="none" strike="noStrike" cap="none" spc="-84" baseline="0">
           <a:solidFill>
             <a:srgbClr val="000000"/>
           </a:solidFill>
@@ -3469,7 +3494,7 @@
         <a:buFontTx/>
         <a:buNone/>
         <a:tabLst/>
-        <a:defRPr b="0" baseline="0" cap="none" i="0" spc="-84" strike="noStrike" sz="8400" u="none">
+        <a:defRPr sz="8400" b="0" i="0" u="none" strike="noStrike" cap="none" spc="-84" baseline="0">
           <a:solidFill>
             <a:srgbClr val="000000"/>
           </a:solidFill>
@@ -3495,7 +3520,7 @@
         <a:buFontTx/>
         <a:buNone/>
         <a:tabLst/>
-        <a:defRPr b="0" baseline="0" cap="none" i="0" spc="-84" strike="noStrike" sz="8400" u="none">
+        <a:defRPr sz="8400" b="0" i="0" u="none" strike="noStrike" cap="none" spc="-84" baseline="0">
           <a:solidFill>
             <a:srgbClr val="000000"/>
           </a:solidFill>
@@ -3521,7 +3546,7 @@
         <a:buFontTx/>
         <a:buNone/>
         <a:tabLst/>
-        <a:defRPr b="0" baseline="0" cap="none" i="0" spc="-84" strike="noStrike" sz="8400" u="none">
+        <a:defRPr sz="8400" b="0" i="0" u="none" strike="noStrike" cap="none" spc="-84" baseline="0">
           <a:solidFill>
             <a:srgbClr val="000000"/>
           </a:solidFill>
@@ -3547,7 +3572,7 @@
         <a:buFontTx/>
         <a:buNone/>
         <a:tabLst/>
-        <a:defRPr b="0" baseline="0" cap="none" i="0" spc="-84" strike="noStrike" sz="8400" u="none">
+        <a:defRPr sz="8400" b="0" i="0" u="none" strike="noStrike" cap="none" spc="-84" baseline="0">
           <a:solidFill>
             <a:srgbClr val="000000"/>
           </a:solidFill>
@@ -3575,7 +3600,7 @@
         <a:buFontTx/>
         <a:buChar char="•"/>
         <a:tabLst/>
-        <a:defRPr b="0" baseline="0" cap="none" i="0" spc="0" strike="noStrike" sz="4400" u="none">
+        <a:defRPr sz="4400" b="0" i="0" u="none" strike="noStrike" cap="none" spc="0" baseline="0">
           <a:solidFill>
             <a:srgbClr val="000000"/>
           </a:solidFill>
@@ -3601,7 +3626,7 @@
         <a:buFontTx/>
         <a:buChar char="•"/>
         <a:tabLst/>
-        <a:defRPr b="0" baseline="0" cap="none" i="0" spc="0" strike="noStrike" sz="4400" u="none">
+        <a:defRPr sz="4400" b="0" i="0" u="none" strike="noStrike" cap="none" spc="0" baseline="0">
           <a:solidFill>
             <a:srgbClr val="000000"/>
           </a:solidFill>
@@ -3627,7 +3652,7 @@
         <a:buFontTx/>
         <a:buChar char="•"/>
         <a:tabLst/>
-        <a:defRPr b="0" baseline="0" cap="none" i="0" spc="0" strike="noStrike" sz="4400" u="none">
+        <a:defRPr sz="4400" b="0" i="0" u="none" strike="noStrike" cap="none" spc="0" baseline="0">
           <a:solidFill>
             <a:srgbClr val="000000"/>
           </a:solidFill>
@@ -3653,7 +3678,7 @@
         <a:buFontTx/>
         <a:buChar char="•"/>
         <a:tabLst/>
-        <a:defRPr b="0" baseline="0" cap="none" i="0" spc="0" strike="noStrike" sz="4400" u="none">
+        <a:defRPr sz="4400" b="0" i="0" u="none" strike="noStrike" cap="none" spc="0" baseline="0">
           <a:solidFill>
             <a:srgbClr val="000000"/>
           </a:solidFill>
@@ -3679,7 +3704,7 @@
         <a:buFontTx/>
         <a:buChar char="•"/>
         <a:tabLst/>
-        <a:defRPr b="0" baseline="0" cap="none" i="0" spc="0" strike="noStrike" sz="4400" u="none">
+        <a:defRPr sz="4400" b="0" i="0" u="none" strike="noStrike" cap="none" spc="0" baseline="0">
           <a:solidFill>
             <a:srgbClr val="000000"/>
           </a:solidFill>
@@ -3705,7 +3730,7 @@
         <a:buFontTx/>
         <a:buChar char="•"/>
         <a:tabLst/>
-        <a:defRPr b="0" baseline="0" cap="none" i="0" spc="0" strike="noStrike" sz="4400" u="none">
+        <a:defRPr sz="4400" b="0" i="0" u="none" strike="noStrike" cap="none" spc="0" baseline="0">
           <a:solidFill>
             <a:srgbClr val="000000"/>
           </a:solidFill>
@@ -3731,7 +3756,7 @@
         <a:buFontTx/>
         <a:buChar char="•"/>
         <a:tabLst/>
-        <a:defRPr b="0" baseline="0" cap="none" i="0" spc="0" strike="noStrike" sz="4400" u="none">
+        <a:defRPr sz="4400" b="0" i="0" u="none" strike="noStrike" cap="none" spc="0" baseline="0">
           <a:solidFill>
             <a:srgbClr val="000000"/>
           </a:solidFill>
@@ -3757,7 +3782,7 @@
         <a:buFontTx/>
         <a:buChar char="•"/>
         <a:tabLst/>
-        <a:defRPr b="0" baseline="0" cap="none" i="0" spc="0" strike="noStrike" sz="4400" u="none">
+        <a:defRPr sz="4400" b="0" i="0" u="none" strike="noStrike" cap="none" spc="0" baseline="0">
           <a:solidFill>
             <a:srgbClr val="000000"/>
           </a:solidFill>
@@ -3783,7 +3808,7 @@
         <a:buFontTx/>
         <a:buChar char="•"/>
         <a:tabLst/>
-        <a:defRPr b="0" baseline="0" cap="none" i="0" spc="0" strike="noStrike" sz="4400" u="none">
+        <a:defRPr sz="4400" b="0" i="0" u="none" strike="noStrike" cap="none" spc="0" baseline="0">
           <a:solidFill>
             <a:srgbClr val="000000"/>
           </a:solidFill>
@@ -3811,7 +3836,7 @@
         <a:buFontTx/>
         <a:buNone/>
         <a:tabLst/>
-        <a:defRPr b="0" baseline="0" cap="none" i="0" spc="0" strike="noStrike" sz="2000" u="none">
+        <a:defRPr sz="2000" b="0" i="0" u="none" strike="noStrike" cap="none" spc="0" baseline="0">
           <a:solidFill>
             <a:schemeClr val="tx1"/>
           </a:solidFill>
@@ -3837,7 +3862,7 @@
         <a:buFontTx/>
         <a:buNone/>
         <a:tabLst/>
-        <a:defRPr b="0" baseline="0" cap="none" i="0" spc="0" strike="noStrike" sz="2000" u="none">
+        <a:defRPr sz="2000" b="0" i="0" u="none" strike="noStrike" cap="none" spc="0" baseline="0">
           <a:solidFill>
             <a:schemeClr val="tx1"/>
           </a:solidFill>
@@ -3863,7 +3888,7 @@
         <a:buFontTx/>
         <a:buNone/>
         <a:tabLst/>
-        <a:defRPr b="0" baseline="0" cap="none" i="0" spc="0" strike="noStrike" sz="2000" u="none">
+        <a:defRPr sz="2000" b="0" i="0" u="none" strike="noStrike" cap="none" spc="0" baseline="0">
           <a:solidFill>
             <a:schemeClr val="tx1"/>
           </a:solidFill>
@@ -3889,7 +3914,7 @@
         <a:buFontTx/>
         <a:buNone/>
         <a:tabLst/>
-        <a:defRPr b="0" baseline="0" cap="none" i="0" spc="0" strike="noStrike" sz="2000" u="none">
+        <a:defRPr sz="2000" b="0" i="0" u="none" strike="noStrike" cap="none" spc="0" baseline="0">
           <a:solidFill>
             <a:schemeClr val="tx1"/>
           </a:solidFill>
@@ -3915,7 +3940,7 @@
         <a:buFontTx/>
         <a:buNone/>
         <a:tabLst/>
-        <a:defRPr b="0" baseline="0" cap="none" i="0" spc="0" strike="noStrike" sz="2000" u="none">
+        <a:defRPr sz="2000" b="0" i="0" u="none" strike="noStrike" cap="none" spc="0" baseline="0">
           <a:solidFill>
             <a:schemeClr val="tx1"/>
           </a:solidFill>
@@ -3941,7 +3966,7 @@
         <a:buFontTx/>
         <a:buNone/>
         <a:tabLst/>
-        <a:defRPr b="0" baseline="0" cap="none" i="0" spc="0" strike="noStrike" sz="2000" u="none">
+        <a:defRPr sz="2000" b="0" i="0" u="none" strike="noStrike" cap="none" spc="0" baseline="0">
           <a:solidFill>
             <a:schemeClr val="tx1"/>
           </a:solidFill>
@@ -3967,7 +3992,7 @@
         <a:buFontTx/>
         <a:buNone/>
         <a:tabLst/>
-        <a:defRPr b="0" baseline="0" cap="none" i="0" spc="0" strike="noStrike" sz="2000" u="none">
+        <a:defRPr sz="2000" b="0" i="0" u="none" strike="noStrike" cap="none" spc="0" baseline="0">
           <a:solidFill>
             <a:schemeClr val="tx1"/>
           </a:solidFill>
@@ -3993,7 +4018,7 @@
         <a:buFontTx/>
         <a:buNone/>
         <a:tabLst/>
-        <a:defRPr b="0" baseline="0" cap="none" i="0" spc="0" strike="noStrike" sz="2000" u="none">
+        <a:defRPr sz="2000" b="0" i="0" u="none" strike="noStrike" cap="none" spc="0" baseline="0">
           <a:solidFill>
             <a:schemeClr val="tx1"/>
           </a:solidFill>
@@ -4019,7 +4044,7 @@
         <a:buFontTx/>
         <a:buNone/>
         <a:tabLst/>
-        <a:defRPr b="0" baseline="0" cap="none" i="0" spc="0" strike="noStrike" sz="2000" u="none">
+        <a:defRPr sz="2000" b="0" i="0" u="none" strike="noStrike" cap="none" spc="0" baseline="0">
           <a:solidFill>
             <a:schemeClr val="tx1"/>
           </a:solidFill>
@@ -4036,7 +4061,7 @@
 </file>
 
 <file path=ppt/slides/slide1.xml><?xml version="1.0" encoding="utf-8"?>
-<p:sld xmlns:a="http://schemas.openxmlformats.org/drawingml/2006/main" xmlns:r="http://schemas.openxmlformats.org/officeDocument/2006/relationships" xmlns:p="http://schemas.openxmlformats.org/presentationml/2006/main" xmlns:m="http://schemas.openxmlformats.org/officeDocument/2006/math" xmlns:a14="http://schemas.microsoft.com/office/drawing/2010/main" showMasterSp="1" showMasterPhAnim="1">
+<p:sld xmlns:a="http://schemas.openxmlformats.org/drawingml/2006/main" xmlns:r="http://schemas.openxmlformats.org/officeDocument/2006/relationships" xmlns:p="http://schemas.openxmlformats.org/presentationml/2006/main">
   <p:cSld>
     <p:spTree>
       <p:nvGrpSpPr>
@@ -4055,30 +4080,34 @@
       <p:sp>
         <p:nvSpPr>
           <p:cNvPr id="151" name="Бускаров Александр ИСИП 23/1"/>
-          <p:cNvSpPr txBox="1"/>
+          <p:cNvSpPr txBox="1">
+            <a:spLocks noGrp="1"/>
+          </p:cNvSpPr>
           <p:nvPr>
             <p:ph type="body" idx="21"/>
           </p:nvPr>
         </p:nvSpPr>
         <p:spPr>
           <a:xfrm>
-            <a:off x="1219200" y="12173013"/>
-            <a:ext cx="21945599" cy="605791"/>
+            <a:off x="15245862" y="9214339"/>
+            <a:ext cx="7918937" cy="2250593"/>
           </a:xfrm>
           <a:prstGeom prst="rect">
             <a:avLst/>
           </a:prstGeom>
           <a:extLst>
             <a:ext uri="{C572A759-6A51-4108-AA02-DFA0A04FC94B}">
-              <ma14:wrappingTextBoxFlag xmlns:ma14="http://schemas.microsoft.com/office/mac/drawingml/2011/main" val="1"/>
+              <ma14:wrappingTextBoxFlag xmlns:ma14="http://schemas.microsoft.com/office/mac/drawingml/2011/main" xmlns:a14="http://schemas.microsoft.com/office/drawing/2010/main" xmlns:m="http://schemas.openxmlformats.org/officeDocument/2006/math" xmlns="" val="1"/>
             </a:ext>
           </a:extLst>
         </p:spPr>
         <p:txBody>
-          <a:bodyPr/>
+          <a:bodyPr>
+            <a:normAutofit/>
+          </a:bodyPr>
           <a:lstStyle>
             <a:lvl1pPr defTabSz="817244">
-              <a:defRPr spc="-35" sz="3564">
+              <a:defRPr sz="3564" spc="-35">
                 <a:latin typeface="Arial"/>
                 <a:ea typeface="Arial"/>
                 <a:cs typeface="Arial"/>
@@ -4087,17 +4116,51 @@
             </a:lvl1pPr>
           </a:lstStyle>
           <a:p>
-            <a:pPr/>
-            <a:r>
-              <a:t>Бускаров Александр ИСИП 23/1 </a:t>
-            </a:r>
+            <a:r>
+              <a:rPr lang="ru-RU" sz="3600" dirty="0"/>
+              <a:t>Выполнено</a:t>
+            </a:r>
+            <a:r>
+              <a:rPr lang="en-US" sz="3600" dirty="0"/>
+              <a:t>: </a:t>
+            </a:r>
+            <a:r>
+              <a:rPr lang="ru-RU" sz="3600" dirty="0"/>
+              <a:t>студент </a:t>
+            </a:r>
+            <a:r>
+              <a:rPr sz="3600" dirty="0" err="1"/>
+              <a:t>Бускаров</a:t>
+            </a:r>
+            <a:r>
+              <a:rPr sz="3600" dirty="0"/>
+              <a:t> </a:t>
+            </a:r>
+            <a:r>
+              <a:rPr lang="ru-RU" sz="3600" dirty="0"/>
+              <a:t>А.Л.</a:t>
+            </a:r>
+            <a:r>
+              <a:rPr sz="3600" dirty="0"/>
+              <a:t> ИСИП 23/1 </a:t>
+            </a:r>
+            <a:endParaRPr lang="ru-RU" sz="3600" dirty="0"/>
+          </a:p>
+          <a:p>
+            <a:r>
+              <a:rPr lang="ru-RU" sz="3600" dirty="0"/>
+              <a:t>Проверено: Н.А. Федоров</a:t>
+            </a:r>
+            <a:endParaRPr sz="3600" dirty="0"/>
           </a:p>
         </p:txBody>
       </p:sp>
       <p:sp>
         <p:nvSpPr>
           <p:cNvPr id="152" name="Курсовая Работа «Cook GO»"/>
-          <p:cNvSpPr txBox="1"/>
+          <p:cNvSpPr txBox="1">
+            <a:spLocks noGrp="1"/>
+          </p:cNvSpPr>
           <p:nvPr>
             <p:ph type="ctrTitle"/>
           </p:nvPr>
@@ -4115,7 +4178,7 @@
           <a:bodyPr/>
           <a:lstStyle>
             <a:lvl1pPr>
-              <a:defRPr b="1" spc="-44" sz="4400">
+              <a:defRPr sz="4400" b="1" spc="-44">
                 <a:solidFill>
                   <a:srgbClr val="DE6734"/>
                 </a:solidFill>
@@ -4127,7 +4190,6 @@
             </a:lvl1pPr>
           </a:lstStyle>
           <a:p>
-            <a:pPr/>
             <a:r>
               <a:t>Курсовая Работа «Cook GO»</a:t>
             </a:r>
@@ -4137,7 +4199,9 @@
       <p:sp>
         <p:nvSpPr>
           <p:cNvPr id="153" name="Министерство образования и науки Республики Саха(Якутия) ГАПОУ РС(Я) «Якутский колледж связи и информационных технологий имени П.И. Дудкина»"/>
-          <p:cNvSpPr txBox="1"/>
+          <p:cNvSpPr txBox="1">
+            <a:spLocks noGrp="1"/>
+          </p:cNvSpPr>
           <p:nvPr>
             <p:ph type="subTitle" sz="quarter" idx="1"/>
           </p:nvPr>
@@ -4155,7 +4219,7 @@
           <a:bodyPr/>
           <a:lstStyle>
             <a:lvl1pPr>
-              <a:defRPr spc="-36" sz="3600">
+              <a:defRPr sz="3600" spc="-36">
                 <a:latin typeface="Arial"/>
                 <a:ea typeface="Arial"/>
                 <a:cs typeface="Arial"/>
@@ -4164,7 +4228,6 @@
             </a:lvl1pPr>
           </a:lstStyle>
           <a:p>
-            <a:pPr/>
             <a:r>
               <a:t>Министерство образования и науки Республики Саха(Якутия) ГАПОУ РС(Я) «Якутский колледж связи и информационных технологий имени П.И. Дудкина»</a:t>
             </a:r>
@@ -4190,20 +4253,20 @@
           </a:ln>
           <a:extLst>
             <a:ext uri="{C572A759-6A51-4108-AA02-DFA0A04FC94B}">
-              <ma14:wrappingTextBoxFlag xmlns:ma14="http://schemas.microsoft.com/office/mac/drawingml/2011/main" val="1"/>
+              <ma14:wrappingTextBoxFlag xmlns:ma14="http://schemas.microsoft.com/office/mac/drawingml/2011/main" xmlns:a14="http://schemas.microsoft.com/office/drawing/2010/main" xmlns:m="http://schemas.openxmlformats.org/officeDocument/2006/math" xmlns="" val="1"/>
             </a:ext>
           </a:extLst>
         </p:spPr>
         <p:txBody>
           <a:bodyPr lIns="50800" tIns="50800" rIns="50800" bIns="50800">
-            <a:normAutofit fontScale="100000" lnSpcReduction="0"/>
+            <a:normAutofit/>
           </a:bodyPr>
           <a:lstStyle>
             <a:lvl1pPr defTabSz="825500">
               <a:lnSpc>
                 <a:spcPct val="100000"/>
               </a:lnSpc>
-              <a:defRPr spc="-36" sz="3600">
+              <a:defRPr sz="3600" spc="-36">
                 <a:latin typeface="Arial"/>
                 <a:ea typeface="Arial"/>
                 <a:cs typeface="Arial"/>
@@ -4212,9 +4275,139 @@
             </a:lvl1pPr>
           </a:lstStyle>
           <a:p>
-            <a:pPr/>
-            <a:r>
-              <a:t>Проектирование и разработка сайта для поиска кулинарных рецептов</a:t>
+            <a:r>
+              <a:rPr dirty="0" err="1"/>
+              <a:t>Проектирование</a:t>
+            </a:r>
+            <a:r>
+              <a:rPr dirty="0"/>
+              <a:t> и </a:t>
+            </a:r>
+            <a:r>
+              <a:rPr dirty="0" err="1"/>
+              <a:t>разработка</a:t>
+            </a:r>
+            <a:r>
+              <a:rPr dirty="0"/>
+              <a:t> </a:t>
+            </a:r>
+            <a:r>
+              <a:rPr dirty="0" err="1"/>
+              <a:t>сайта</a:t>
+            </a:r>
+            <a:r>
+              <a:rPr dirty="0"/>
+              <a:t> </a:t>
+            </a:r>
+            <a:r>
+              <a:rPr dirty="0" err="1"/>
+              <a:t>для</a:t>
+            </a:r>
+            <a:r>
+              <a:rPr dirty="0"/>
+              <a:t> </a:t>
+            </a:r>
+            <a:r>
+              <a:rPr dirty="0" err="1"/>
+              <a:t>поиска</a:t>
+            </a:r>
+            <a:r>
+              <a:rPr dirty="0"/>
+              <a:t> </a:t>
+            </a:r>
+            <a:r>
+              <a:rPr dirty="0" err="1"/>
+              <a:t>кулинарных</a:t>
+            </a:r>
+            <a:r>
+              <a:rPr dirty="0"/>
+              <a:t> </a:t>
+            </a:r>
+            <a:r>
+              <a:rPr dirty="0" err="1"/>
+              <a:t>рецептов</a:t>
+            </a:r>
+            <a:endParaRPr dirty="0"/>
+          </a:p>
+        </p:txBody>
+      </p:sp>
+      <p:sp>
+        <p:nvSpPr>
+          <p:cNvPr id="2" name="TextBox 1">
+            <a:extLst>
+              <a:ext uri="{FF2B5EF4-FFF2-40B4-BE49-F238E27FC236}">
+                <a16:creationId xmlns:a16="http://schemas.microsoft.com/office/drawing/2014/main" id="{F001BE93-3D8B-473E-8B7F-2EFB1131C7E9}"/>
+              </a:ext>
+            </a:extLst>
+          </p:cNvPr>
+          <p:cNvSpPr txBox="1"/>
+          <p:nvPr/>
+        </p:nvSpPr>
+        <p:spPr>
+          <a:xfrm>
+            <a:off x="10181492" y="12457044"/>
+            <a:ext cx="2866293" cy="601190"/>
+          </a:xfrm>
+          <a:prstGeom prst="rect">
+            <a:avLst/>
+          </a:prstGeom>
+          <a:noFill/>
+          <a:ln w="12700" cap="flat">
+            <a:noFill/>
+            <a:miter lim="400000"/>
+          </a:ln>
+          <a:effectLst/>
+          <a:sp3d/>
+        </p:spPr>
+        <p:style>
+          <a:lnRef idx="0">
+            <a:scrgbClr r="0" g="0" b="0"/>
+          </a:lnRef>
+          <a:fillRef idx="0">
+            <a:scrgbClr r="0" g="0" b="0"/>
+          </a:fillRef>
+          <a:effectRef idx="0">
+            <a:scrgbClr r="0" g="0" b="0"/>
+          </a:effectRef>
+          <a:fontRef idx="none"/>
+        </p:style>
+        <p:txBody>
+          <a:bodyPr rot="0" spcFirstLastPara="1" vertOverflow="overflow" horzOverflow="overflow" vert="horz" wrap="square" lIns="50800" tIns="50800" rIns="50800" bIns="50800" numCol="1" spcCol="38100" rtlCol="0" anchor="ctr">
+            <a:spAutoFit/>
+          </a:bodyPr>
+          <a:lstStyle/>
+          <a:p>
+            <a:pPr marL="0" marR="0" indent="0" algn="ctr" defTabSz="2438400" rtl="0" fontAlgn="auto" latinLnBrk="0" hangingPunct="0">
+              <a:lnSpc>
+                <a:spcPct val="90000"/>
+              </a:lnSpc>
+              <a:spcBef>
+                <a:spcPts val="0"/>
+              </a:spcBef>
+              <a:spcAft>
+                <a:spcPts val="0"/>
+              </a:spcAft>
+              <a:buClrTx/>
+              <a:buSzTx/>
+              <a:buFontTx/>
+              <a:buNone/>
+              <a:tabLst/>
+            </a:pPr>
+            <a:r>
+              <a:rPr kumimoji="0" lang="ru-RU" sz="3600" b="0" i="0" u="none" strike="noStrike" cap="none" spc="0" normalizeH="0" baseline="0" dirty="0">
+                <a:ln>
+                  <a:noFill/>
+                </a:ln>
+                <a:solidFill>
+                  <a:srgbClr val="000000"/>
+                </a:solidFill>
+                <a:effectLst/>
+                <a:uFillTx/>
+                <a:latin typeface="Arial" panose="020B0604020202020204" pitchFamily="34" charset="0"/>
+                <a:cs typeface="Arial" panose="020B0604020202020204" pitchFamily="34" charset="0"/>
+                <a:sym typeface="Canela Text Regular"/>
+              </a:rPr>
+              <a:t>Якутск 2026</a:t>
             </a:r>
           </a:p>
         </p:txBody>
@@ -4224,12 +4417,12 @@
   <p:clrMapOvr>
     <a:masterClrMapping/>
   </p:clrMapOvr>
-  <p:transition xmlns:p14="http://schemas.microsoft.com/office/powerpoint/2010/main" spd="med" advClick="1"/>
+  <p:transition spd="med"/>
 </p:sld>
 </file>
 
 <file path=ppt/slides/slide10.xml><?xml version="1.0" encoding="utf-8"?>
-<p:sld xmlns:a="http://schemas.openxmlformats.org/drawingml/2006/main" xmlns:r="http://schemas.openxmlformats.org/officeDocument/2006/relationships" xmlns:p="http://schemas.openxmlformats.org/presentationml/2006/main" xmlns:m="http://schemas.openxmlformats.org/officeDocument/2006/math" xmlns:a14="http://schemas.microsoft.com/office/drawing/2010/main" showMasterSp="1" showMasterPhAnim="1">
+<p:sld xmlns:a="http://schemas.openxmlformats.org/drawingml/2006/main" xmlns:r="http://schemas.openxmlformats.org/officeDocument/2006/relationships" xmlns:p="http://schemas.openxmlformats.org/presentationml/2006/main">
   <p:cSld>
     <p:spTree>
       <p:nvGrpSpPr>
@@ -4247,177 +4440,124 @@
       </p:grpSpPr>
       <p:sp>
         <p:nvSpPr>
-          <p:cNvPr id="248" name="Бускаров Александр ИСИП 23/1"/>
-          <p:cNvSpPr txBox="1"/>
+          <p:cNvPr id="2" name="Рисунок 1">
+            <a:extLst>
+              <a:ext uri="{FF2B5EF4-FFF2-40B4-BE49-F238E27FC236}">
+                <a16:creationId xmlns:a16="http://schemas.microsoft.com/office/drawing/2014/main" id="{F32D0708-B365-4A2F-9E3F-08A4F66F73CB}"/>
+              </a:ext>
+            </a:extLst>
+          </p:cNvPr>
+          <p:cNvSpPr>
+            <a:spLocks noGrp="1"/>
+          </p:cNvSpPr>
           <p:nvPr>
-            <p:ph type="body" idx="21"/>
+            <p:ph type="pic" idx="21"/>
           </p:nvPr>
         </p:nvSpPr>
-        <p:spPr>
-          <a:xfrm>
-            <a:off x="1219200" y="12173013"/>
-            <a:ext cx="21945599" cy="605791"/>
-          </a:xfrm>
-          <a:prstGeom prst="rect">
-            <a:avLst/>
-          </a:prstGeom>
-          <a:extLst>
-            <a:ext uri="{C572A759-6A51-4108-AA02-DFA0A04FC94B}">
-              <ma14:wrappingTextBoxFlag xmlns:ma14="http://schemas.microsoft.com/office/mac/drawingml/2011/main" val="1"/>
-            </a:ext>
-          </a:extLst>
-        </p:spPr>
+        <p:spPr/>
+      </p:sp>
+      <p:sp>
+        <p:nvSpPr>
+          <p:cNvPr id="3" name="Заголовок 2">
+            <a:extLst>
+              <a:ext uri="{FF2B5EF4-FFF2-40B4-BE49-F238E27FC236}">
+                <a16:creationId xmlns:a16="http://schemas.microsoft.com/office/drawing/2014/main" id="{4A3CB129-8E4D-406C-961F-4675E5C63336}"/>
+              </a:ext>
+            </a:extLst>
+          </p:cNvPr>
+          <p:cNvSpPr>
+            <a:spLocks noGrp="1"/>
+          </p:cNvSpPr>
+          <p:nvPr>
+            <p:ph type="title"/>
+          </p:nvPr>
+        </p:nvSpPr>
+        <p:spPr/>
         <p:txBody>
           <a:bodyPr/>
-          <a:lstStyle>
-            <a:lvl1pPr defTabSz="668655">
-              <a:defRPr spc="-29" sz="2916"/>
-            </a:lvl1pPr>
-          </a:lstStyle>
-          <a:p>
-            <a:pPr/>
-            <a:r>
-              <a:t>Бускаров Александр ИСИП 23/1</a:t>
-            </a:r>
-          </a:p>
-        </p:txBody>
-      </p:sp>
-      <p:sp>
-        <p:nvSpPr>
-          <p:cNvPr id="249" name="Курсовая Работа «Cook GO»"/>
-          <p:cNvSpPr txBox="1"/>
+          <a:lstStyle/>
+          <a:p>
+            <a:r>
+              <a:rPr lang="ru-RU" dirty="0">
+                <a:solidFill>
+                  <a:srgbClr val="FF0000"/>
+                </a:solidFill>
+              </a:rPr>
+              <a:t>Обеспечение безопасност</a:t>
+            </a:r>
+            <a:r>
+              <a:rPr lang="ru-RU" dirty="0"/>
+              <a:t>и</a:t>
+            </a:r>
+          </a:p>
+        </p:txBody>
+      </p:sp>
+      <p:sp>
+        <p:nvSpPr>
+          <p:cNvPr id="4" name="Текст 3">
+            <a:extLst>
+              <a:ext uri="{FF2B5EF4-FFF2-40B4-BE49-F238E27FC236}">
+                <a16:creationId xmlns:a16="http://schemas.microsoft.com/office/drawing/2014/main" id="{FBD9C240-8F93-4599-98B1-800101F95DBA}"/>
+              </a:ext>
+            </a:extLst>
+          </p:cNvPr>
+          <p:cNvSpPr>
+            <a:spLocks noGrp="1"/>
+          </p:cNvSpPr>
           <p:nvPr>
-            <p:ph type="ctrTitle"/>
+            <p:ph type="body" sz="quarter" idx="1"/>
           </p:nvPr>
         </p:nvSpPr>
-        <p:spPr>
-          <a:xfrm>
-            <a:off x="7667468" y="5878159"/>
-            <a:ext cx="9049065" cy="971104"/>
-          </a:xfrm>
-          <a:prstGeom prst="rect">
-            <a:avLst/>
-          </a:prstGeom>
-        </p:spPr>
+        <p:spPr/>
         <p:txBody>
           <a:bodyPr/>
-          <a:lstStyle>
-            <a:lvl1pPr>
-              <a:defRPr b="1" spc="-44" sz="4400">
-                <a:solidFill>
-                  <a:srgbClr val="DE6734"/>
-                </a:solidFill>
-                <a:latin typeface="Calibri"/>
-                <a:ea typeface="Calibri"/>
-                <a:cs typeface="Calibri"/>
-                <a:sym typeface="Calibri"/>
-              </a:defRPr>
-            </a:lvl1pPr>
-          </a:lstStyle>
-          <a:p>
-            <a:pPr/>
-            <a:r>
-              <a:t>Курсовая Работа «Cook GO»</a:t>
-            </a:r>
-          </a:p>
-        </p:txBody>
-      </p:sp>
-      <p:sp>
-        <p:nvSpPr>
-          <p:cNvPr id="250" name="Министерство образования и науки Республики Саха(Якутия) ГАПОУ РС(Я) «Якутский колледж связи и информационных технологий имени П.И. Дудкина»"/>
-          <p:cNvSpPr txBox="1"/>
+          <a:lstStyle/>
+          <a:p>
+            <a:endParaRPr lang="ru-RU"/>
+          </a:p>
+        </p:txBody>
+      </p:sp>
+      <p:sp>
+        <p:nvSpPr>
+          <p:cNvPr id="5" name="Текст 4">
+            <a:extLst>
+              <a:ext uri="{FF2B5EF4-FFF2-40B4-BE49-F238E27FC236}">
+                <a16:creationId xmlns:a16="http://schemas.microsoft.com/office/drawing/2014/main" id="{8A8BDDFB-87C7-487A-8186-3D9324DFE2A7}"/>
+              </a:ext>
+            </a:extLst>
+          </p:cNvPr>
+          <p:cNvSpPr>
+            <a:spLocks noGrp="1"/>
+          </p:cNvSpPr>
           <p:nvPr>
-            <p:ph type="subTitle" sz="quarter" idx="1"/>
+            <p:ph type="body" sz="quarter" idx="22"/>
           </p:nvPr>
         </p:nvSpPr>
-        <p:spPr>
-          <a:xfrm>
-            <a:off x="1219200" y="981096"/>
-            <a:ext cx="21945600" cy="2250593"/>
-          </a:xfrm>
-          <a:prstGeom prst="rect">
-            <a:avLst/>
-          </a:prstGeom>
-        </p:spPr>
+        <p:spPr/>
         <p:txBody>
           <a:bodyPr/>
-          <a:lstStyle>
-            <a:lvl1pPr>
-              <a:defRPr spc="-36" sz="3600">
-                <a:latin typeface="Calibri"/>
-                <a:ea typeface="Calibri"/>
-                <a:cs typeface="Calibri"/>
-                <a:sym typeface="Calibri"/>
-              </a:defRPr>
-            </a:lvl1pPr>
-          </a:lstStyle>
-          <a:p>
-            <a:pPr/>
-            <a:r>
-              <a:t>Министерство образования и науки Республики Саха(Якутия) ГАПОУ РС(Я) «Якутский колледж связи и информационных технологий имени П.И. Дудкина»</a:t>
-            </a:r>
-          </a:p>
-        </p:txBody>
-      </p:sp>
-      <p:sp>
-        <p:nvSpPr>
-          <p:cNvPr id="251" name="Проектирование и разработка сайта для поиска кулинарных рецептов"/>
-          <p:cNvSpPr txBox="1"/>
-          <p:nvPr/>
-        </p:nvSpPr>
-        <p:spPr>
-          <a:xfrm>
-            <a:off x="1219200" y="7275950"/>
-            <a:ext cx="21945600" cy="2250593"/>
-          </a:xfrm>
-          <a:prstGeom prst="rect">
-            <a:avLst/>
-          </a:prstGeom>
-          <a:ln w="12700">
-            <a:miter lim="400000"/>
-          </a:ln>
-          <a:extLst>
-            <a:ext uri="{C572A759-6A51-4108-AA02-DFA0A04FC94B}">
-              <ma14:wrappingTextBoxFlag xmlns:ma14="http://schemas.microsoft.com/office/mac/drawingml/2011/main" val="1"/>
-            </a:ext>
-          </a:extLst>
-        </p:spPr>
-        <p:txBody>
-          <a:bodyPr lIns="50800" tIns="50800" rIns="50800" bIns="50800">
-            <a:normAutofit fontScale="100000" lnSpcReduction="0"/>
-          </a:bodyPr>
-          <a:lstStyle>
-            <a:lvl1pPr defTabSz="825500">
-              <a:lnSpc>
-                <a:spcPct val="100000"/>
-              </a:lnSpc>
-              <a:defRPr spc="-36" sz="3600">
-                <a:latin typeface="Calibri"/>
-                <a:ea typeface="Calibri"/>
-                <a:cs typeface="Calibri"/>
-                <a:sym typeface="Calibri"/>
-              </a:defRPr>
-            </a:lvl1pPr>
-          </a:lstStyle>
-          <a:p>
-            <a:pPr/>
-            <a:r>
-              <a:t>Проектирование и разработка сайта для поиска кулинарных рецептов</a:t>
-            </a:r>
+          <a:lstStyle/>
+          <a:p>
+            <a:endParaRPr lang="ru-RU"/>
           </a:p>
         </p:txBody>
       </p:sp>
     </p:spTree>
+    <p:extLst>
+      <p:ext uri="{BB962C8B-B14F-4D97-AF65-F5344CB8AC3E}">
+        <p14:creationId xmlns:p14="http://schemas.microsoft.com/office/powerpoint/2010/main" val="1218612471"/>
+      </p:ext>
+    </p:extLst>
   </p:cSld>
   <p:clrMapOvr>
     <a:masterClrMapping/>
   </p:clrMapOvr>
-  <p:transition xmlns:p14="http://schemas.microsoft.com/office/powerpoint/2010/main" spd="med" advClick="1"/>
+  <p:transition spd="med"/>
 </p:sld>
 </file>
 
-<file path=ppt/slides/slide2.xml><?xml version="1.0" encoding="utf-8"?>
-<p:sld xmlns:a="http://schemas.openxmlformats.org/drawingml/2006/main" xmlns:r="http://schemas.openxmlformats.org/officeDocument/2006/relationships" xmlns:p="http://schemas.openxmlformats.org/presentationml/2006/main" xmlns:m="http://schemas.openxmlformats.org/officeDocument/2006/math" xmlns:a14="http://schemas.microsoft.com/office/drawing/2010/main" showMasterSp="1" showMasterPhAnim="1">
+<file path=ppt/slides/slide11.xml><?xml version="1.0" encoding="utf-8"?>
+<p:sld xmlns:a="http://schemas.openxmlformats.org/drawingml/2006/main" xmlns:r="http://schemas.openxmlformats.org/officeDocument/2006/relationships" xmlns:p="http://schemas.openxmlformats.org/presentationml/2006/main">
   <p:cSld>
     <p:spTree>
       <p:nvGrpSpPr>
@@ -4435,61 +4575,56 @@
       </p:grpSpPr>
       <p:sp>
         <p:nvSpPr>
-          <p:cNvPr id="156" name="Решение"/>
-          <p:cNvSpPr txBox="1"/>
+          <p:cNvPr id="248" name="Бускаров Александр ИСИП 23/1"/>
+          <p:cNvSpPr txBox="1">
+            <a:spLocks noGrp="1"/>
+          </p:cNvSpPr>
           <p:nvPr>
             <p:ph type="body" idx="21"/>
           </p:nvPr>
         </p:nvSpPr>
         <p:spPr>
           <a:xfrm>
-            <a:off x="1244600" y="7998289"/>
-            <a:ext cx="3099468" cy="605791"/>
+            <a:off x="1219200" y="12173013"/>
+            <a:ext cx="21945599" cy="605791"/>
           </a:xfrm>
           <a:prstGeom prst="rect">
             <a:avLst/>
           </a:prstGeom>
           <a:extLst>
             <a:ext uri="{C572A759-6A51-4108-AA02-DFA0A04FC94B}">
-              <ma14:wrappingTextBoxFlag xmlns:ma14="http://schemas.microsoft.com/office/mac/drawingml/2011/main" val="1"/>
+              <ma14:wrappingTextBoxFlag xmlns:ma14="http://schemas.microsoft.com/office/mac/drawingml/2011/main" xmlns:a14="http://schemas.microsoft.com/office/drawing/2010/main" xmlns:m="http://schemas.openxmlformats.org/officeDocument/2006/math" xmlns="" val="1"/>
             </a:ext>
           </a:extLst>
         </p:spPr>
         <p:txBody>
           <a:bodyPr/>
           <a:lstStyle>
-            <a:lvl1pPr algn="l" defTabSz="817244">
-              <a:defRPr b="1" spc="-35" sz="3564">
-                <a:solidFill>
-                  <a:srgbClr val="DE6734"/>
-                </a:solidFill>
-                <a:latin typeface="Arial"/>
-                <a:ea typeface="Arial"/>
-                <a:cs typeface="Arial"/>
-                <a:sym typeface="Arial"/>
-              </a:defRPr>
+            <a:lvl1pPr defTabSz="668655">
+              <a:defRPr sz="2916" spc="-29"/>
             </a:lvl1pPr>
           </a:lstStyle>
           <a:p>
-            <a:pPr/>
-            <a:r>
-              <a:t>Решение</a:t>
-            </a:r>
-          </a:p>
-        </p:txBody>
-      </p:sp>
-      <p:sp>
-        <p:nvSpPr>
-          <p:cNvPr id="157" name="Проблема"/>
-          <p:cNvSpPr txBox="1"/>
+            <a:r>
+              <a:t>Бускаров Александр ИСИП 23/1</a:t>
+            </a:r>
+          </a:p>
+        </p:txBody>
+      </p:sp>
+      <p:sp>
+        <p:nvSpPr>
+          <p:cNvPr id="249" name="Курсовая Работа «Cook GO»"/>
+          <p:cNvSpPr txBox="1">
+            <a:spLocks noGrp="1"/>
+          </p:cNvSpPr>
           <p:nvPr>
             <p:ph type="ctrTitle"/>
           </p:nvPr>
         </p:nvSpPr>
         <p:spPr>
           <a:xfrm>
-            <a:off x="1243583" y="3896328"/>
-            <a:ext cx="4036479" cy="702983"/>
+            <a:off x="7667468" y="5878159"/>
+            <a:ext cx="9049065" cy="971104"/>
           </a:xfrm>
           <a:prstGeom prst="rect">
             <a:avLst/>
@@ -4498,38 +4633,39 @@
         <p:txBody>
           <a:bodyPr/>
           <a:lstStyle>
-            <a:lvl1pPr algn="l">
-              <a:defRPr b="1" spc="-36" sz="3600">
+            <a:lvl1pPr>
+              <a:defRPr sz="4400" b="1" spc="-44">
                 <a:solidFill>
                   <a:srgbClr val="DE6734"/>
                 </a:solidFill>
-                <a:latin typeface="Arial"/>
-                <a:ea typeface="Arial"/>
-                <a:cs typeface="Arial"/>
-                <a:sym typeface="Arial"/>
+                <a:latin typeface="Calibri"/>
+                <a:ea typeface="Calibri"/>
+                <a:cs typeface="Calibri"/>
+                <a:sym typeface="Calibri"/>
               </a:defRPr>
             </a:lvl1pPr>
           </a:lstStyle>
           <a:p>
-            <a:pPr/>
-            <a:r>
-              <a:t>Проблема</a:t>
-            </a:r>
-          </a:p>
-        </p:txBody>
-      </p:sp>
-      <p:sp>
-        <p:nvSpPr>
-          <p:cNvPr id="158" name="Все больше людей интересуются приготовлением блюд, а самый простой и доступный источник - это интернет.…"/>
-          <p:cNvSpPr txBox="1"/>
+            <a:r>
+              <a:t>Курсовая Работа «Cook GO»</a:t>
+            </a:r>
+          </a:p>
+        </p:txBody>
+      </p:sp>
+      <p:sp>
+        <p:nvSpPr>
+          <p:cNvPr id="250" name="Министерство образования и науки Республики Саха(Якутия) ГАПОУ РС(Я) «Якутский колледж связи и информационных технологий имени П.И. Дудкина»"/>
+          <p:cNvSpPr txBox="1">
+            <a:spLocks noGrp="1"/>
+          </p:cNvSpPr>
           <p:nvPr>
             <p:ph type="subTitle" sz="quarter" idx="1"/>
           </p:nvPr>
         </p:nvSpPr>
         <p:spPr>
           <a:xfrm>
-            <a:off x="1239011" y="5149119"/>
-            <a:ext cx="11987840" cy="2299362"/>
+            <a:off x="1219200" y="981096"/>
+            <a:ext cx="21945600" cy="2250593"/>
           </a:xfrm>
           <a:prstGeom prst="rect">
             <a:avLst/>
@@ -4537,45 +4673,33 @@
         </p:spPr>
         <p:txBody>
           <a:bodyPr/>
-          <a:lstStyle/>
-          <a:p>
-            <a:pPr algn="l" defTabSz="808990">
-              <a:defRPr spc="-27" sz="2744">
-                <a:latin typeface="Arial"/>
-                <a:ea typeface="Arial"/>
-                <a:cs typeface="Arial"/>
-                <a:sym typeface="Arial"/>
-              </a:defRPr>
-            </a:pPr>
-            <a:r>
-              <a:t>Все больше людей интересуются приготовлением блюд, а самый простой и доступный источник - это интернет.</a:t>
-            </a:r>
-          </a:p>
-          <a:p>
-            <a:pPr algn="l" defTabSz="808990">
-              <a:defRPr spc="-27" sz="2744">
-                <a:latin typeface="Arial"/>
-                <a:ea typeface="Arial"/>
-                <a:cs typeface="Arial"/>
-                <a:sym typeface="Arial"/>
-              </a:defRPr>
-            </a:pPr>
-            <a:r>
-              <a:t>По большей части уже существующие сайты либо наполнены необязательными функциями которые перегружают экран, либо не имеют важных функций фильтраций, которые необходимы в подборе рецепта.</a:t>
-            </a:r>
-          </a:p>
-        </p:txBody>
-      </p:sp>
-      <p:sp>
-        <p:nvSpPr>
-          <p:cNvPr id="159" name="Текст"/>
+          <a:lstStyle>
+            <a:lvl1pPr>
+              <a:defRPr sz="3600" spc="-36">
+                <a:latin typeface="Calibri"/>
+                <a:ea typeface="Calibri"/>
+                <a:cs typeface="Calibri"/>
+                <a:sym typeface="Calibri"/>
+              </a:defRPr>
+            </a:lvl1pPr>
+          </a:lstStyle>
+          <a:p>
+            <a:r>
+              <a:t>Министерство образования и науки Республики Саха(Якутия) ГАПОУ РС(Я) «Якутский колледж связи и информационных технологий имени П.И. Дудкина»</a:t>
+            </a:r>
+          </a:p>
+        </p:txBody>
+      </p:sp>
+      <p:sp>
+        <p:nvSpPr>
+          <p:cNvPr id="251" name="Проектирование и разработка сайта для поиска кулинарных рецептов"/>
           <p:cNvSpPr txBox="1"/>
           <p:nvPr/>
         </p:nvSpPr>
         <p:spPr>
           <a:xfrm>
-            <a:off x="15035784" y="-487427"/>
-            <a:ext cx="127001" cy="584201"/>
+            <a:off x="1219200" y="7275950"/>
+            <a:ext cx="21945600" cy="2250593"/>
           </a:xfrm>
           <a:prstGeom prst="rect">
             <a:avLst/>
@@ -4585,283 +4709,30 @@
           </a:ln>
           <a:extLst>
             <a:ext uri="{C572A759-6A51-4108-AA02-DFA0A04FC94B}">
-              <ma14:wrappingTextBoxFlag xmlns:ma14="http://schemas.microsoft.com/office/mac/drawingml/2011/main" val="1"/>
+              <ma14:wrappingTextBoxFlag xmlns:ma14="http://schemas.microsoft.com/office/mac/drawingml/2011/main" xmlns:a14="http://schemas.microsoft.com/office/drawing/2010/main" xmlns:m="http://schemas.openxmlformats.org/officeDocument/2006/math" xmlns="" val="1"/>
             </a:ext>
           </a:extLst>
         </p:spPr>
         <p:txBody>
-          <a:bodyPr wrap="none" lIns="50800" tIns="50800" rIns="50800" bIns="50800" anchor="ctr">
-            <a:spAutoFit/>
+          <a:bodyPr lIns="50800" tIns="50800" rIns="50800" bIns="50800">
+            <a:normAutofit/>
           </a:bodyPr>
-          <a:lstStyle/>
-          <a:p>
-            <a:pPr algn="l" defTabSz="457200">
+          <a:lstStyle>
+            <a:lvl1pPr defTabSz="825500">
               <a:lnSpc>
                 <a:spcPct val="100000"/>
               </a:lnSpc>
-              <a:defRPr sz="1600">
-                <a:solidFill>
-                  <a:srgbClr val="02A388"/>
-                </a:solidFill>
-                <a:latin typeface="Helvetica"/>
-                <a:ea typeface="Helvetica"/>
-                <a:cs typeface="Helvetica"/>
-                <a:sym typeface="Helvetica"/>
-              </a:defRPr>
-            </a:pPr>
-          </a:p>
-        </p:txBody>
-      </p:sp>
-      <p:pic>
-        <p:nvPicPr>
-          <p:cNvPr id="160" name="счастливая-семья-наслаждается-приготовлением-пищи-на-кухне.jpg" descr="счастливая-семья-наслаждается-приготовлением-пищи-на-кухне.jpg"/>
-          <p:cNvPicPr>
-            <a:picLocks noChangeAspect="1"/>
-          </p:cNvPicPr>
-          <p:nvPr/>
-        </p:nvPicPr>
-        <p:blipFill>
-          <a:blip r:embed="rId2">
-            <a:extLst/>
-          </a:blip>
-          <a:stretch>
-            <a:fillRect/>
-          </a:stretch>
-        </p:blipFill>
-        <p:spPr>
-          <a:xfrm>
-            <a:off x="15205795" y="-30226"/>
-            <a:ext cx="9184302" cy="13776453"/>
-          </a:xfrm>
-          <a:prstGeom prst="rect">
-            <a:avLst/>
-          </a:prstGeom>
-          <a:ln w="12700">
-            <a:miter lim="400000"/>
-          </a:ln>
-        </p:spPr>
-      </p:pic>
-      <p:sp>
-        <p:nvSpPr>
-          <p:cNvPr id="161" name="Текст"/>
-          <p:cNvSpPr txBox="1"/>
-          <p:nvPr/>
-        </p:nvSpPr>
-        <p:spPr>
-          <a:xfrm>
-            <a:off x="19208495" y="-804927"/>
-            <a:ext cx="127001" cy="1549401"/>
-          </a:xfrm>
-          <a:prstGeom prst="rect">
-            <a:avLst/>
-          </a:prstGeom>
-          <a:ln w="12700">
-            <a:miter lim="400000"/>
-          </a:ln>
-          <a:extLst>
-            <a:ext uri="{C572A759-6A51-4108-AA02-DFA0A04FC94B}">
-              <ma14:wrappingTextBoxFlag xmlns:ma14="http://schemas.microsoft.com/office/mac/drawingml/2011/main" val="1"/>
-            </a:ext>
-          </a:extLst>
-        </p:spPr>
-        <p:txBody>
-          <a:bodyPr wrap="none" lIns="50800" tIns="50800" rIns="50800" bIns="50800" anchor="ctr">
-            <a:spAutoFit/>
-          </a:bodyPr>
-          <a:lstStyle/>
-          <a:p>
-            <a:pPr algn="l" defTabSz="457200">
-              <a:lnSpc>
-                <a:spcPct val="100000"/>
-              </a:lnSpc>
-              <a:defRPr sz="1600">
-                <a:solidFill>
-                  <a:srgbClr val="02A388"/>
-                </a:solidFill>
-                <a:latin typeface="Helvetica"/>
-                <a:ea typeface="Helvetica"/>
-                <a:cs typeface="Helvetica"/>
-                <a:sym typeface="Helvetica"/>
-              </a:defRPr>
-            </a:pPr>
-            <a:endParaRPr u="sng"/>
-          </a:p>
-          <a:p>
-            <a:pPr algn="l" defTabSz="457200">
-              <a:lnSpc>
-                <a:spcPct val="100000"/>
-              </a:lnSpc>
-              <a:defRPr sz="1600">
-                <a:solidFill>
-                  <a:srgbClr val="474747"/>
-                </a:solidFill>
-                <a:latin typeface="Helvetica"/>
-                <a:ea typeface="Helvetica"/>
-                <a:cs typeface="Helvetica"/>
-                <a:sym typeface="Helvetica"/>
-              </a:defRPr>
-            </a:pPr>
-          </a:p>
-          <a:p>
-            <a:pPr algn="l" defTabSz="457200">
-              <a:lnSpc>
-                <a:spcPct val="100000"/>
-              </a:lnSpc>
-              <a:defRPr sz="1600">
-                <a:solidFill>
-                  <a:srgbClr val="474747"/>
-                </a:solidFill>
-                <a:latin typeface="Helvetica"/>
-                <a:ea typeface="Helvetica"/>
-                <a:cs typeface="Helvetica"/>
-                <a:sym typeface="Helvetica"/>
-              </a:defRPr>
-            </a:pPr>
-          </a:p>
-          <a:p>
-            <a:pPr algn="l" defTabSz="457200">
-              <a:lnSpc>
-                <a:spcPct val="100000"/>
-              </a:lnSpc>
-              <a:defRPr sz="1600">
-                <a:solidFill>
-                  <a:srgbClr val="02A388"/>
-                </a:solidFill>
-                <a:latin typeface="Helvetica"/>
-                <a:ea typeface="Helvetica"/>
-                <a:cs typeface="Helvetica"/>
-                <a:sym typeface="Helvetica"/>
-              </a:defRPr>
-            </a:pPr>
-          </a:p>
-          <a:p>
-            <a:pPr algn="l" defTabSz="457200">
-              <a:lnSpc>
-                <a:spcPct val="100000"/>
-              </a:lnSpc>
-              <a:defRPr sz="1600">
-                <a:solidFill>
-                  <a:srgbClr val="02A388"/>
-                </a:solidFill>
-                <a:latin typeface="Helvetica"/>
-                <a:ea typeface="Helvetica"/>
-                <a:cs typeface="Helvetica"/>
-                <a:sym typeface="Helvetica"/>
-              </a:defRPr>
-            </a:pPr>
-          </a:p>
-        </p:txBody>
-      </p:sp>
-      <p:sp>
-        <p:nvSpPr>
-          <p:cNvPr id="162" name="Сайт «Cook GO» предоставляет рецепты отсортированные в категории, что сильно облегчает поиск.…"/>
-          <p:cNvSpPr txBox="1"/>
-          <p:nvPr/>
-        </p:nvSpPr>
-        <p:spPr>
-          <a:xfrm>
-            <a:off x="1239011" y="9153889"/>
-            <a:ext cx="11987840" cy="2824949"/>
-          </a:xfrm>
-          <a:prstGeom prst="rect">
-            <a:avLst/>
-          </a:prstGeom>
-          <a:ln w="12700">
-            <a:miter lim="400000"/>
-          </a:ln>
-          <a:extLst>
-            <a:ext uri="{C572A759-6A51-4108-AA02-DFA0A04FC94B}">
-              <ma14:wrappingTextBoxFlag xmlns:ma14="http://schemas.microsoft.com/office/mac/drawingml/2011/main" val="1"/>
-            </a:ext>
-          </a:extLst>
-        </p:spPr>
-        <p:txBody>
-          <a:bodyPr lIns="50800" tIns="50800" rIns="50800" bIns="50800">
-            <a:normAutofit fontScale="100000" lnSpcReduction="0"/>
-          </a:bodyPr>
-          <a:lstStyle/>
-          <a:p>
-            <a:pPr algn="l" defTabSz="825500">
-              <a:lnSpc>
-                <a:spcPct val="100000"/>
-              </a:lnSpc>
-              <a:defRPr spc="-28" sz="2800">
-                <a:latin typeface="Arial"/>
-                <a:ea typeface="Arial"/>
-                <a:cs typeface="Arial"/>
-                <a:sym typeface="Arial"/>
-              </a:defRPr>
-            </a:pPr>
-            <a:r>
-              <a:t>Сайт «Cook GO» предоставляет рецепты отсортированные в категории, что сильно облегчает поиск.</a:t>
-            </a:r>
-          </a:p>
-          <a:p>
-            <a:pPr algn="l" defTabSz="825500">
-              <a:lnSpc>
-                <a:spcPct val="100000"/>
-              </a:lnSpc>
-              <a:defRPr spc="-28" sz="2800">
-                <a:latin typeface="Arial"/>
-                <a:ea typeface="Arial"/>
-                <a:cs typeface="Arial"/>
-                <a:sym typeface="Arial"/>
-              </a:defRPr>
-            </a:pPr>
-            <a:r>
-              <a:t>Каждый рецепт имеет свою карточку с подробной информацией об нужных ингредиентах, сколько порций блюда будет, сколько времени займет приготовление блюда и сам рецепт детально расписан и имеет визуальное сопровождение</a:t>
-            </a:r>
-          </a:p>
-        </p:txBody>
-      </p:sp>
-      <p:sp>
-        <p:nvSpPr>
-          <p:cNvPr id="163" name="Актуальность"/>
-          <p:cNvSpPr/>
-          <p:nvPr/>
-        </p:nvSpPr>
-        <p:spPr>
-          <a:xfrm>
-            <a:off x="-1016" y="-19304"/>
-            <a:ext cx="15215594" cy="2207001"/>
-          </a:xfrm>
-          <a:prstGeom prst="rect">
-            <a:avLst/>
-          </a:prstGeom>
-          <a:solidFill>
-            <a:srgbClr val="DE6734"/>
-          </a:solidFill>
-          <a:ln w="12700">
-            <a:miter lim="400000"/>
-          </a:ln>
-          <a:extLst>
-            <a:ext uri="{C572A759-6A51-4108-AA02-DFA0A04FC94B}">
-              <ma14:wrappingTextBoxFlag xmlns:ma14="http://schemas.microsoft.com/office/mac/drawingml/2011/main" val="1"/>
-            </a:ext>
-          </a:extLst>
-        </p:spPr>
-        <p:txBody>
-          <a:bodyPr lIns="50800" tIns="50800" rIns="50800" bIns="50800" anchor="ctr"/>
-          <a:lstStyle>
-            <a:lvl1pPr defTabSz="1130300">
-              <a:lnSpc>
-                <a:spcPct val="100000"/>
-              </a:lnSpc>
-              <a:defRPr b="1" sz="4400">
-                <a:solidFill>
-                  <a:srgbClr val="FFFFFF"/>
-                </a:solidFill>
-                <a:latin typeface="Arial"/>
-                <a:ea typeface="Arial"/>
-                <a:cs typeface="Arial"/>
-                <a:sym typeface="Arial"/>
+              <a:defRPr sz="3600" spc="-36">
+                <a:latin typeface="Calibri"/>
+                <a:ea typeface="Calibri"/>
+                <a:cs typeface="Calibri"/>
+                <a:sym typeface="Calibri"/>
               </a:defRPr>
             </a:lvl1pPr>
           </a:lstStyle>
           <a:p>
-            <a:pPr/>
-            <a:r>
-              <a:t>Актуальность</a:t>
+            <a:r>
+              <a:t>Проектирование и разработка сайта для поиска кулинарных рецептов</a:t>
             </a:r>
           </a:p>
         </p:txBody>
@@ -4871,12 +4742,12 @@
   <p:clrMapOvr>
     <a:masterClrMapping/>
   </p:clrMapOvr>
-  <p:transition xmlns:p14="http://schemas.microsoft.com/office/powerpoint/2010/main" spd="med" advClick="1"/>
+  <p:transition spd="med"/>
 </p:sld>
 </file>
 
-<file path=ppt/slides/slide3.xml><?xml version="1.0" encoding="utf-8"?>
-<p:sld xmlns:a="http://schemas.openxmlformats.org/drawingml/2006/main" xmlns:r="http://schemas.openxmlformats.org/officeDocument/2006/relationships" xmlns:p="http://schemas.openxmlformats.org/presentationml/2006/main" xmlns:m="http://schemas.openxmlformats.org/officeDocument/2006/math" xmlns:a14="http://schemas.microsoft.com/office/drawing/2010/main" showMasterSp="1" showMasterPhAnim="1">
+<file path=ppt/slides/slide2.xml><?xml version="1.0" encoding="utf-8"?>
+<p:sld xmlns:a="http://schemas.openxmlformats.org/drawingml/2006/main" xmlns:r="http://schemas.openxmlformats.org/officeDocument/2006/relationships" xmlns:p="http://schemas.openxmlformats.org/presentationml/2006/main">
   <p:cSld>
     <p:spTree>
       <p:nvGrpSpPr>
@@ -4894,15 +4765,17 @@
       </p:grpSpPr>
       <p:sp>
         <p:nvSpPr>
-          <p:cNvPr id="165" name="Задачи"/>
-          <p:cNvSpPr txBox="1"/>
+          <p:cNvPr id="156" name="Решение"/>
+          <p:cNvSpPr txBox="1">
+            <a:spLocks noGrp="1"/>
+          </p:cNvSpPr>
           <p:nvPr>
             <p:ph type="body" idx="21"/>
           </p:nvPr>
         </p:nvSpPr>
         <p:spPr>
           <a:xfrm>
-            <a:off x="15969953" y="4299435"/>
+            <a:off x="1244600" y="7998289"/>
             <a:ext cx="3099468" cy="605791"/>
           </a:xfrm>
           <a:prstGeom prst="rect">
@@ -4910,15 +4783,17 @@
           </a:prstGeom>
           <a:extLst>
             <a:ext uri="{C572A759-6A51-4108-AA02-DFA0A04FC94B}">
-              <ma14:wrappingTextBoxFlag xmlns:ma14="http://schemas.microsoft.com/office/mac/drawingml/2011/main" val="1"/>
+              <ma14:wrappingTextBoxFlag xmlns:ma14="http://schemas.microsoft.com/office/mac/drawingml/2011/main" xmlns:a14="http://schemas.microsoft.com/office/drawing/2010/main" xmlns:m="http://schemas.openxmlformats.org/officeDocument/2006/math" xmlns="" val="1"/>
             </a:ext>
           </a:extLst>
         </p:spPr>
         <p:txBody>
-          <a:bodyPr/>
+          <a:bodyPr>
+            <a:normAutofit lnSpcReduction="10000"/>
+          </a:bodyPr>
           <a:lstStyle>
-            <a:lvl1pPr defTabSz="817244">
-              <a:defRPr b="1" spc="-35" sz="3564">
+            <a:lvl1pPr algn="l" defTabSz="817244">
+              <a:defRPr sz="3564" b="1" spc="-35">
                 <a:solidFill>
                   <a:srgbClr val="DE6734"/>
                 </a:solidFill>
@@ -4930,56 +4805,15 @@
             </a:lvl1pPr>
           </a:lstStyle>
           <a:p>
-            <a:pPr/>
-            <a:r>
-              <a:t>Задачи</a:t>
-            </a:r>
-          </a:p>
-        </p:txBody>
-      </p:sp>
-      <p:sp>
-        <p:nvSpPr>
-          <p:cNvPr id="166" name="Цель"/>
-          <p:cNvSpPr txBox="1"/>
-          <p:nvPr>
-            <p:ph type="ctrTitle"/>
-          </p:nvPr>
-        </p:nvSpPr>
-        <p:spPr>
-          <a:xfrm>
-            <a:off x="2866742" y="4250839"/>
-            <a:ext cx="4036479" cy="702983"/>
-          </a:xfrm>
-          <a:prstGeom prst="rect">
-            <a:avLst/>
-          </a:prstGeom>
-        </p:spPr>
-        <p:txBody>
-          <a:bodyPr/>
-          <a:lstStyle>
-            <a:lvl1pPr>
-              <a:defRPr b="1" spc="-36" sz="3600">
-                <a:solidFill>
-                  <a:srgbClr val="DE6734"/>
-                </a:solidFill>
-                <a:latin typeface="Arial"/>
-                <a:ea typeface="Arial"/>
-                <a:cs typeface="Arial"/>
-                <a:sym typeface="Arial"/>
-              </a:defRPr>
-            </a:lvl1pPr>
-          </a:lstStyle>
-          <a:p>
-            <a:pPr/>
-            <a:r>
-              <a:t>Цель</a:t>
-            </a:r>
-          </a:p>
-        </p:txBody>
-      </p:sp>
-      <p:sp>
-        <p:nvSpPr>
-          <p:cNvPr id="167" name="Текст"/>
+            <a:r>
+              <a:t>Решение</a:t>
+            </a:r>
+          </a:p>
+        </p:txBody>
+      </p:sp>
+      <p:sp>
+        <p:nvSpPr>
+          <p:cNvPr id="159" name="Текст"/>
           <p:cNvSpPr txBox="1"/>
           <p:nvPr/>
         </p:nvSpPr>
@@ -4996,7 +4830,7 @@
           </a:ln>
           <a:extLst>
             <a:ext uri="{C572A759-6A51-4108-AA02-DFA0A04FC94B}">
-              <ma14:wrappingTextBoxFlag xmlns:ma14="http://schemas.microsoft.com/office/mac/drawingml/2011/main" val="1"/>
+              <ma14:wrappingTextBoxFlag xmlns:ma14="http://schemas.microsoft.com/office/mac/drawingml/2011/main" xmlns:a14="http://schemas.microsoft.com/office/drawing/2010/main" xmlns:m="http://schemas.openxmlformats.org/officeDocument/2006/math" xmlns="" val="1"/>
             </a:ext>
           </a:extLst>
         </p:spPr>
@@ -5020,12 +4854,40 @@
                 <a:sym typeface="Helvetica"/>
               </a:defRPr>
             </a:pPr>
-          </a:p>
-        </p:txBody>
-      </p:sp>
-      <p:sp>
-        <p:nvSpPr>
-          <p:cNvPr id="168" name="Текст"/>
+            <a:endParaRPr/>
+          </a:p>
+        </p:txBody>
+      </p:sp>
+      <p:pic>
+        <p:nvPicPr>
+          <p:cNvPr id="160" name="счастливая-семья-наслаждается-приготовлением-пищи-на-кухне.jpg" descr="счастливая-семья-наслаждается-приготовлением-пищи-на-кухне.jpg"/>
+          <p:cNvPicPr>
+            <a:picLocks noChangeAspect="1"/>
+          </p:cNvPicPr>
+          <p:nvPr/>
+        </p:nvPicPr>
+        <p:blipFill>
+          <a:blip r:embed="rId2"/>
+          <a:stretch>
+            <a:fillRect/>
+          </a:stretch>
+        </p:blipFill>
+        <p:spPr>
+          <a:xfrm>
+            <a:off x="15205795" y="-30226"/>
+            <a:ext cx="9184302" cy="13776453"/>
+          </a:xfrm>
+          <a:prstGeom prst="rect">
+            <a:avLst/>
+          </a:prstGeom>
+          <a:ln w="12700">
+            <a:miter lim="400000"/>
+          </a:ln>
+        </p:spPr>
+      </p:pic>
+      <p:sp>
+        <p:nvSpPr>
+          <p:cNvPr id="161" name="Текст"/>
           <p:cNvSpPr txBox="1"/>
           <p:nvPr/>
         </p:nvSpPr>
@@ -5042,7 +4904,7 @@
           </a:ln>
           <a:extLst>
             <a:ext uri="{C572A759-6A51-4108-AA02-DFA0A04FC94B}">
-              <ma14:wrappingTextBoxFlag xmlns:ma14="http://schemas.microsoft.com/office/mac/drawingml/2011/main" val="1"/>
+              <ma14:wrappingTextBoxFlag xmlns:ma14="http://schemas.microsoft.com/office/mac/drawingml/2011/main" xmlns:a14="http://schemas.microsoft.com/office/drawing/2010/main" xmlns:m="http://schemas.openxmlformats.org/officeDocument/2006/math" xmlns="" val="1"/>
             </a:ext>
           </a:extLst>
         </p:spPr>
@@ -5083,6 +4945,7 @@
                 <a:sym typeface="Helvetica"/>
               </a:defRPr>
             </a:pPr>
+            <a:endParaRPr u="sng"/>
           </a:p>
           <a:p>
             <a:pPr algn="l" defTabSz="457200">
@@ -5099,6 +4962,7 @@
                 <a:sym typeface="Helvetica"/>
               </a:defRPr>
             </a:pPr>
+            <a:endParaRPr u="sng"/>
           </a:p>
           <a:p>
             <a:pPr algn="l" defTabSz="457200">
@@ -5115,6 +4979,7 @@
                 <a:sym typeface="Helvetica"/>
               </a:defRPr>
             </a:pPr>
+            <a:endParaRPr u="sng"/>
           </a:p>
           <a:p>
             <a:pPr algn="l" defTabSz="457200">
@@ -5131,19 +4996,20 @@
                 <a:sym typeface="Helvetica"/>
               </a:defRPr>
             </a:pPr>
-          </a:p>
-        </p:txBody>
-      </p:sp>
-      <p:sp>
-        <p:nvSpPr>
-          <p:cNvPr id="169" name="Цель и Задачи"/>
+            <a:endParaRPr u="sng"/>
+          </a:p>
+        </p:txBody>
+      </p:sp>
+      <p:sp>
+        <p:nvSpPr>
+          <p:cNvPr id="163" name="Актуальность"/>
           <p:cNvSpPr/>
           <p:nvPr/>
         </p:nvSpPr>
         <p:spPr>
           <a:xfrm>
             <a:off x="-1016" y="-19304"/>
-            <a:ext cx="24386033" cy="2207001"/>
+            <a:ext cx="15215594" cy="2207001"/>
           </a:xfrm>
           <a:prstGeom prst="rect">
             <a:avLst/>
@@ -5156,7 +5022,7 @@
           </a:ln>
           <a:extLst>
             <a:ext uri="{C572A759-6A51-4108-AA02-DFA0A04FC94B}">
-              <ma14:wrappingTextBoxFlag xmlns:ma14="http://schemas.microsoft.com/office/mac/drawingml/2011/main" val="1"/>
+              <ma14:wrappingTextBoxFlag xmlns:ma14="http://schemas.microsoft.com/office/mac/drawingml/2011/main" xmlns:a14="http://schemas.microsoft.com/office/drawing/2010/main" xmlns:m="http://schemas.openxmlformats.org/officeDocument/2006/math" xmlns="" val="1"/>
             </a:ext>
           </a:extLst>
         </p:spPr>
@@ -5167,7 +5033,7 @@
               <a:lnSpc>
                 <a:spcPct val="100000"/>
               </a:lnSpc>
-              <a:defRPr b="1" sz="4400">
+              <a:defRPr sz="4400" b="1">
                 <a:solidFill>
                   <a:srgbClr val="FFFFFF"/>
                 </a:solidFill>
@@ -5179,23 +5045,590 @@
             </a:lvl1pPr>
           </a:lstStyle>
           <a:p>
-            <a:pPr/>
-            <a:r>
-              <a:t>Цель и Задачи</a:t>
-            </a:r>
-          </a:p>
-        </p:txBody>
-      </p:sp>
-      <p:sp>
-        <p:nvSpPr>
-          <p:cNvPr id="170" name="Разработать интуитивно понятный…"/>
+            <a:r>
+              <a:rPr lang="ru-RU" dirty="0"/>
+              <a:t>Введение</a:t>
+            </a:r>
+            <a:endParaRPr dirty="0"/>
+          </a:p>
+        </p:txBody>
+      </p:sp>
+      <p:sp>
+        <p:nvSpPr>
+          <p:cNvPr id="14" name="Задачи">
+            <a:extLst>
+              <a:ext uri="{FF2B5EF4-FFF2-40B4-BE49-F238E27FC236}">
+                <a16:creationId xmlns:a16="http://schemas.microsoft.com/office/drawing/2014/main" id="{C7E8749C-5E20-4DBA-B347-4F3F5FD113AC}"/>
+              </a:ext>
+            </a:extLst>
+          </p:cNvPr>
+          <p:cNvSpPr txBox="1">
+            <a:spLocks/>
+          </p:cNvSpPr>
+          <p:nvPr/>
+        </p:nvSpPr>
+        <p:spPr>
+          <a:xfrm>
+            <a:off x="15969953" y="4299436"/>
+            <a:ext cx="2491584" cy="486980"/>
+          </a:xfrm>
+          <a:prstGeom prst="rect">
+            <a:avLst/>
+          </a:prstGeom>
+          <a:ln w="12700">
+            <a:miter lim="400000"/>
+          </a:ln>
+          <a:extLst>
+            <a:ext uri="{C572A759-6A51-4108-AA02-DFA0A04FC94B}">
+              <ma14:wrappingTextBoxFlag xmlns:ma14="http://schemas.microsoft.com/office/mac/drawingml/2011/main" xmlns:a14="http://schemas.microsoft.com/office/drawing/2010/main" xmlns:m="http://schemas.openxmlformats.org/officeDocument/2006/math" xmlns="" val="1"/>
+            </a:ext>
+          </a:extLst>
+        </p:spPr>
+        <p:txBody>
+          <a:bodyPr lIns="50800" tIns="50800" rIns="50800" bIns="50800">
+            <a:normAutofit fontScale="85000" lnSpcReduction="20000"/>
+          </a:bodyPr>
+          <a:lstStyle>
+            <a:lvl1pPr marL="0" marR="0" indent="0" algn="ctr" defTabSz="817244" rtl="0" latinLnBrk="0">
+              <a:lnSpc>
+                <a:spcPct val="100000"/>
+              </a:lnSpc>
+              <a:spcBef>
+                <a:spcPts val="0"/>
+              </a:spcBef>
+              <a:spcAft>
+                <a:spcPts val="0"/>
+              </a:spcAft>
+              <a:buClrTx/>
+              <a:buSzTx/>
+              <a:buFontTx/>
+              <a:buNone/>
+              <a:tabLst/>
+              <a:defRPr sz="3564" b="1" i="0" u="none" strike="noStrike" cap="none" spc="-35" baseline="0">
+                <a:solidFill>
+                  <a:srgbClr val="DE6734"/>
+                </a:solidFill>
+                <a:uFillTx/>
+                <a:latin typeface="Arial"/>
+                <a:ea typeface="Arial"/>
+                <a:cs typeface="Arial"/>
+                <a:sym typeface="Arial"/>
+              </a:defRPr>
+            </a:lvl1pPr>
+            <a:lvl2pPr marL="1092200" marR="0" indent="-546100" algn="l" defTabSz="2438338" rtl="0" latinLnBrk="0">
+              <a:lnSpc>
+                <a:spcPct val="90000"/>
+              </a:lnSpc>
+              <a:spcBef>
+                <a:spcPts val="2400"/>
+              </a:spcBef>
+              <a:spcAft>
+                <a:spcPts val="0"/>
+              </a:spcAft>
+              <a:buClrTx/>
+              <a:buSzPct val="150000"/>
+              <a:buFontTx/>
+              <a:buChar char="•"/>
+              <a:tabLst/>
+              <a:defRPr sz="4400" b="0" i="0" u="none" strike="noStrike" cap="none" spc="0" baseline="0">
+                <a:solidFill>
+                  <a:srgbClr val="000000"/>
+                </a:solidFill>
+                <a:uFillTx/>
+                <a:latin typeface="Canela Text Regular"/>
+                <a:ea typeface="Canela Text Regular"/>
+                <a:cs typeface="Canela Text Regular"/>
+                <a:sym typeface="Canela Text Regular"/>
+              </a:defRPr>
+            </a:lvl2pPr>
+            <a:lvl3pPr marL="1638300" marR="0" indent="-546100" algn="l" defTabSz="2438338" rtl="0" latinLnBrk="0">
+              <a:lnSpc>
+                <a:spcPct val="90000"/>
+              </a:lnSpc>
+              <a:spcBef>
+                <a:spcPts val="2400"/>
+              </a:spcBef>
+              <a:spcAft>
+                <a:spcPts val="0"/>
+              </a:spcAft>
+              <a:buClrTx/>
+              <a:buSzPct val="150000"/>
+              <a:buFontTx/>
+              <a:buChar char="•"/>
+              <a:tabLst/>
+              <a:defRPr sz="4400" b="0" i="0" u="none" strike="noStrike" cap="none" spc="0" baseline="0">
+                <a:solidFill>
+                  <a:srgbClr val="000000"/>
+                </a:solidFill>
+                <a:uFillTx/>
+                <a:latin typeface="Canela Text Regular"/>
+                <a:ea typeface="Canela Text Regular"/>
+                <a:cs typeface="Canela Text Regular"/>
+                <a:sym typeface="Canela Text Regular"/>
+              </a:defRPr>
+            </a:lvl3pPr>
+            <a:lvl4pPr marL="2184400" marR="0" indent="-546100" algn="l" defTabSz="2438338" rtl="0" latinLnBrk="0">
+              <a:lnSpc>
+                <a:spcPct val="90000"/>
+              </a:lnSpc>
+              <a:spcBef>
+                <a:spcPts val="2400"/>
+              </a:spcBef>
+              <a:spcAft>
+                <a:spcPts val="0"/>
+              </a:spcAft>
+              <a:buClrTx/>
+              <a:buSzPct val="150000"/>
+              <a:buFontTx/>
+              <a:buChar char="•"/>
+              <a:tabLst/>
+              <a:defRPr sz="4400" b="0" i="0" u="none" strike="noStrike" cap="none" spc="0" baseline="0">
+                <a:solidFill>
+                  <a:srgbClr val="000000"/>
+                </a:solidFill>
+                <a:uFillTx/>
+                <a:latin typeface="Canela Text Regular"/>
+                <a:ea typeface="Canela Text Regular"/>
+                <a:cs typeface="Canela Text Regular"/>
+                <a:sym typeface="Canela Text Regular"/>
+              </a:defRPr>
+            </a:lvl4pPr>
+            <a:lvl5pPr marL="2730500" marR="0" indent="-546100" algn="l" defTabSz="2438338" rtl="0" latinLnBrk="0">
+              <a:lnSpc>
+                <a:spcPct val="90000"/>
+              </a:lnSpc>
+              <a:spcBef>
+                <a:spcPts val="2400"/>
+              </a:spcBef>
+              <a:spcAft>
+                <a:spcPts val="0"/>
+              </a:spcAft>
+              <a:buClrTx/>
+              <a:buSzPct val="150000"/>
+              <a:buFontTx/>
+              <a:buChar char="•"/>
+              <a:tabLst/>
+              <a:defRPr sz="4400" b="0" i="0" u="none" strike="noStrike" cap="none" spc="0" baseline="0">
+                <a:solidFill>
+                  <a:srgbClr val="000000"/>
+                </a:solidFill>
+                <a:uFillTx/>
+                <a:latin typeface="Canela Text Regular"/>
+                <a:ea typeface="Canela Text Regular"/>
+                <a:cs typeface="Canela Text Regular"/>
+                <a:sym typeface="Canela Text Regular"/>
+              </a:defRPr>
+            </a:lvl5pPr>
+            <a:lvl6pPr marL="3276600" marR="0" indent="-546100" algn="l" defTabSz="2438338" rtl="0" latinLnBrk="0">
+              <a:lnSpc>
+                <a:spcPct val="90000"/>
+              </a:lnSpc>
+              <a:spcBef>
+                <a:spcPts val="2400"/>
+              </a:spcBef>
+              <a:spcAft>
+                <a:spcPts val="0"/>
+              </a:spcAft>
+              <a:buClrTx/>
+              <a:buSzPct val="150000"/>
+              <a:buFontTx/>
+              <a:buChar char="•"/>
+              <a:tabLst/>
+              <a:defRPr sz="4400" b="0" i="0" u="none" strike="noStrike" cap="none" spc="0" baseline="0">
+                <a:solidFill>
+                  <a:srgbClr val="000000"/>
+                </a:solidFill>
+                <a:uFillTx/>
+                <a:latin typeface="Canela Text Regular"/>
+                <a:ea typeface="Canela Text Regular"/>
+                <a:cs typeface="Canela Text Regular"/>
+                <a:sym typeface="Canela Text Regular"/>
+              </a:defRPr>
+            </a:lvl6pPr>
+            <a:lvl7pPr marL="3822700" marR="0" indent="-546100" algn="l" defTabSz="2438338" rtl="0" latinLnBrk="0">
+              <a:lnSpc>
+                <a:spcPct val="90000"/>
+              </a:lnSpc>
+              <a:spcBef>
+                <a:spcPts val="2400"/>
+              </a:spcBef>
+              <a:spcAft>
+                <a:spcPts val="0"/>
+              </a:spcAft>
+              <a:buClrTx/>
+              <a:buSzPct val="150000"/>
+              <a:buFontTx/>
+              <a:buChar char="•"/>
+              <a:tabLst/>
+              <a:defRPr sz="4400" b="0" i="0" u="none" strike="noStrike" cap="none" spc="0" baseline="0">
+                <a:solidFill>
+                  <a:srgbClr val="000000"/>
+                </a:solidFill>
+                <a:uFillTx/>
+                <a:latin typeface="Canela Text Regular"/>
+                <a:ea typeface="Canela Text Regular"/>
+                <a:cs typeface="Canela Text Regular"/>
+                <a:sym typeface="Canela Text Regular"/>
+              </a:defRPr>
+            </a:lvl7pPr>
+            <a:lvl8pPr marL="4368800" marR="0" indent="-546100" algn="l" defTabSz="2438338" rtl="0" latinLnBrk="0">
+              <a:lnSpc>
+                <a:spcPct val="90000"/>
+              </a:lnSpc>
+              <a:spcBef>
+                <a:spcPts val="2400"/>
+              </a:spcBef>
+              <a:spcAft>
+                <a:spcPts val="0"/>
+              </a:spcAft>
+              <a:buClrTx/>
+              <a:buSzPct val="150000"/>
+              <a:buFontTx/>
+              <a:buChar char="•"/>
+              <a:tabLst/>
+              <a:defRPr sz="4400" b="0" i="0" u="none" strike="noStrike" cap="none" spc="0" baseline="0">
+                <a:solidFill>
+                  <a:srgbClr val="000000"/>
+                </a:solidFill>
+                <a:uFillTx/>
+                <a:latin typeface="Canela Text Regular"/>
+                <a:ea typeface="Canela Text Regular"/>
+                <a:cs typeface="Canela Text Regular"/>
+                <a:sym typeface="Canela Text Regular"/>
+              </a:defRPr>
+            </a:lvl8pPr>
+            <a:lvl9pPr marL="4914900" marR="0" indent="-546100" algn="l" defTabSz="2438338" rtl="0" latinLnBrk="0">
+              <a:lnSpc>
+                <a:spcPct val="90000"/>
+              </a:lnSpc>
+              <a:spcBef>
+                <a:spcPts val="2400"/>
+              </a:spcBef>
+              <a:spcAft>
+                <a:spcPts val="0"/>
+              </a:spcAft>
+              <a:buClrTx/>
+              <a:buSzPct val="150000"/>
+              <a:buFontTx/>
+              <a:buChar char="•"/>
+              <a:tabLst/>
+              <a:defRPr sz="4400" b="0" i="0" u="none" strike="noStrike" cap="none" spc="0" baseline="0">
+                <a:solidFill>
+                  <a:srgbClr val="000000"/>
+                </a:solidFill>
+                <a:uFillTx/>
+                <a:latin typeface="Canela Text Regular"/>
+                <a:ea typeface="Canela Text Regular"/>
+                <a:cs typeface="Canela Text Regular"/>
+                <a:sym typeface="Canela Text Regular"/>
+              </a:defRPr>
+            </a:lvl9pPr>
+          </a:lstStyle>
+          <a:p>
+            <a:pPr hangingPunct="1"/>
+            <a:r>
+              <a:rPr lang="ru-RU"/>
+              <a:t>Задачи</a:t>
+            </a:r>
+          </a:p>
+        </p:txBody>
+      </p:sp>
+      <p:sp>
+        <p:nvSpPr>
+          <p:cNvPr id="15" name="Цель">
+            <a:extLst>
+              <a:ext uri="{FF2B5EF4-FFF2-40B4-BE49-F238E27FC236}">
+                <a16:creationId xmlns:a16="http://schemas.microsoft.com/office/drawing/2014/main" id="{BCA0587E-2458-47E3-B530-06585E8959B7}"/>
+              </a:ext>
+            </a:extLst>
+          </p:cNvPr>
+          <p:cNvSpPr txBox="1">
+            <a:spLocks/>
+          </p:cNvSpPr>
+          <p:nvPr/>
+        </p:nvSpPr>
+        <p:spPr>
+          <a:xfrm>
+            <a:off x="2866743" y="4250839"/>
+            <a:ext cx="3244828" cy="565111"/>
+          </a:xfrm>
+          <a:prstGeom prst="rect">
+            <a:avLst/>
+          </a:prstGeom>
+          <a:ln w="12700">
+            <a:miter lim="400000"/>
+          </a:ln>
+          <a:extLst>
+            <a:ext uri="{C572A759-6A51-4108-AA02-DFA0A04FC94B}">
+              <ma14:wrappingTextBoxFlag xmlns:ma14="http://schemas.microsoft.com/office/mac/drawingml/2011/main" xmlns:a14="http://schemas.microsoft.com/office/drawing/2010/main" xmlns:m="http://schemas.openxmlformats.org/officeDocument/2006/math" xmlns="" val="1"/>
+            </a:ext>
+          </a:extLst>
+        </p:spPr>
+        <p:txBody>
+          <a:bodyPr lIns="50800" tIns="50800" rIns="50800" bIns="50800" anchor="b">
+            <a:normAutofit/>
+          </a:bodyPr>
+          <a:lstStyle>
+            <a:lvl1pPr marL="0" marR="0" indent="0" algn="ctr" defTabSz="2438400" rtl="0" latinLnBrk="0">
+              <a:lnSpc>
+                <a:spcPct val="80000"/>
+              </a:lnSpc>
+              <a:spcBef>
+                <a:spcPts val="0"/>
+              </a:spcBef>
+              <a:spcAft>
+                <a:spcPts val="0"/>
+              </a:spcAft>
+              <a:buClrTx/>
+              <a:buSzTx/>
+              <a:buFontTx/>
+              <a:buNone/>
+              <a:tabLst/>
+              <a:defRPr sz="3600" b="1" i="0" u="none" strike="noStrike" cap="none" spc="-36" baseline="0">
+                <a:solidFill>
+                  <a:srgbClr val="DE6734"/>
+                </a:solidFill>
+                <a:uFillTx/>
+                <a:latin typeface="Arial"/>
+                <a:ea typeface="Arial"/>
+                <a:cs typeface="Arial"/>
+                <a:sym typeface="Arial"/>
+              </a:defRPr>
+            </a:lvl1pPr>
+            <a:lvl2pPr marL="0" marR="0" indent="457200" algn="ctr" defTabSz="2438400" rtl="0" latinLnBrk="0">
+              <a:lnSpc>
+                <a:spcPct val="80000"/>
+              </a:lnSpc>
+              <a:spcBef>
+                <a:spcPts val="0"/>
+              </a:spcBef>
+              <a:spcAft>
+                <a:spcPts val="0"/>
+              </a:spcAft>
+              <a:buClrTx/>
+              <a:buSzTx/>
+              <a:buFontTx/>
+              <a:buNone/>
+              <a:tabLst/>
+              <a:defRPr sz="8400" b="0" i="0" u="none" strike="noStrike" cap="none" spc="-84" baseline="0">
+                <a:solidFill>
+                  <a:srgbClr val="000000"/>
+                </a:solidFill>
+                <a:uFillTx/>
+                <a:latin typeface="+mn-lt"/>
+                <a:ea typeface="+mn-ea"/>
+                <a:cs typeface="+mn-cs"/>
+                <a:sym typeface="Canela Bold"/>
+              </a:defRPr>
+            </a:lvl2pPr>
+            <a:lvl3pPr marL="0" marR="0" indent="914400" algn="ctr" defTabSz="2438400" rtl="0" latinLnBrk="0">
+              <a:lnSpc>
+                <a:spcPct val="80000"/>
+              </a:lnSpc>
+              <a:spcBef>
+                <a:spcPts val="0"/>
+              </a:spcBef>
+              <a:spcAft>
+                <a:spcPts val="0"/>
+              </a:spcAft>
+              <a:buClrTx/>
+              <a:buSzTx/>
+              <a:buFontTx/>
+              <a:buNone/>
+              <a:tabLst/>
+              <a:defRPr sz="8400" b="0" i="0" u="none" strike="noStrike" cap="none" spc="-84" baseline="0">
+                <a:solidFill>
+                  <a:srgbClr val="000000"/>
+                </a:solidFill>
+                <a:uFillTx/>
+                <a:latin typeface="+mn-lt"/>
+                <a:ea typeface="+mn-ea"/>
+                <a:cs typeface="+mn-cs"/>
+                <a:sym typeface="Canela Bold"/>
+              </a:defRPr>
+            </a:lvl3pPr>
+            <a:lvl4pPr marL="0" marR="0" indent="1371600" algn="ctr" defTabSz="2438400" rtl="0" latinLnBrk="0">
+              <a:lnSpc>
+                <a:spcPct val="80000"/>
+              </a:lnSpc>
+              <a:spcBef>
+                <a:spcPts val="0"/>
+              </a:spcBef>
+              <a:spcAft>
+                <a:spcPts val="0"/>
+              </a:spcAft>
+              <a:buClrTx/>
+              <a:buSzTx/>
+              <a:buFontTx/>
+              <a:buNone/>
+              <a:tabLst/>
+              <a:defRPr sz="8400" b="0" i="0" u="none" strike="noStrike" cap="none" spc="-84" baseline="0">
+                <a:solidFill>
+                  <a:srgbClr val="000000"/>
+                </a:solidFill>
+                <a:uFillTx/>
+                <a:latin typeface="+mn-lt"/>
+                <a:ea typeface="+mn-ea"/>
+                <a:cs typeface="+mn-cs"/>
+                <a:sym typeface="Canela Bold"/>
+              </a:defRPr>
+            </a:lvl4pPr>
+            <a:lvl5pPr marL="0" marR="0" indent="1828800" algn="ctr" defTabSz="2438400" rtl="0" latinLnBrk="0">
+              <a:lnSpc>
+                <a:spcPct val="80000"/>
+              </a:lnSpc>
+              <a:spcBef>
+                <a:spcPts val="0"/>
+              </a:spcBef>
+              <a:spcAft>
+                <a:spcPts val="0"/>
+              </a:spcAft>
+              <a:buClrTx/>
+              <a:buSzTx/>
+              <a:buFontTx/>
+              <a:buNone/>
+              <a:tabLst/>
+              <a:defRPr sz="8400" b="0" i="0" u="none" strike="noStrike" cap="none" spc="-84" baseline="0">
+                <a:solidFill>
+                  <a:srgbClr val="000000"/>
+                </a:solidFill>
+                <a:uFillTx/>
+                <a:latin typeface="+mn-lt"/>
+                <a:ea typeface="+mn-ea"/>
+                <a:cs typeface="+mn-cs"/>
+                <a:sym typeface="Canela Bold"/>
+              </a:defRPr>
+            </a:lvl5pPr>
+            <a:lvl6pPr marL="0" marR="0" indent="2286000" algn="ctr" defTabSz="2438400" rtl="0" latinLnBrk="0">
+              <a:lnSpc>
+                <a:spcPct val="80000"/>
+              </a:lnSpc>
+              <a:spcBef>
+                <a:spcPts val="0"/>
+              </a:spcBef>
+              <a:spcAft>
+                <a:spcPts val="0"/>
+              </a:spcAft>
+              <a:buClrTx/>
+              <a:buSzTx/>
+              <a:buFontTx/>
+              <a:buNone/>
+              <a:tabLst/>
+              <a:defRPr sz="8400" b="0" i="0" u="none" strike="noStrike" cap="none" spc="-84" baseline="0">
+                <a:solidFill>
+                  <a:srgbClr val="000000"/>
+                </a:solidFill>
+                <a:uFillTx/>
+                <a:latin typeface="+mn-lt"/>
+                <a:ea typeface="+mn-ea"/>
+                <a:cs typeface="+mn-cs"/>
+                <a:sym typeface="Canela Bold"/>
+              </a:defRPr>
+            </a:lvl6pPr>
+            <a:lvl7pPr marL="0" marR="0" indent="2743200" algn="ctr" defTabSz="2438400" rtl="0" latinLnBrk="0">
+              <a:lnSpc>
+                <a:spcPct val="80000"/>
+              </a:lnSpc>
+              <a:spcBef>
+                <a:spcPts val="0"/>
+              </a:spcBef>
+              <a:spcAft>
+                <a:spcPts val="0"/>
+              </a:spcAft>
+              <a:buClrTx/>
+              <a:buSzTx/>
+              <a:buFontTx/>
+              <a:buNone/>
+              <a:tabLst/>
+              <a:defRPr sz="8400" b="0" i="0" u="none" strike="noStrike" cap="none" spc="-84" baseline="0">
+                <a:solidFill>
+                  <a:srgbClr val="000000"/>
+                </a:solidFill>
+                <a:uFillTx/>
+                <a:latin typeface="+mn-lt"/>
+                <a:ea typeface="+mn-ea"/>
+                <a:cs typeface="+mn-cs"/>
+                <a:sym typeface="Canela Bold"/>
+              </a:defRPr>
+            </a:lvl7pPr>
+            <a:lvl8pPr marL="0" marR="0" indent="3200400" algn="ctr" defTabSz="2438400" rtl="0" latinLnBrk="0">
+              <a:lnSpc>
+                <a:spcPct val="80000"/>
+              </a:lnSpc>
+              <a:spcBef>
+                <a:spcPts val="0"/>
+              </a:spcBef>
+              <a:spcAft>
+                <a:spcPts val="0"/>
+              </a:spcAft>
+              <a:buClrTx/>
+              <a:buSzTx/>
+              <a:buFontTx/>
+              <a:buNone/>
+              <a:tabLst/>
+              <a:defRPr sz="8400" b="0" i="0" u="none" strike="noStrike" cap="none" spc="-84" baseline="0">
+                <a:solidFill>
+                  <a:srgbClr val="000000"/>
+                </a:solidFill>
+                <a:uFillTx/>
+                <a:latin typeface="+mn-lt"/>
+                <a:ea typeface="+mn-ea"/>
+                <a:cs typeface="+mn-cs"/>
+                <a:sym typeface="Canela Bold"/>
+              </a:defRPr>
+            </a:lvl8pPr>
+            <a:lvl9pPr marL="0" marR="0" indent="3657600" algn="ctr" defTabSz="2438400" rtl="0" latinLnBrk="0">
+              <a:lnSpc>
+                <a:spcPct val="80000"/>
+              </a:lnSpc>
+              <a:spcBef>
+                <a:spcPts val="0"/>
+              </a:spcBef>
+              <a:spcAft>
+                <a:spcPts val="0"/>
+              </a:spcAft>
+              <a:buClrTx/>
+              <a:buSzTx/>
+              <a:buFontTx/>
+              <a:buNone/>
+              <a:tabLst/>
+              <a:defRPr sz="8400" b="0" i="0" u="none" strike="noStrike" cap="none" spc="-84" baseline="0">
+                <a:solidFill>
+                  <a:srgbClr val="000000"/>
+                </a:solidFill>
+                <a:uFillTx/>
+                <a:latin typeface="+mn-lt"/>
+                <a:ea typeface="+mn-ea"/>
+                <a:cs typeface="+mn-cs"/>
+                <a:sym typeface="Canela Bold"/>
+              </a:defRPr>
+            </a:lvl9pPr>
+          </a:lstStyle>
+          <a:p>
+            <a:pPr hangingPunct="1"/>
+            <a:r>
+              <a:rPr lang="ru-RU"/>
+              <a:t>Цель</a:t>
+            </a:r>
+          </a:p>
+        </p:txBody>
+      </p:sp>
+      <p:sp>
+        <p:nvSpPr>
+          <p:cNvPr id="16" name="Разработать интуитивно понятный…">
+            <a:extLst>
+              <a:ext uri="{FF2B5EF4-FFF2-40B4-BE49-F238E27FC236}">
+                <a16:creationId xmlns:a16="http://schemas.microsoft.com/office/drawing/2014/main" id="{A50BD1F5-966F-43CF-AC9A-5296DB939CD7}"/>
+              </a:ext>
+            </a:extLst>
+          </p:cNvPr>
           <p:cNvSpPr/>
           <p:nvPr/>
         </p:nvSpPr>
         <p:spPr>
           <a:xfrm>
-            <a:off x="1497318" y="5606177"/>
-            <a:ext cx="6775327" cy="3438469"/>
+            <a:off x="1497318" y="5606178"/>
+            <a:ext cx="5446517" cy="2764100"/>
           </a:xfrm>
           <a:prstGeom prst="roundRect">
             <a:avLst>
@@ -5210,7 +5643,7 @@
           </a:ln>
           <a:extLst>
             <a:ext uri="{C572A759-6A51-4108-AA02-DFA0A04FC94B}">
-              <ma14:wrappingTextBoxFlag xmlns:ma14="http://schemas.microsoft.com/office/mac/drawingml/2011/main" val="1"/>
+              <ma14:wrappingTextBoxFlag xmlns:ma14="http://schemas.microsoft.com/office/mac/drawingml/2011/main" xmlns:a14="http://schemas.microsoft.com/office/drawing/2010/main" xmlns:m="http://schemas.openxmlformats.org/officeDocument/2006/math" xmlns="" val="1"/>
             </a:ext>
           </a:extLst>
         </p:spPr>
@@ -5222,7 +5655,7 @@
               <a:lnSpc>
                 <a:spcPct val="100000"/>
               </a:lnSpc>
-              <a:defRPr spc="-28" sz="2800">
+              <a:defRPr sz="2800" spc="-28">
                 <a:solidFill>
                   <a:srgbClr val="FFFFFF"/>
                 </a:solidFill>
@@ -5241,7 +5674,7 @@
               <a:lnSpc>
                 <a:spcPct val="100000"/>
               </a:lnSpc>
-              <a:defRPr spc="-28" sz="2800">
+              <a:defRPr sz="2800" spc="-28">
                 <a:solidFill>
                   <a:srgbClr val="FFFFFF"/>
                 </a:solidFill>
@@ -5259,14 +5692,20 @@
       </p:sp>
       <p:sp>
         <p:nvSpPr>
-          <p:cNvPr id="171" name="- 1 Сформулировать ТЗ;…"/>
+          <p:cNvPr id="17" name="- 1 Сформулировать ТЗ;…">
+            <a:extLst>
+              <a:ext uri="{FF2B5EF4-FFF2-40B4-BE49-F238E27FC236}">
+                <a16:creationId xmlns:a16="http://schemas.microsoft.com/office/drawing/2014/main" id="{1C97CACF-FEC5-474B-90B2-EEAA37247040}"/>
+              </a:ext>
+            </a:extLst>
+          </p:cNvPr>
           <p:cNvSpPr/>
           <p:nvPr/>
         </p:nvSpPr>
         <p:spPr>
           <a:xfrm>
-            <a:off x="12416043" y="5606177"/>
-            <a:ext cx="10470639" cy="3438469"/>
+            <a:off x="12416043" y="5606178"/>
+            <a:ext cx="8417087" cy="2764100"/>
           </a:xfrm>
           <a:prstGeom prst="roundRect">
             <a:avLst>
@@ -5281,7 +5720,7 @@
           </a:ln>
           <a:extLst>
             <a:ext uri="{C572A759-6A51-4108-AA02-DFA0A04FC94B}">
-              <ma14:wrappingTextBoxFlag xmlns:ma14="http://schemas.microsoft.com/office/mac/drawingml/2011/main" val="1"/>
+              <ma14:wrappingTextBoxFlag xmlns:ma14="http://schemas.microsoft.com/office/mac/drawingml/2011/main" xmlns:a14="http://schemas.microsoft.com/office/drawing/2010/main" xmlns:m="http://schemas.openxmlformats.org/officeDocument/2006/math" xmlns="" val="1"/>
             </a:ext>
           </a:extLst>
         </p:spPr>
@@ -5293,7 +5732,7 @@
               <a:lnSpc>
                 <a:spcPct val="100000"/>
               </a:lnSpc>
-              <a:defRPr spc="-28" sz="2800">
+              <a:defRPr sz="2800" spc="-28">
                 <a:solidFill>
                   <a:srgbClr val="FFFFFF"/>
                 </a:solidFill>
@@ -5312,7 +5751,7 @@
               <a:lnSpc>
                 <a:spcPct val="100000"/>
               </a:lnSpc>
-              <a:defRPr spc="-28" sz="2800">
+              <a:defRPr sz="2800" spc="-28">
                 <a:solidFill>
                   <a:srgbClr val="FFFFFF"/>
                 </a:solidFill>
@@ -5331,7 +5770,7 @@
               <a:lnSpc>
                 <a:spcPct val="100000"/>
               </a:lnSpc>
-              <a:defRPr spc="-28" sz="2800">
+              <a:defRPr sz="2800" spc="-28">
                 <a:solidFill>
                   <a:srgbClr val="FFFFFF"/>
                 </a:solidFill>
@@ -5350,7 +5789,7 @@
               <a:lnSpc>
                 <a:spcPct val="100000"/>
               </a:lnSpc>
-              <a:defRPr spc="-28" sz="2800">
+              <a:defRPr sz="2800" spc="-28">
                 <a:solidFill>
                   <a:srgbClr val="FFFFFF"/>
                 </a:solidFill>
@@ -5369,7 +5808,7 @@
               <a:lnSpc>
                 <a:spcPct val="100000"/>
               </a:lnSpc>
-              <a:defRPr spc="-28" sz="2800">
+              <a:defRPr sz="2800" spc="-28">
                 <a:solidFill>
                   <a:srgbClr val="FFFFFF"/>
                 </a:solidFill>
@@ -5388,7 +5827,7 @@
               <a:lnSpc>
                 <a:spcPct val="100000"/>
               </a:lnSpc>
-              <a:defRPr spc="-28" sz="2800">
+              <a:defRPr sz="2800" spc="-28">
                 <a:solidFill>
                   <a:srgbClr val="FFFFFF"/>
                 </a:solidFill>
@@ -5406,24 +5845,28 @@
       </p:sp>
       <p:pic>
         <p:nvPicPr>
-          <p:cNvPr id="172" name="Линия Линия" descr="Линия Линия"/>
+          <p:cNvPr id="18" name="Линия Линия" descr="Линия Линия">
+            <a:extLst>
+              <a:ext uri="{FF2B5EF4-FFF2-40B4-BE49-F238E27FC236}">
+                <a16:creationId xmlns:a16="http://schemas.microsoft.com/office/drawing/2014/main" id="{76BAB4CB-6DCB-4E59-92CC-5428E3624761}"/>
+              </a:ext>
+            </a:extLst>
+          </p:cNvPr>
           <p:cNvPicPr>
-            <a:picLocks noChangeAspect="0"/>
+            <a:picLocks/>
           </p:cNvPicPr>
           <p:nvPr/>
         </p:nvPicPr>
         <p:blipFill>
-          <a:blip r:embed="rId2">
-            <a:extLst/>
-          </a:blip>
+          <a:blip r:embed="rId3"/>
           <a:stretch>
             <a:fillRect/>
           </a:stretch>
         </p:blipFill>
         <p:spPr>
           <a:xfrm>
-            <a:off x="8756511" y="7287311"/>
-            <a:ext cx="3175667" cy="76201"/>
+            <a:off x="8756512" y="7287312"/>
+            <a:ext cx="2552836" cy="61256"/>
           </a:xfrm>
           <a:prstGeom prst="rect">
             <a:avLst/>
@@ -5435,12 +5878,12 @@
   <p:clrMapOvr>
     <a:masterClrMapping/>
   </p:clrMapOvr>
-  <p:transition xmlns:p14="http://schemas.microsoft.com/office/powerpoint/2010/main" spd="med" advClick="1"/>
+  <p:transition spd="med"/>
 </p:sld>
 </file>
 
-<file path=ppt/slides/slide4.xml><?xml version="1.0" encoding="utf-8"?>
-<p:sld xmlns:a="http://schemas.openxmlformats.org/drawingml/2006/main" xmlns:r="http://schemas.openxmlformats.org/officeDocument/2006/relationships" xmlns:p="http://schemas.openxmlformats.org/presentationml/2006/main" xmlns:m="http://schemas.openxmlformats.org/officeDocument/2006/math" xmlns:a14="http://schemas.microsoft.com/office/drawing/2010/main" showMasterSp="1" showMasterPhAnim="1">
+<file path=ppt/slides/slide3.xml><?xml version="1.0" encoding="utf-8"?>
+<p:sld xmlns:a="http://schemas.openxmlformats.org/drawingml/2006/main" xmlns:r="http://schemas.openxmlformats.org/officeDocument/2006/relationships" xmlns:p="http://schemas.openxmlformats.org/presentationml/2006/main">
   <p:cSld>
     <p:spTree>
       <p:nvGrpSpPr>
@@ -5458,91 +5901,6 @@
       </p:grpSpPr>
       <p:sp>
         <p:nvSpPr>
-          <p:cNvPr id="175" name="Решение"/>
-          <p:cNvSpPr txBox="1"/>
-          <p:nvPr>
-            <p:ph type="body" idx="21"/>
-          </p:nvPr>
-        </p:nvSpPr>
-        <p:spPr>
-          <a:xfrm>
-            <a:off x="1244600" y="7998289"/>
-            <a:ext cx="3099468" cy="605791"/>
-          </a:xfrm>
-          <a:prstGeom prst="rect">
-            <a:avLst/>
-          </a:prstGeom>
-          <a:extLst>
-            <a:ext uri="{C572A759-6A51-4108-AA02-DFA0A04FC94B}">
-              <ma14:wrappingTextBoxFlag xmlns:ma14="http://schemas.microsoft.com/office/mac/drawingml/2011/main" val="1"/>
-            </a:ext>
-          </a:extLst>
-        </p:spPr>
-        <p:txBody>
-          <a:bodyPr/>
-          <a:lstStyle>
-            <a:lvl1pPr algn="l" defTabSz="817244">
-              <a:defRPr b="1" spc="-35" sz="3564">
-                <a:solidFill>
-                  <a:srgbClr val="DE6734"/>
-                </a:solidFill>
-                <a:latin typeface="Arial"/>
-                <a:ea typeface="Arial"/>
-                <a:cs typeface="Arial"/>
-                <a:sym typeface="Arial"/>
-              </a:defRPr>
-            </a:lvl1pPr>
-          </a:lstStyle>
-          <a:p>
-            <a:pPr/>
-            <a:r>
-              <a:t>Решение</a:t>
-            </a:r>
-          </a:p>
-        </p:txBody>
-      </p:sp>
-      <p:sp>
-        <p:nvSpPr>
-          <p:cNvPr id="176" name="Проблема"/>
-          <p:cNvSpPr txBox="1"/>
-          <p:nvPr>
-            <p:ph type="ctrTitle"/>
-          </p:nvPr>
-        </p:nvSpPr>
-        <p:spPr>
-          <a:xfrm>
-            <a:off x="1243583" y="3896328"/>
-            <a:ext cx="4036479" cy="702983"/>
-          </a:xfrm>
-          <a:prstGeom prst="rect">
-            <a:avLst/>
-          </a:prstGeom>
-        </p:spPr>
-        <p:txBody>
-          <a:bodyPr/>
-          <a:lstStyle>
-            <a:lvl1pPr algn="l">
-              <a:defRPr b="1" spc="-36" sz="3600">
-                <a:solidFill>
-                  <a:srgbClr val="DE6734"/>
-                </a:solidFill>
-                <a:latin typeface="Arial"/>
-                <a:ea typeface="Arial"/>
-                <a:cs typeface="Arial"/>
-                <a:sym typeface="Arial"/>
-              </a:defRPr>
-            </a:lvl1pPr>
-          </a:lstStyle>
-          <a:p>
-            <a:pPr/>
-            <a:r>
-              <a:t>Проблема</a:t>
-            </a:r>
-          </a:p>
-        </p:txBody>
-      </p:sp>
-      <p:sp>
-        <p:nvSpPr>
           <p:cNvPr id="177" name="Текст"/>
           <p:cNvSpPr txBox="1"/>
           <p:nvPr/>
@@ -5560,7 +5918,7 @@
           </a:ln>
           <a:extLst>
             <a:ext uri="{C572A759-6A51-4108-AA02-DFA0A04FC94B}">
-              <ma14:wrappingTextBoxFlag xmlns:ma14="http://schemas.microsoft.com/office/mac/drawingml/2011/main" val="1"/>
+              <ma14:wrappingTextBoxFlag xmlns:ma14="http://schemas.microsoft.com/office/mac/drawingml/2011/main" xmlns:a14="http://schemas.microsoft.com/office/drawing/2010/main" xmlns:m="http://schemas.openxmlformats.org/officeDocument/2006/math" xmlns="" val="1"/>
             </a:ext>
           </a:extLst>
         </p:spPr>
@@ -5584,6 +5942,7 @@
                 <a:sym typeface="Helvetica"/>
               </a:defRPr>
             </a:pPr>
+            <a:endParaRPr/>
           </a:p>
         </p:txBody>
       </p:sp>
@@ -5606,7 +5965,7 @@
           </a:ln>
           <a:extLst>
             <a:ext uri="{C572A759-6A51-4108-AA02-DFA0A04FC94B}">
-              <ma14:wrappingTextBoxFlag xmlns:ma14="http://schemas.microsoft.com/office/mac/drawingml/2011/main" val="1"/>
+              <ma14:wrappingTextBoxFlag xmlns:ma14="http://schemas.microsoft.com/office/mac/drawingml/2011/main" xmlns:a14="http://schemas.microsoft.com/office/drawing/2010/main" xmlns:m="http://schemas.openxmlformats.org/officeDocument/2006/math" xmlns="" val="1"/>
             </a:ext>
           </a:extLst>
         </p:spPr>
@@ -5647,6 +6006,7 @@
                 <a:sym typeface="Helvetica"/>
               </a:defRPr>
             </a:pPr>
+            <a:endParaRPr u="sng"/>
           </a:p>
           <a:p>
             <a:pPr algn="l" defTabSz="457200">
@@ -5663,6 +6023,7 @@
                 <a:sym typeface="Helvetica"/>
               </a:defRPr>
             </a:pPr>
+            <a:endParaRPr u="sng"/>
           </a:p>
           <a:p>
             <a:pPr algn="l" defTabSz="457200">
@@ -5679,6 +6040,7 @@
                 <a:sym typeface="Helvetica"/>
               </a:defRPr>
             </a:pPr>
+            <a:endParaRPr u="sng"/>
           </a:p>
           <a:p>
             <a:pPr algn="l" defTabSz="457200">
@@ -5695,6 +6057,7 @@
                 <a:sym typeface="Helvetica"/>
               </a:defRPr>
             </a:pPr>
+            <a:endParaRPr u="sng"/>
           </a:p>
         </p:txBody>
       </p:sp>
@@ -5720,7 +6083,7 @@
           </a:ln>
           <a:extLst>
             <a:ext uri="{C572A759-6A51-4108-AA02-DFA0A04FC94B}">
-              <ma14:wrappingTextBoxFlag xmlns:ma14="http://schemas.microsoft.com/office/mac/drawingml/2011/main" val="1"/>
+              <ma14:wrappingTextBoxFlag xmlns:ma14="http://schemas.microsoft.com/office/mac/drawingml/2011/main" xmlns:a14="http://schemas.microsoft.com/office/drawing/2010/main" xmlns:m="http://schemas.openxmlformats.org/officeDocument/2006/math" xmlns="" val="1"/>
             </a:ext>
           </a:extLst>
         </p:spPr>
@@ -5731,7 +6094,7 @@
               <a:lnSpc>
                 <a:spcPct val="100000"/>
               </a:lnSpc>
-              <a:defRPr b="1" sz="4400">
+              <a:defRPr sz="4400" b="1">
                 <a:solidFill>
                   <a:srgbClr val="FFFFFF"/>
                 </a:solidFill>
@@ -5743,10 +6106,23 @@
             </a:lvl1pPr>
           </a:lstStyle>
           <a:p>
-            <a:pPr/>
-            <a:r>
-              <a:t>Архитектура и стек технологий</a:t>
-            </a:r>
+            <a:r>
+              <a:rPr lang="ru-RU" dirty="0"/>
+              <a:t>С</a:t>
+            </a:r>
+            <a:r>
+              <a:rPr dirty="0" err="1"/>
+              <a:t>тек</a:t>
+            </a:r>
+            <a:r>
+              <a:rPr dirty="0"/>
+              <a:t> </a:t>
+            </a:r>
+            <a:r>
+              <a:rPr dirty="0" err="1"/>
+              <a:t>технологий</a:t>
+            </a:r>
+            <a:endParaRPr dirty="0"/>
           </a:p>
         </p:txBody>
       </p:sp>
@@ -5758,8 +6134,8 @@
         </p:nvSpPr>
         <p:spPr>
           <a:xfrm>
-            <a:off x="1169416" y="3808984"/>
-            <a:ext cx="6443489" cy="4979632"/>
+            <a:off x="1169891" y="4275339"/>
+            <a:ext cx="4218665" cy="3611724"/>
           </a:xfrm>
           <a:prstGeom prst="roundRect">
             <a:avLst>
@@ -5774,7 +6150,7 @@
           </a:ln>
           <a:extLst>
             <a:ext uri="{C572A759-6A51-4108-AA02-DFA0A04FC94B}">
-              <ma14:wrappingTextBoxFlag xmlns:ma14="http://schemas.microsoft.com/office/mac/drawingml/2011/main" val="1"/>
+              <ma14:wrappingTextBoxFlag xmlns:ma14="http://schemas.microsoft.com/office/mac/drawingml/2011/main" xmlns:a14="http://schemas.microsoft.com/office/drawing/2010/main" xmlns:m="http://schemas.openxmlformats.org/officeDocument/2006/math" xmlns="" val="1"/>
             </a:ext>
           </a:extLst>
         </p:spPr>
@@ -5797,10 +6173,11 @@
             </a:lvl1pPr>
           </a:lstStyle>
           <a:p>
-            <a:pPr/>
-            <a:r>
+            <a:r>
+              <a:rPr dirty="0" err="1"/>
               <a:t>OpenServer</a:t>
             </a:r>
+            <a:endParaRPr dirty="0"/>
           </a:p>
         </p:txBody>
       </p:sp>
@@ -5812,8 +6189,8 @@
         </p:nvSpPr>
         <p:spPr>
           <a:xfrm>
-            <a:off x="8970256" y="3808984"/>
-            <a:ext cx="6443489" cy="4979632"/>
+            <a:off x="6995772" y="4275339"/>
+            <a:ext cx="4218665" cy="3611724"/>
           </a:xfrm>
           <a:prstGeom prst="roundRect">
             <a:avLst>
@@ -5828,7 +6205,7 @@
           </a:ln>
           <a:extLst>
             <a:ext uri="{C572A759-6A51-4108-AA02-DFA0A04FC94B}">
-              <ma14:wrappingTextBoxFlag xmlns:ma14="http://schemas.microsoft.com/office/mac/drawingml/2011/main" val="1"/>
+              <ma14:wrappingTextBoxFlag xmlns:ma14="http://schemas.microsoft.com/office/mac/drawingml/2011/main" xmlns:a14="http://schemas.microsoft.com/office/drawing/2010/main" xmlns:m="http://schemas.openxmlformats.org/officeDocument/2006/math" xmlns="" val="1"/>
             </a:ext>
           </a:extLst>
         </p:spPr>
@@ -5851,7 +6228,6 @@
             </a:lvl1pPr>
           </a:lstStyle>
           <a:p>
-            <a:pPr/>
             <a:r>
               <a:t>Visual Studio Code</a:t>
             </a:r>
@@ -5866,8 +6242,8 @@
         </p:nvSpPr>
         <p:spPr>
           <a:xfrm>
-            <a:off x="16771095" y="3808984"/>
-            <a:ext cx="6443489" cy="4979632"/>
+            <a:off x="12970953" y="4275339"/>
+            <a:ext cx="4218665" cy="3611724"/>
           </a:xfrm>
           <a:prstGeom prst="roundRect">
             <a:avLst>
@@ -5882,7 +6258,7 @@
           </a:ln>
           <a:extLst>
             <a:ext uri="{C572A759-6A51-4108-AA02-DFA0A04FC94B}">
-              <ma14:wrappingTextBoxFlag xmlns:ma14="http://schemas.microsoft.com/office/mac/drawingml/2011/main" val="1"/>
+              <ma14:wrappingTextBoxFlag xmlns:ma14="http://schemas.microsoft.com/office/mac/drawingml/2011/main" xmlns:a14="http://schemas.microsoft.com/office/drawing/2010/main" xmlns:m="http://schemas.openxmlformats.org/officeDocument/2006/math" xmlns="" val="1"/>
             </a:ext>
           </a:extLst>
         </p:spPr>
@@ -5905,8 +6281,8 @@
             </a:lvl1pPr>
           </a:lstStyle>
           <a:p>
-            <a:pPr/>
-            <a:r>
+            <a:r>
+              <a:rPr dirty="0"/>
               <a:t>PhpMyAdmin</a:t>
             </a:r>
           </a:p>
@@ -5920,7 +6296,7 @@
         </p:nvSpPr>
         <p:spPr>
           <a:xfrm>
-            <a:off x="8656637" y="12040803"/>
+            <a:off x="8656637" y="11917711"/>
             <a:ext cx="7070726" cy="496367"/>
           </a:xfrm>
           <a:prstGeom prst="rect">
@@ -5931,7 +6307,7 @@
           </a:ln>
           <a:extLst>
             <a:ext uri="{C572A759-6A51-4108-AA02-DFA0A04FC94B}">
-              <ma14:wrappingTextBoxFlag xmlns:ma14="http://schemas.microsoft.com/office/mac/drawingml/2011/main" val="1"/>
+              <ma14:wrappingTextBoxFlag xmlns:ma14="http://schemas.microsoft.com/office/mac/drawingml/2011/main" xmlns:a14="http://schemas.microsoft.com/office/drawing/2010/main" xmlns:m="http://schemas.openxmlformats.org/officeDocument/2006/math" xmlns="" val="1"/>
             </a:ext>
           </a:extLst>
         </p:spPr>
@@ -5950,9 +6326,29 @@
             </a:lvl1pPr>
           </a:lstStyle>
           <a:p>
-            <a:pPr/>
-            <a:r>
-              <a:t>Клиентская часть: HTML, CSS, JavaScirpt </a:t>
+            <a:r>
+              <a:rPr dirty="0" err="1"/>
+              <a:t>Клиентская</a:t>
+            </a:r>
+            <a:r>
+              <a:rPr dirty="0"/>
+              <a:t> </a:t>
+            </a:r>
+            <a:r>
+              <a:rPr dirty="0" err="1"/>
+              <a:t>часть</a:t>
+            </a:r>
+            <a:r>
+              <a:rPr dirty="0"/>
+              <a:t>: HTML, CSS, </a:t>
+            </a:r>
+            <a:r>
+              <a:rPr dirty="0" err="1"/>
+              <a:t>JavaScirpt</a:t>
+            </a:r>
+            <a:r>
+              <a:rPr dirty="0"/>
+              <a:t> </a:t>
             </a:r>
           </a:p>
         </p:txBody>
@@ -5965,8 +6361,8 @@
         </p:nvSpPr>
         <p:spPr>
           <a:xfrm>
-            <a:off x="1169416" y="3765296"/>
-            <a:ext cx="6443489" cy="1549401"/>
+            <a:off x="1169891" y="4231652"/>
+            <a:ext cx="4218665" cy="1123780"/>
           </a:xfrm>
           <a:prstGeom prst="roundRect">
             <a:avLst>
@@ -5981,7 +6377,7 @@
           </a:ln>
           <a:extLst>
             <a:ext uri="{C572A759-6A51-4108-AA02-DFA0A04FC94B}">
-              <ma14:wrappingTextBoxFlag xmlns:ma14="http://schemas.microsoft.com/office/mac/drawingml/2011/main" val="1"/>
+              <ma14:wrappingTextBoxFlag xmlns:ma14="http://schemas.microsoft.com/office/mac/drawingml/2011/main" xmlns:a14="http://schemas.microsoft.com/office/drawing/2010/main" xmlns:m="http://schemas.openxmlformats.org/officeDocument/2006/math" xmlns="" val="1"/>
             </a:ext>
           </a:extLst>
         </p:spPr>
@@ -5992,7 +6388,7 @@
               <a:lnSpc>
                 <a:spcPct val="100000"/>
               </a:lnSpc>
-              <a:defRPr b="1" sz="3200">
+              <a:defRPr sz="3200" b="1">
                 <a:solidFill>
                   <a:srgbClr val="FFFFFF"/>
                 </a:solidFill>
@@ -6004,10 +6400,19 @@
             </a:lvl1pPr>
           </a:lstStyle>
           <a:p>
-            <a:pPr/>
-            <a:r>
-              <a:t>Локальный сервер</a:t>
-            </a:r>
+            <a:r>
+              <a:rPr sz="2800" dirty="0" err="1"/>
+              <a:t>Локальный</a:t>
+            </a:r>
+            <a:r>
+              <a:rPr sz="2800" dirty="0"/>
+              <a:t> </a:t>
+            </a:r>
+            <a:r>
+              <a:rPr sz="2800" dirty="0" err="1"/>
+              <a:t>сервер</a:t>
+            </a:r>
+            <a:endParaRPr sz="2800" dirty="0"/>
           </a:p>
         </p:txBody>
       </p:sp>
@@ -6019,8 +6424,8 @@
         </p:nvSpPr>
         <p:spPr>
           <a:xfrm>
-            <a:off x="8970256" y="3765296"/>
-            <a:ext cx="6443489" cy="1549401"/>
+            <a:off x="6995772" y="4231652"/>
+            <a:ext cx="4218665" cy="1123780"/>
           </a:xfrm>
           <a:prstGeom prst="roundRect">
             <a:avLst>
@@ -6035,7 +6440,7 @@
           </a:ln>
           <a:extLst>
             <a:ext uri="{C572A759-6A51-4108-AA02-DFA0A04FC94B}">
-              <ma14:wrappingTextBoxFlag xmlns:ma14="http://schemas.microsoft.com/office/mac/drawingml/2011/main" val="1"/>
+              <ma14:wrappingTextBoxFlag xmlns:ma14="http://schemas.microsoft.com/office/mac/drawingml/2011/main" xmlns:a14="http://schemas.microsoft.com/office/drawing/2010/main" xmlns:m="http://schemas.openxmlformats.org/officeDocument/2006/math" xmlns="" val="1"/>
             </a:ext>
           </a:extLst>
         </p:spPr>
@@ -6046,7 +6451,7 @@
               <a:lnSpc>
                 <a:spcPct val="100000"/>
               </a:lnSpc>
-              <a:defRPr b="1" sz="3200">
+              <a:defRPr sz="3200" b="1">
                 <a:solidFill>
                   <a:srgbClr val="FFFFFF"/>
                 </a:solidFill>
@@ -6058,8 +6463,8 @@
             </a:lvl1pPr>
           </a:lstStyle>
           <a:p>
-            <a:pPr/>
-            <a:r>
+            <a:r>
+              <a:rPr sz="2800"/>
               <a:t>Редактор кода</a:t>
             </a:r>
           </a:p>
@@ -6073,8 +6478,8 @@
         </p:nvSpPr>
         <p:spPr>
           <a:xfrm>
-            <a:off x="16771095" y="3765296"/>
-            <a:ext cx="6443489" cy="1549401"/>
+            <a:off x="12970953" y="4231652"/>
+            <a:ext cx="4218665" cy="1123780"/>
           </a:xfrm>
           <a:prstGeom prst="roundRect">
             <a:avLst>
@@ -6089,7 +6494,7 @@
           </a:ln>
           <a:extLst>
             <a:ext uri="{C572A759-6A51-4108-AA02-DFA0A04FC94B}">
-              <ma14:wrappingTextBoxFlag xmlns:ma14="http://schemas.microsoft.com/office/mac/drawingml/2011/main" val="1"/>
+              <ma14:wrappingTextBoxFlag xmlns:ma14="http://schemas.microsoft.com/office/mac/drawingml/2011/main" xmlns:a14="http://schemas.microsoft.com/office/drawing/2010/main" xmlns:m="http://schemas.openxmlformats.org/officeDocument/2006/math" xmlns="" val="1"/>
             </a:ext>
           </a:extLst>
         </p:spPr>
@@ -6100,7 +6505,7 @@
               <a:lnSpc>
                 <a:spcPct val="100000"/>
               </a:lnSpc>
-              <a:defRPr b="1" sz="3200">
+              <a:defRPr sz="3200" b="1">
                 <a:solidFill>
                   <a:srgbClr val="FFFFFF"/>
                 </a:solidFill>
@@ -6112,8 +6517,8 @@
             </a:lvl1pPr>
           </a:lstStyle>
           <a:p>
-            <a:pPr/>
-            <a:r>
+            <a:r>
+              <a:rPr sz="2800"/>
               <a:t>Управление БД</a:t>
             </a:r>
           </a:p>
@@ -6128,16 +6533,14 @@
           <p:nvPr/>
         </p:nvPicPr>
         <p:blipFill>
-          <a:blip r:embed="rId2">
-            <a:extLst/>
-          </a:blip>
+          <a:blip r:embed="rId2"/>
           <a:stretch>
             <a:fillRect/>
           </a:stretch>
         </p:blipFill>
         <p:spPr>
           <a:xfrm>
-            <a:off x="3757401" y="9360704"/>
+            <a:off x="2645464" y="8611244"/>
             <a:ext cx="1267518" cy="1267518"/>
           </a:xfrm>
           <a:prstGeom prst="rect">
@@ -6157,16 +6560,14 @@
           <p:nvPr/>
         </p:nvPicPr>
         <p:blipFill>
-          <a:blip r:embed="rId3">
-            <a:extLst/>
-          </a:blip>
+          <a:blip r:embed="rId3"/>
           <a:stretch>
             <a:fillRect/>
           </a:stretch>
         </p:blipFill>
         <p:spPr>
           <a:xfrm>
-            <a:off x="11558241" y="9360704"/>
+            <a:off x="8471345" y="8611244"/>
             <a:ext cx="1267518" cy="1267518"/>
           </a:xfrm>
           <a:prstGeom prst="rect">
@@ -6186,16 +6587,14 @@
           <p:nvPr/>
         </p:nvPicPr>
         <p:blipFill>
-          <a:blip r:embed="rId4">
-            <a:extLst/>
-          </a:blip>
+          <a:blip r:embed="rId4"/>
           <a:stretch>
             <a:fillRect/>
           </a:stretch>
         </p:blipFill>
         <p:spPr>
           <a:xfrm>
-            <a:off x="18806416" y="8808039"/>
+            <a:off x="13976361" y="8058578"/>
             <a:ext cx="2372848" cy="2372849"/>
           </a:xfrm>
           <a:prstGeom prst="rect">
@@ -6204,6 +6603,175 @@
           <a:ln w="12700">
             <a:miter lim="400000"/>
           </a:ln>
+        </p:spPr>
+      </p:pic>
+      <p:sp>
+        <p:nvSpPr>
+          <p:cNvPr id="17" name="PhpMyAdmin">
+            <a:extLst>
+              <a:ext uri="{FF2B5EF4-FFF2-40B4-BE49-F238E27FC236}">
+                <a16:creationId xmlns:a16="http://schemas.microsoft.com/office/drawing/2014/main" id="{559691AD-2C01-4404-85C2-8D868D9056C2}"/>
+              </a:ext>
+            </a:extLst>
+          </p:cNvPr>
+          <p:cNvSpPr/>
+          <p:nvPr/>
+        </p:nvSpPr>
+        <p:spPr>
+          <a:xfrm>
+            <a:off x="18946134" y="4275339"/>
+            <a:ext cx="4218665" cy="3611724"/>
+          </a:xfrm>
+          <a:prstGeom prst="roundRect">
+            <a:avLst>
+              <a:gd name="adj" fmla="val 15000"/>
+            </a:avLst>
+          </a:prstGeom>
+          <a:solidFill>
+            <a:srgbClr val="5F5F5F"/>
+          </a:solidFill>
+          <a:ln w="12700">
+            <a:miter lim="400000"/>
+          </a:ln>
+          <a:extLst>
+            <a:ext uri="{C572A759-6A51-4108-AA02-DFA0A04FC94B}">
+              <ma14:wrappingTextBoxFlag xmlns:ma14="http://schemas.microsoft.com/office/mac/drawingml/2011/main" xmlns:a14="http://schemas.microsoft.com/office/drawing/2010/main" xmlns:m="http://schemas.openxmlformats.org/officeDocument/2006/math" xmlns="" val="1"/>
+            </a:ext>
+          </a:extLst>
+        </p:spPr>
+        <p:txBody>
+          <a:bodyPr lIns="50800" tIns="50800" rIns="50800" bIns="50800" anchor="ctr"/>
+          <a:lstStyle>
+            <a:lvl1pPr defTabSz="1130300">
+              <a:lnSpc>
+                <a:spcPct val="100000"/>
+              </a:lnSpc>
+              <a:defRPr sz="3200">
+                <a:solidFill>
+                  <a:srgbClr val="FFFFFF"/>
+                </a:solidFill>
+                <a:latin typeface="Arial"/>
+                <a:ea typeface="Arial"/>
+                <a:cs typeface="Arial"/>
+                <a:sym typeface="Arial"/>
+              </a:defRPr>
+            </a:lvl1pPr>
+          </a:lstStyle>
+          <a:p>
+            <a:r>
+              <a:rPr lang="en-US" dirty="0"/>
+              <a:t>Figma</a:t>
+            </a:r>
+            <a:endParaRPr dirty="0"/>
+          </a:p>
+        </p:txBody>
+      </p:sp>
+      <p:sp>
+        <p:nvSpPr>
+          <p:cNvPr id="18" name="Управление БД">
+            <a:extLst>
+              <a:ext uri="{FF2B5EF4-FFF2-40B4-BE49-F238E27FC236}">
+                <a16:creationId xmlns:a16="http://schemas.microsoft.com/office/drawing/2014/main" id="{01D92EBA-F450-4EEC-A1C8-DF0FFD463CF2}"/>
+              </a:ext>
+            </a:extLst>
+          </p:cNvPr>
+          <p:cNvSpPr/>
+          <p:nvPr/>
+        </p:nvSpPr>
+        <p:spPr>
+          <a:xfrm>
+            <a:off x="18946134" y="4231652"/>
+            <a:ext cx="4218665" cy="1123780"/>
+          </a:xfrm>
+          <a:prstGeom prst="roundRect">
+            <a:avLst>
+              <a:gd name="adj" fmla="val 48209"/>
+            </a:avLst>
+          </a:prstGeom>
+          <a:solidFill>
+            <a:srgbClr val="DE6734"/>
+          </a:solidFill>
+          <a:ln w="12700">
+            <a:miter lim="400000"/>
+          </a:ln>
+          <a:extLst>
+            <a:ext uri="{C572A759-6A51-4108-AA02-DFA0A04FC94B}">
+              <ma14:wrappingTextBoxFlag xmlns:ma14="http://schemas.microsoft.com/office/mac/drawingml/2011/main" xmlns:a14="http://schemas.microsoft.com/office/drawing/2010/main" xmlns:m="http://schemas.openxmlformats.org/officeDocument/2006/math" xmlns="" val="1"/>
+            </a:ext>
+          </a:extLst>
+        </p:spPr>
+        <p:txBody>
+          <a:bodyPr lIns="50800" tIns="50800" rIns="50800" bIns="50800" anchor="ctr"/>
+          <a:lstStyle>
+            <a:lvl1pPr defTabSz="1130300">
+              <a:lnSpc>
+                <a:spcPct val="100000"/>
+              </a:lnSpc>
+              <a:defRPr sz="3200" b="1">
+                <a:solidFill>
+                  <a:srgbClr val="FFFFFF"/>
+                </a:solidFill>
+                <a:latin typeface="Arial"/>
+                <a:ea typeface="Arial"/>
+                <a:cs typeface="Arial"/>
+                <a:sym typeface="Arial"/>
+              </a:defRPr>
+            </a:lvl1pPr>
+          </a:lstStyle>
+          <a:p>
+            <a:r>
+              <a:rPr lang="ru-RU" sz="2800" dirty="0"/>
+              <a:t>Создание Макета</a:t>
+            </a:r>
+            <a:endParaRPr sz="2800" dirty="0"/>
+          </a:p>
+        </p:txBody>
+      </p:sp>
+      <p:pic>
+        <p:nvPicPr>
+          <p:cNvPr id="1032" name="Picture 8" descr="Figma Logo Icon Figma App Editable Transparent Background Premium ...">
+            <a:extLst>
+              <a:ext uri="{FF2B5EF4-FFF2-40B4-BE49-F238E27FC236}">
+                <a16:creationId xmlns:a16="http://schemas.microsoft.com/office/drawing/2014/main" id="{7455A9AE-13EA-4C81-A389-A33CA6A03F9E}"/>
+              </a:ext>
+            </a:extLst>
+          </p:cNvPr>
+          <p:cNvPicPr>
+            <a:picLocks noChangeAspect="1" noChangeArrowheads="1"/>
+          </p:cNvPicPr>
+          <p:nvPr/>
+        </p:nvPicPr>
+        <p:blipFill>
+          <a:blip r:embed="rId5" cstate="print">
+            <a:extLst>
+              <a:ext uri="{28A0092B-C50C-407E-A947-70E740481C1C}">
+                <a14:useLocalDpi xmlns:a14="http://schemas.microsoft.com/office/drawing/2010/main" val="0"/>
+              </a:ext>
+            </a:extLst>
+          </a:blip>
+          <a:srcRect/>
+          <a:stretch>
+            <a:fillRect/>
+          </a:stretch>
+        </p:blipFill>
+        <p:spPr bwMode="auto">
+          <a:xfrm>
+            <a:off x="19979774" y="8169310"/>
+            <a:ext cx="2151383" cy="2151383"/>
+          </a:xfrm>
+          <a:prstGeom prst="rect">
+            <a:avLst/>
+          </a:prstGeom>
+          <a:noFill/>
+          <a:extLst>
+            <a:ext uri="{909E8E84-426E-40DD-AFC4-6F175D3DCCD1}">
+              <a14:hiddenFill xmlns:a14="http://schemas.microsoft.com/office/drawing/2010/main">
+                <a:solidFill>
+                  <a:srgbClr val="FFFFFF"/>
+                </a:solidFill>
+              </a14:hiddenFill>
+            </a:ext>
+          </a:extLst>
         </p:spPr>
       </p:pic>
     </p:spTree>
@@ -6211,12 +6779,12 @@
   <p:clrMapOvr>
     <a:masterClrMapping/>
   </p:clrMapOvr>
-  <p:transition xmlns:p14="http://schemas.microsoft.com/office/powerpoint/2010/main" spd="med" advClick="1"/>
+  <p:transition spd="med"/>
 </p:sld>
 </file>
 
-<file path=ppt/slides/slide5.xml><?xml version="1.0" encoding="utf-8"?>
-<p:sld xmlns:a="http://schemas.openxmlformats.org/drawingml/2006/main" xmlns:r="http://schemas.openxmlformats.org/officeDocument/2006/relationships" xmlns:p="http://schemas.openxmlformats.org/presentationml/2006/main" xmlns:m="http://schemas.openxmlformats.org/officeDocument/2006/math" xmlns:a14="http://schemas.microsoft.com/office/drawing/2010/main" showMasterSp="1" showMasterPhAnim="1">
+<file path=ppt/slides/slide4.xml><?xml version="1.0" encoding="utf-8"?>
+<p:sld xmlns:a="http://schemas.openxmlformats.org/drawingml/2006/main" xmlns:r="http://schemas.openxmlformats.org/officeDocument/2006/relationships" xmlns:p="http://schemas.openxmlformats.org/presentationml/2006/main">
   <p:cSld>
     <p:spTree>
       <p:nvGrpSpPr>
@@ -6271,13 +6839,16 @@
                 <a:sym typeface="Avenir Next Regular"/>
               </a:defRPr>
             </a:pPr>
+            <a:endParaRPr/>
           </a:p>
         </p:txBody>
       </p:sp>
       <p:sp>
         <p:nvSpPr>
           <p:cNvPr id="192" name="Categories"/>
-          <p:cNvSpPr txBox="1"/>
+          <p:cNvSpPr txBox="1">
+            <a:spLocks noGrp="1"/>
+          </p:cNvSpPr>
           <p:nvPr>
             <p:ph type="ctrTitle"/>
           </p:nvPr>
@@ -6295,7 +6866,7 @@
           <a:bodyPr/>
           <a:lstStyle>
             <a:lvl1pPr algn="l">
-              <a:defRPr b="1" spc="-36" sz="3600">
+              <a:defRPr sz="3600" b="1" spc="-36">
                 <a:solidFill>
                   <a:srgbClr val="DE6734"/>
                 </a:solidFill>
@@ -6307,7 +6878,6 @@
             </a:lvl1pPr>
           </a:lstStyle>
           <a:p>
-            <a:pPr/>
             <a:r>
               <a:t>Categories</a:t>
             </a:r>
@@ -6317,7 +6887,9 @@
       <p:sp>
         <p:nvSpPr>
           <p:cNvPr id="193" name="Id, title, icon - Категории блюд"/>
-          <p:cNvSpPr txBox="1"/>
+          <p:cNvSpPr txBox="1">
+            <a:spLocks noGrp="1"/>
+          </p:cNvSpPr>
           <p:nvPr>
             <p:ph type="subTitle" sz="quarter" idx="1"/>
           </p:nvPr>
@@ -6335,7 +6907,7 @@
           <a:bodyPr/>
           <a:lstStyle>
             <a:lvl1pPr algn="l">
-              <a:defRPr spc="-28" sz="2800">
+              <a:defRPr sz="2800" spc="-28">
                 <a:latin typeface="Arial"/>
                 <a:ea typeface="Arial"/>
                 <a:cs typeface="Arial"/>
@@ -6344,7 +6916,6 @@
             </a:lvl1pPr>
           </a:lstStyle>
           <a:p>
-            <a:pPr/>
             <a:r>
               <a:t>Id, title, icon - Категории блюд</a:t>
             </a:r>
@@ -6370,7 +6941,7 @@
           </a:ln>
           <a:extLst>
             <a:ext uri="{C572A759-6A51-4108-AA02-DFA0A04FC94B}">
-              <ma14:wrappingTextBoxFlag xmlns:ma14="http://schemas.microsoft.com/office/mac/drawingml/2011/main" val="1"/>
+              <ma14:wrappingTextBoxFlag xmlns:ma14="http://schemas.microsoft.com/office/mac/drawingml/2011/main" xmlns:a14="http://schemas.microsoft.com/office/drawing/2010/main" xmlns:m="http://schemas.openxmlformats.org/officeDocument/2006/math" xmlns="" val="1"/>
             </a:ext>
           </a:extLst>
         </p:spPr>
@@ -6394,6 +6965,7 @@
                 <a:sym typeface="Helvetica"/>
               </a:defRPr>
             </a:pPr>
+            <a:endParaRPr/>
           </a:p>
         </p:txBody>
       </p:sp>
@@ -6406,10 +6978,8 @@
           <p:nvPr/>
         </p:nvPicPr>
         <p:blipFill>
-          <a:blip r:embed="rId2">
-            <a:extLst/>
-          </a:blip>
-          <a:srcRect l="4761" t="0" r="4761" b="0"/>
+          <a:blip r:embed="rId2"/>
+          <a:srcRect l="4761" r="4761"/>
           <a:stretch>
             <a:fillRect/>
           </a:stretch>
@@ -6446,7 +7016,7 @@
           </a:ln>
           <a:extLst>
             <a:ext uri="{C572A759-6A51-4108-AA02-DFA0A04FC94B}">
-              <ma14:wrappingTextBoxFlag xmlns:ma14="http://schemas.microsoft.com/office/mac/drawingml/2011/main" val="1"/>
+              <ma14:wrappingTextBoxFlag xmlns:ma14="http://schemas.microsoft.com/office/mac/drawingml/2011/main" xmlns:a14="http://schemas.microsoft.com/office/drawing/2010/main" xmlns:m="http://schemas.openxmlformats.org/officeDocument/2006/math" xmlns="" val="1"/>
             </a:ext>
           </a:extLst>
         </p:spPr>
@@ -6487,6 +7057,7 @@
                 <a:sym typeface="Helvetica"/>
               </a:defRPr>
             </a:pPr>
+            <a:endParaRPr u="sng"/>
           </a:p>
           <a:p>
             <a:pPr algn="l" defTabSz="457200">
@@ -6503,6 +7074,7 @@
                 <a:sym typeface="Helvetica"/>
               </a:defRPr>
             </a:pPr>
+            <a:endParaRPr u="sng"/>
           </a:p>
           <a:p>
             <a:pPr algn="l" defTabSz="457200">
@@ -6519,6 +7091,7 @@
                 <a:sym typeface="Helvetica"/>
               </a:defRPr>
             </a:pPr>
+            <a:endParaRPr u="sng"/>
           </a:p>
           <a:p>
             <a:pPr algn="l" defTabSz="457200">
@@ -6535,6 +7108,7 @@
                 <a:sym typeface="Helvetica"/>
               </a:defRPr>
             </a:pPr>
+            <a:endParaRPr u="sng"/>
           </a:p>
         </p:txBody>
       </p:sp>
@@ -6560,7 +7134,7 @@
           </a:ln>
           <a:extLst>
             <a:ext uri="{C572A759-6A51-4108-AA02-DFA0A04FC94B}">
-              <ma14:wrappingTextBoxFlag xmlns:ma14="http://schemas.microsoft.com/office/mac/drawingml/2011/main" val="1"/>
+              <ma14:wrappingTextBoxFlag xmlns:ma14="http://schemas.microsoft.com/office/mac/drawingml/2011/main" xmlns:a14="http://schemas.microsoft.com/office/drawing/2010/main" xmlns:m="http://schemas.openxmlformats.org/officeDocument/2006/math" xmlns="" val="1"/>
             </a:ext>
           </a:extLst>
         </p:spPr>
@@ -6571,7 +7145,7 @@
               <a:lnSpc>
                 <a:spcPct val="100000"/>
               </a:lnSpc>
-              <a:defRPr b="1" sz="4400">
+              <a:defRPr sz="4400" b="1">
                 <a:solidFill>
                   <a:srgbClr val="FFFFFF"/>
                 </a:solidFill>
@@ -6583,7 +7157,6 @@
             </a:lvl1pPr>
           </a:lstStyle>
           <a:p>
-            <a:pPr/>
             <a:r>
               <a:t>Проектирование базы данных</a:t>
             </a:r>
@@ -6609,20 +7182,20 @@
           </a:ln>
           <a:extLst>
             <a:ext uri="{C572A759-6A51-4108-AA02-DFA0A04FC94B}">
-              <ma14:wrappingTextBoxFlag xmlns:ma14="http://schemas.microsoft.com/office/mac/drawingml/2011/main" val="1"/>
+              <ma14:wrappingTextBoxFlag xmlns:ma14="http://schemas.microsoft.com/office/mac/drawingml/2011/main" xmlns:a14="http://schemas.microsoft.com/office/drawing/2010/main" xmlns:m="http://schemas.openxmlformats.org/officeDocument/2006/math" xmlns="" val="1"/>
             </a:ext>
           </a:extLst>
         </p:spPr>
         <p:txBody>
           <a:bodyPr lIns="50800" tIns="50800" rIns="50800" bIns="50800" anchor="b">
-            <a:normAutofit fontScale="100000" lnSpcReduction="0"/>
+            <a:normAutofit/>
           </a:bodyPr>
           <a:lstStyle>
             <a:lvl1pPr algn="l">
               <a:lnSpc>
                 <a:spcPct val="80000"/>
               </a:lnSpc>
-              <a:defRPr b="1" spc="-36" sz="3600">
+              <a:defRPr sz="3600" b="1" spc="-36">
                 <a:solidFill>
                   <a:srgbClr val="DE6734"/>
                 </a:solidFill>
@@ -6634,7 +7207,6 @@
             </a:lvl1pPr>
           </a:lstStyle>
           <a:p>
-            <a:pPr/>
             <a:r>
               <a:t>Recipes</a:t>
             </a:r>
@@ -6660,20 +7232,20 @@
           </a:ln>
           <a:extLst>
             <a:ext uri="{C572A759-6A51-4108-AA02-DFA0A04FC94B}">
-              <ma14:wrappingTextBoxFlag xmlns:ma14="http://schemas.microsoft.com/office/mac/drawingml/2011/main" val="1"/>
+              <ma14:wrappingTextBoxFlag xmlns:ma14="http://schemas.microsoft.com/office/mac/drawingml/2011/main" xmlns:a14="http://schemas.microsoft.com/office/drawing/2010/main" xmlns:m="http://schemas.openxmlformats.org/officeDocument/2006/math" xmlns="" val="1"/>
             </a:ext>
           </a:extLst>
         </p:spPr>
         <p:txBody>
           <a:bodyPr lIns="50800" tIns="50800" rIns="50800" bIns="50800">
-            <a:normAutofit fontScale="100000" lnSpcReduction="0"/>
+            <a:normAutofit/>
           </a:bodyPr>
           <a:lstStyle>
             <a:lvl1pPr algn="l" defTabSz="825500">
               <a:lnSpc>
                 <a:spcPct val="100000"/>
               </a:lnSpc>
-              <a:defRPr spc="-28" sz="2800">
+              <a:defRPr sz="2800" spc="-28">
                 <a:latin typeface="Arial"/>
                 <a:ea typeface="Arial"/>
                 <a:cs typeface="Arial"/>
@@ -6682,7 +7254,6 @@
             </a:lvl1pPr>
           </a:lstStyle>
           <a:p>
-            <a:pPr/>
             <a:r>
               <a:t>Id, title, description, likes, caregory_id - Краткая информация о рецепте</a:t>
             </a:r>
@@ -6708,20 +7279,20 @@
           </a:ln>
           <a:extLst>
             <a:ext uri="{C572A759-6A51-4108-AA02-DFA0A04FC94B}">
-              <ma14:wrappingTextBoxFlag xmlns:ma14="http://schemas.microsoft.com/office/mac/drawingml/2011/main" val="1"/>
+              <ma14:wrappingTextBoxFlag xmlns:ma14="http://schemas.microsoft.com/office/mac/drawingml/2011/main" xmlns:a14="http://schemas.microsoft.com/office/drawing/2010/main" xmlns:m="http://schemas.openxmlformats.org/officeDocument/2006/math" xmlns="" val="1"/>
             </a:ext>
           </a:extLst>
         </p:spPr>
         <p:txBody>
           <a:bodyPr lIns="50800" tIns="50800" rIns="50800" bIns="50800" anchor="b">
-            <a:normAutofit fontScale="100000" lnSpcReduction="0"/>
+            <a:normAutofit/>
           </a:bodyPr>
           <a:lstStyle>
             <a:lvl1pPr algn="l">
               <a:lnSpc>
                 <a:spcPct val="80000"/>
               </a:lnSpc>
-              <a:defRPr b="1" spc="-36" sz="3600">
+              <a:defRPr sz="3600" b="1" spc="-36">
                 <a:solidFill>
                   <a:srgbClr val="DE6734"/>
                 </a:solidFill>
@@ -6733,7 +7304,6 @@
             </a:lvl1pPr>
           </a:lstStyle>
           <a:p>
-            <a:pPr/>
             <a:r>
               <a:t>Card_recipes</a:t>
             </a:r>
@@ -6759,20 +7329,20 @@
           </a:ln>
           <a:extLst>
             <a:ext uri="{C572A759-6A51-4108-AA02-DFA0A04FC94B}">
-              <ma14:wrappingTextBoxFlag xmlns:ma14="http://schemas.microsoft.com/office/mac/drawingml/2011/main" val="1"/>
+              <ma14:wrappingTextBoxFlag xmlns:ma14="http://schemas.microsoft.com/office/mac/drawingml/2011/main" xmlns:a14="http://schemas.microsoft.com/office/drawing/2010/main" xmlns:m="http://schemas.openxmlformats.org/officeDocument/2006/math" xmlns="" val="1"/>
             </a:ext>
           </a:extLst>
         </p:spPr>
         <p:txBody>
           <a:bodyPr lIns="50800" tIns="50800" rIns="50800" bIns="50800">
-            <a:normAutofit fontScale="100000" lnSpcReduction="0"/>
+            <a:normAutofit/>
           </a:bodyPr>
           <a:lstStyle>
             <a:lvl1pPr algn="l" defTabSz="825500">
               <a:lnSpc>
                 <a:spcPct val="100000"/>
               </a:lnSpc>
-              <a:defRPr spc="-28" sz="2800">
+              <a:defRPr sz="2800" spc="-28">
                 <a:latin typeface="Arial"/>
                 <a:ea typeface="Arial"/>
                 <a:cs typeface="Arial"/>
@@ -6781,7 +7351,6 @@
             </a:lvl1pPr>
           </a:lstStyle>
           <a:p>
-            <a:pPr/>
             <a:r>
               <a:t>Id, ingridients, portions, time_for_cook, tutorial, images - Карточка рецепта</a:t>
             </a:r>
@@ -6807,20 +7376,20 @@
           </a:ln>
           <a:extLst>
             <a:ext uri="{C572A759-6A51-4108-AA02-DFA0A04FC94B}">
-              <ma14:wrappingTextBoxFlag xmlns:ma14="http://schemas.microsoft.com/office/mac/drawingml/2011/main" val="1"/>
+              <ma14:wrappingTextBoxFlag xmlns:ma14="http://schemas.microsoft.com/office/mac/drawingml/2011/main" xmlns:a14="http://schemas.microsoft.com/office/drawing/2010/main" xmlns:m="http://schemas.openxmlformats.org/officeDocument/2006/math" xmlns="" val="1"/>
             </a:ext>
           </a:extLst>
         </p:spPr>
         <p:txBody>
           <a:bodyPr lIns="50800" tIns="50800" rIns="50800" bIns="50800" anchor="b">
-            <a:normAutofit fontScale="100000" lnSpcReduction="0"/>
+            <a:normAutofit/>
           </a:bodyPr>
           <a:lstStyle>
             <a:lvl1pPr algn="l">
               <a:lnSpc>
                 <a:spcPct val="80000"/>
               </a:lnSpc>
-              <a:defRPr b="1" spc="-36" sz="3600">
+              <a:defRPr sz="3600" b="1" spc="-36">
                 <a:solidFill>
                   <a:srgbClr val="DE6734"/>
                 </a:solidFill>
@@ -6832,7 +7401,6 @@
             </a:lvl1pPr>
           </a:lstStyle>
           <a:p>
-            <a:pPr/>
             <a:r>
               <a:t>Users</a:t>
             </a:r>
@@ -6858,20 +7426,20 @@
           </a:ln>
           <a:extLst>
             <a:ext uri="{C572A759-6A51-4108-AA02-DFA0A04FC94B}">
-              <ma14:wrappingTextBoxFlag xmlns:ma14="http://schemas.microsoft.com/office/mac/drawingml/2011/main" val="1"/>
+              <ma14:wrappingTextBoxFlag xmlns:ma14="http://schemas.microsoft.com/office/mac/drawingml/2011/main" xmlns:a14="http://schemas.microsoft.com/office/drawing/2010/main" xmlns:m="http://schemas.openxmlformats.org/officeDocument/2006/math" xmlns="" val="1"/>
             </a:ext>
           </a:extLst>
         </p:spPr>
         <p:txBody>
           <a:bodyPr lIns="50800" tIns="50800" rIns="50800" bIns="50800">
-            <a:normAutofit fontScale="100000" lnSpcReduction="0"/>
+            <a:normAutofit/>
           </a:bodyPr>
           <a:lstStyle>
             <a:lvl1pPr algn="l" defTabSz="825500">
               <a:lnSpc>
                 <a:spcPct val="100000"/>
               </a:lnSpc>
-              <a:defRPr spc="-28" sz="2800">
+              <a:defRPr sz="2800" spc="-28">
                 <a:latin typeface="Arial"/>
                 <a:ea typeface="Arial"/>
                 <a:cs typeface="Arial"/>
@@ -6880,7 +7448,6 @@
             </a:lvl1pPr>
           </a:lstStyle>
           <a:p>
-            <a:pPr/>
             <a:r>
               <a:t>Id, login, pass - Пользователи системы</a:t>
             </a:r>
@@ -6906,20 +7473,20 @@
           </a:ln>
           <a:extLst>
             <a:ext uri="{C572A759-6A51-4108-AA02-DFA0A04FC94B}">
-              <ma14:wrappingTextBoxFlag xmlns:ma14="http://schemas.microsoft.com/office/mac/drawingml/2011/main" val="1"/>
+              <ma14:wrappingTextBoxFlag xmlns:ma14="http://schemas.microsoft.com/office/mac/drawingml/2011/main" xmlns:a14="http://schemas.microsoft.com/office/drawing/2010/main" xmlns:m="http://schemas.openxmlformats.org/officeDocument/2006/math" xmlns="" val="1"/>
             </a:ext>
           </a:extLst>
         </p:spPr>
         <p:txBody>
           <a:bodyPr lIns="50800" tIns="50800" rIns="50800" bIns="50800" anchor="b">
-            <a:normAutofit fontScale="100000" lnSpcReduction="0"/>
+            <a:normAutofit/>
           </a:bodyPr>
           <a:lstStyle>
             <a:lvl1pPr algn="l">
               <a:lnSpc>
                 <a:spcPct val="80000"/>
               </a:lnSpc>
-              <a:defRPr b="1" spc="-36" sz="3600">
+              <a:defRPr sz="3600" b="1" spc="-36">
                 <a:solidFill>
                   <a:srgbClr val="DE6734"/>
                 </a:solidFill>
@@ -6931,7 +7498,6 @@
             </a:lvl1pPr>
           </a:lstStyle>
           <a:p>
-            <a:pPr/>
             <a:r>
               <a:t>User_likes</a:t>
             </a:r>
@@ -6957,20 +7523,20 @@
           </a:ln>
           <a:extLst>
             <a:ext uri="{C572A759-6A51-4108-AA02-DFA0A04FC94B}">
-              <ma14:wrappingTextBoxFlag xmlns:ma14="http://schemas.microsoft.com/office/mac/drawingml/2011/main" val="1"/>
+              <ma14:wrappingTextBoxFlag xmlns:ma14="http://schemas.microsoft.com/office/mac/drawingml/2011/main" xmlns:a14="http://schemas.microsoft.com/office/drawing/2010/main" xmlns:m="http://schemas.openxmlformats.org/officeDocument/2006/math" xmlns="" val="1"/>
             </a:ext>
           </a:extLst>
         </p:spPr>
         <p:txBody>
           <a:bodyPr lIns="50800" tIns="50800" rIns="50800" bIns="50800">
-            <a:normAutofit fontScale="100000" lnSpcReduction="0"/>
+            <a:normAutofit/>
           </a:bodyPr>
           <a:lstStyle>
             <a:lvl1pPr algn="l" defTabSz="825500">
               <a:lnSpc>
                 <a:spcPct val="100000"/>
               </a:lnSpc>
-              <a:defRPr spc="-28" sz="2800">
+              <a:defRPr sz="2800" spc="-28">
                 <a:latin typeface="Arial"/>
                 <a:ea typeface="Arial"/>
                 <a:cs typeface="Arial"/>
@@ -6979,7 +7545,6 @@
             </a:lvl1pPr>
           </a:lstStyle>
           <a:p>
-            <a:pPr/>
             <a:r>
               <a:t>user_id, recipe_id - Связующая таблица для системы «Избранное»</a:t>
             </a:r>
@@ -6991,12 +7556,12 @@
   <p:clrMapOvr>
     <a:masterClrMapping/>
   </p:clrMapOvr>
-  <p:transition xmlns:p14="http://schemas.microsoft.com/office/powerpoint/2010/main" spd="med" advClick="1"/>
+  <p:transition spd="med"/>
 </p:sld>
 </file>
 
-<file path=ppt/slides/slide6.xml><?xml version="1.0" encoding="utf-8"?>
-<p:sld xmlns:a="http://schemas.openxmlformats.org/drawingml/2006/main" xmlns:r="http://schemas.openxmlformats.org/officeDocument/2006/relationships" xmlns:p="http://schemas.openxmlformats.org/presentationml/2006/main" xmlns:m="http://schemas.openxmlformats.org/officeDocument/2006/math" xmlns:a14="http://schemas.microsoft.com/office/drawing/2010/main" showMasterSp="1" showMasterPhAnim="1">
+<file path=ppt/slides/slide5.xml><?xml version="1.0" encoding="utf-8"?>
+<p:sld xmlns:a="http://schemas.openxmlformats.org/drawingml/2006/main" xmlns:r="http://schemas.openxmlformats.org/officeDocument/2006/relationships" xmlns:p="http://schemas.openxmlformats.org/presentationml/2006/main">
   <p:cSld>
     <p:spTree>
       <p:nvGrpSpPr>
@@ -7031,7 +7596,7 @@
           </a:ln>
           <a:extLst>
             <a:ext uri="{C572A759-6A51-4108-AA02-DFA0A04FC94B}">
-              <ma14:wrappingTextBoxFlag xmlns:ma14="http://schemas.microsoft.com/office/mac/drawingml/2011/main" val="1"/>
+              <ma14:wrappingTextBoxFlag xmlns:ma14="http://schemas.microsoft.com/office/mac/drawingml/2011/main" xmlns:a14="http://schemas.microsoft.com/office/drawing/2010/main" xmlns:m="http://schemas.openxmlformats.org/officeDocument/2006/math" xmlns="" val="1"/>
             </a:ext>
           </a:extLst>
         </p:spPr>
@@ -7055,6 +7620,7 @@
                 <a:sym typeface="Helvetica"/>
               </a:defRPr>
             </a:pPr>
+            <a:endParaRPr/>
           </a:p>
         </p:txBody>
       </p:sp>
@@ -7077,7 +7643,7 @@
           </a:ln>
           <a:extLst>
             <a:ext uri="{C572A759-6A51-4108-AA02-DFA0A04FC94B}">
-              <ma14:wrappingTextBoxFlag xmlns:ma14="http://schemas.microsoft.com/office/mac/drawingml/2011/main" val="1"/>
+              <ma14:wrappingTextBoxFlag xmlns:ma14="http://schemas.microsoft.com/office/mac/drawingml/2011/main" xmlns:a14="http://schemas.microsoft.com/office/drawing/2010/main" xmlns:m="http://schemas.openxmlformats.org/officeDocument/2006/math" xmlns="" val="1"/>
             </a:ext>
           </a:extLst>
         </p:spPr>
@@ -7118,6 +7684,7 @@
                 <a:sym typeface="Helvetica"/>
               </a:defRPr>
             </a:pPr>
+            <a:endParaRPr u="sng"/>
           </a:p>
           <a:p>
             <a:pPr algn="l" defTabSz="457200">
@@ -7134,6 +7701,7 @@
                 <a:sym typeface="Helvetica"/>
               </a:defRPr>
             </a:pPr>
+            <a:endParaRPr u="sng"/>
           </a:p>
           <a:p>
             <a:pPr algn="l" defTabSz="457200">
@@ -7150,6 +7718,7 @@
                 <a:sym typeface="Helvetica"/>
               </a:defRPr>
             </a:pPr>
+            <a:endParaRPr u="sng"/>
           </a:p>
           <a:p>
             <a:pPr algn="l" defTabSz="457200">
@@ -7166,6 +7735,7 @@
                 <a:sym typeface="Helvetica"/>
               </a:defRPr>
             </a:pPr>
+            <a:endParaRPr u="sng"/>
           </a:p>
         </p:txBody>
       </p:sp>
@@ -7191,7 +7761,7 @@
           </a:ln>
           <a:extLst>
             <a:ext uri="{C572A759-6A51-4108-AA02-DFA0A04FC94B}">
-              <ma14:wrappingTextBoxFlag xmlns:ma14="http://schemas.microsoft.com/office/mac/drawingml/2011/main" val="1"/>
+              <ma14:wrappingTextBoxFlag xmlns:ma14="http://schemas.microsoft.com/office/mac/drawingml/2011/main" xmlns:a14="http://schemas.microsoft.com/office/drawing/2010/main" xmlns:m="http://schemas.openxmlformats.org/officeDocument/2006/math" xmlns="" val="1"/>
             </a:ext>
           </a:extLst>
         </p:spPr>
@@ -7202,7 +7772,7 @@
               <a:lnSpc>
                 <a:spcPct val="100000"/>
               </a:lnSpc>
-              <a:defRPr b="1" sz="4400">
+              <a:defRPr sz="4400" b="1">
                 <a:solidFill>
                   <a:srgbClr val="FFFFFF"/>
                 </a:solidFill>
@@ -7214,7 +7784,6 @@
             </a:lvl1pPr>
           </a:lstStyle>
           <a:p>
-            <a:pPr/>
             <a:r>
               <a:t>Структура веб-сайта и навигации</a:t>
             </a:r>
@@ -7245,7 +7814,7 @@
           </a:ln>
           <a:extLst>
             <a:ext uri="{C572A759-6A51-4108-AA02-DFA0A04FC94B}">
-              <ma14:wrappingTextBoxFlag xmlns:ma14="http://schemas.microsoft.com/office/mac/drawingml/2011/main" val="1"/>
+              <ma14:wrappingTextBoxFlag xmlns:ma14="http://schemas.microsoft.com/office/mac/drawingml/2011/main" xmlns:a14="http://schemas.microsoft.com/office/drawing/2010/main" xmlns:m="http://schemas.openxmlformats.org/officeDocument/2006/math" xmlns="" val="1"/>
             </a:ext>
           </a:extLst>
         </p:spPr>
@@ -7268,7 +7837,6 @@
             </a:lvl1pPr>
           </a:lstStyle>
           <a:p>
-            <a:pPr/>
             <a:r>
               <a:t>Главная</a:t>
             </a:r>
@@ -7317,6 +7885,7 @@
                 <a:sym typeface="Avenir Next Regular"/>
               </a:defRPr>
             </a:pPr>
+            <a:endParaRPr/>
           </a:p>
         </p:txBody>
       </p:sp>
@@ -7344,7 +7913,7 @@
           </a:ln>
           <a:extLst>
             <a:ext uri="{C572A759-6A51-4108-AA02-DFA0A04FC94B}">
-              <ma14:wrappingTextBoxFlag xmlns:ma14="http://schemas.microsoft.com/office/mac/drawingml/2011/main" val="1"/>
+              <ma14:wrappingTextBoxFlag xmlns:ma14="http://schemas.microsoft.com/office/mac/drawingml/2011/main" xmlns:a14="http://schemas.microsoft.com/office/drawing/2010/main" xmlns:m="http://schemas.openxmlformats.org/officeDocument/2006/math" xmlns="" val="1"/>
             </a:ext>
           </a:extLst>
         </p:spPr>
@@ -7367,7 +7936,6 @@
             </a:lvl1pPr>
           </a:lstStyle>
           <a:p>
-            <a:pPr/>
             <a:r>
               <a:t>Категории</a:t>
             </a:r>
@@ -7416,6 +7984,7 @@
                 <a:sym typeface="Avenir Next Regular"/>
               </a:defRPr>
             </a:pPr>
+            <a:endParaRPr/>
           </a:p>
         </p:txBody>
       </p:sp>
@@ -7443,7 +8012,7 @@
           </a:ln>
           <a:extLst>
             <a:ext uri="{C572A759-6A51-4108-AA02-DFA0A04FC94B}">
-              <ma14:wrappingTextBoxFlag xmlns:ma14="http://schemas.microsoft.com/office/mac/drawingml/2011/main" val="1"/>
+              <ma14:wrappingTextBoxFlag xmlns:ma14="http://schemas.microsoft.com/office/mac/drawingml/2011/main" xmlns:a14="http://schemas.microsoft.com/office/drawing/2010/main" xmlns:m="http://schemas.openxmlformats.org/officeDocument/2006/math" xmlns="" val="1"/>
             </a:ext>
           </a:extLst>
         </p:spPr>
@@ -7466,7 +8035,6 @@
             </a:lvl1pPr>
           </a:lstStyle>
           <a:p>
-            <a:pPr/>
             <a:r>
               <a:t>Список рецептов категории</a:t>
             </a:r>
@@ -7515,6 +8083,7 @@
                 <a:sym typeface="Avenir Next Regular"/>
               </a:defRPr>
             </a:pPr>
+            <a:endParaRPr/>
           </a:p>
         </p:txBody>
       </p:sp>
@@ -7542,7 +8111,7 @@
           </a:ln>
           <a:extLst>
             <a:ext uri="{C572A759-6A51-4108-AA02-DFA0A04FC94B}">
-              <ma14:wrappingTextBoxFlag xmlns:ma14="http://schemas.microsoft.com/office/mac/drawingml/2011/main" val="1"/>
+              <ma14:wrappingTextBoxFlag xmlns:ma14="http://schemas.microsoft.com/office/mac/drawingml/2011/main" xmlns:a14="http://schemas.microsoft.com/office/drawing/2010/main" xmlns:m="http://schemas.openxmlformats.org/officeDocument/2006/math" xmlns="" val="1"/>
             </a:ext>
           </a:extLst>
         </p:spPr>
@@ -7565,7 +8134,6 @@
             </a:lvl1pPr>
           </a:lstStyle>
           <a:p>
-            <a:pPr/>
             <a:r>
               <a:t>Карточка рецепт</a:t>
             </a:r>
@@ -7591,7 +8159,7 @@
           </a:ln>
           <a:extLst>
             <a:ext uri="{C572A759-6A51-4108-AA02-DFA0A04FC94B}">
-              <ma14:wrappingTextBoxFlag xmlns:ma14="http://schemas.microsoft.com/office/mac/drawingml/2011/main" val="1"/>
+              <ma14:wrappingTextBoxFlag xmlns:ma14="http://schemas.microsoft.com/office/mac/drawingml/2011/main" xmlns:a14="http://schemas.microsoft.com/office/drawing/2010/main" xmlns:m="http://schemas.openxmlformats.org/officeDocument/2006/math" xmlns="" val="1"/>
             </a:ext>
           </a:extLst>
         </p:spPr>
@@ -7610,7 +8178,6 @@
             </a:lvl1pPr>
           </a:lstStyle>
           <a:p>
-            <a:pPr/>
             <a:r>
               <a:t>Карта навигации пользователя</a:t>
             </a:r>
@@ -7636,7 +8203,7 @@
           </a:ln>
           <a:extLst>
             <a:ext uri="{C572A759-6A51-4108-AA02-DFA0A04FC94B}">
-              <ma14:wrappingTextBoxFlag xmlns:ma14="http://schemas.microsoft.com/office/mac/drawingml/2011/main" val="1"/>
+              <ma14:wrappingTextBoxFlag xmlns:ma14="http://schemas.microsoft.com/office/mac/drawingml/2011/main" xmlns:a14="http://schemas.microsoft.com/office/drawing/2010/main" xmlns:m="http://schemas.openxmlformats.org/officeDocument/2006/math" xmlns="" val="1"/>
             </a:ext>
           </a:extLst>
         </p:spPr>
@@ -7655,7 +8222,6 @@
             </a:lvl1pPr>
           </a:lstStyle>
           <a:p>
-            <a:pPr/>
             <a:r>
               <a:t>Особенности интерфейса</a:t>
             </a:r>
@@ -7681,7 +8247,7 @@
           </a:ln>
           <a:extLst>
             <a:ext uri="{C572A759-6A51-4108-AA02-DFA0A04FC94B}">
-              <ma14:wrappingTextBoxFlag xmlns:ma14="http://schemas.microsoft.com/office/mac/drawingml/2011/main" val="1"/>
+              <ma14:wrappingTextBoxFlag xmlns:ma14="http://schemas.microsoft.com/office/mac/drawingml/2011/main" xmlns:a14="http://schemas.microsoft.com/office/drawing/2010/main" xmlns:m="http://schemas.openxmlformats.org/officeDocument/2006/math" xmlns="" val="1"/>
             </a:ext>
           </a:extLst>
         </p:spPr>
@@ -7692,7 +8258,7 @@
           <a:lstStyle/>
           <a:p>
             <a:pPr>
-              <a:defRPr b="1" sz="3600">
+              <a:defRPr sz="3600" b="1">
                 <a:solidFill>
                   <a:srgbClr val="DE6734"/>
                 </a:solidFill>
@@ -7708,7 +8274,7 @@
           </a:p>
           <a:p>
             <a:pPr>
-              <a:defRPr b="1" sz="3600">
+              <a:defRPr sz="3600" b="1">
                 <a:solidFill>
                   <a:srgbClr val="DE6734"/>
                 </a:solidFill>
@@ -7718,6 +8284,7 @@
                 <a:sym typeface="Arial"/>
               </a:defRPr>
             </a:pPr>
+            <a:endParaRPr/>
           </a:p>
           <a:p>
             <a:pPr>
@@ -7753,7 +8320,7 @@
           </a:ln>
           <a:extLst>
             <a:ext uri="{C572A759-6A51-4108-AA02-DFA0A04FC94B}">
-              <ma14:wrappingTextBoxFlag xmlns:ma14="http://schemas.microsoft.com/office/mac/drawingml/2011/main" val="1"/>
+              <ma14:wrappingTextBoxFlag xmlns:ma14="http://schemas.microsoft.com/office/mac/drawingml/2011/main" xmlns:a14="http://schemas.microsoft.com/office/drawing/2010/main" xmlns:m="http://schemas.openxmlformats.org/officeDocument/2006/math" xmlns="" val="1"/>
             </a:ext>
           </a:extLst>
         </p:spPr>
@@ -7764,7 +8331,7 @@
           <a:lstStyle/>
           <a:p>
             <a:pPr>
-              <a:defRPr b="1" sz="3600">
+              <a:defRPr sz="3600" b="1">
                 <a:solidFill>
                   <a:srgbClr val="DE6734"/>
                 </a:solidFill>
@@ -7780,7 +8347,7 @@
           </a:p>
           <a:p>
             <a:pPr>
-              <a:defRPr b="1" sz="3600">
+              <a:defRPr sz="3600" b="1">
                 <a:solidFill>
                   <a:srgbClr val="DE6734"/>
                 </a:solidFill>
@@ -7790,6 +8357,7 @@
                 <a:sym typeface="Arial"/>
               </a:defRPr>
             </a:pPr>
+            <a:endParaRPr/>
           </a:p>
           <a:p>
             <a:pPr>
@@ -7825,7 +8393,7 @@
           </a:ln>
           <a:extLst>
             <a:ext uri="{C572A759-6A51-4108-AA02-DFA0A04FC94B}">
-              <ma14:wrappingTextBoxFlag xmlns:ma14="http://schemas.microsoft.com/office/mac/drawingml/2011/main" val="1"/>
+              <ma14:wrappingTextBoxFlag xmlns:ma14="http://schemas.microsoft.com/office/mac/drawingml/2011/main" xmlns:a14="http://schemas.microsoft.com/office/drawing/2010/main" xmlns:m="http://schemas.openxmlformats.org/officeDocument/2006/math" xmlns="" val="1"/>
             </a:ext>
           </a:extLst>
         </p:spPr>
@@ -7836,7 +8404,7 @@
           <a:lstStyle/>
           <a:p>
             <a:pPr>
-              <a:defRPr b="1" sz="3600">
+              <a:defRPr sz="3600" b="1">
                 <a:solidFill>
                   <a:srgbClr val="DE6734"/>
                 </a:solidFill>
@@ -7852,7 +8420,7 @@
           </a:p>
           <a:p>
             <a:pPr>
-              <a:defRPr b="1" sz="3600">
+              <a:defRPr sz="3600" b="1">
                 <a:solidFill>
                   <a:srgbClr val="DE6734"/>
                 </a:solidFill>
@@ -7862,6 +8430,7 @@
                 <a:sym typeface="Arial"/>
               </a:defRPr>
             </a:pPr>
+            <a:endParaRPr/>
           </a:p>
           <a:p>
             <a:pPr>
@@ -7883,12 +8452,12 @@
   <p:clrMapOvr>
     <a:masterClrMapping/>
   </p:clrMapOvr>
-  <p:transition xmlns:p14="http://schemas.microsoft.com/office/powerpoint/2010/main" spd="med" advClick="1"/>
+  <p:transition spd="med"/>
 </p:sld>
 </file>
 
-<file path=ppt/slides/slide7.xml><?xml version="1.0" encoding="utf-8"?>
-<p:sld xmlns:a="http://schemas.openxmlformats.org/drawingml/2006/main" xmlns:r="http://schemas.openxmlformats.org/officeDocument/2006/relationships" xmlns:p="http://schemas.openxmlformats.org/presentationml/2006/main" xmlns:m="http://schemas.openxmlformats.org/officeDocument/2006/math" xmlns:a14="http://schemas.microsoft.com/office/drawing/2010/main" showMasterSp="1" showMasterPhAnim="1">
+<file path=ppt/slides/slide6.xml><?xml version="1.0" encoding="utf-8"?>
+<p:sld xmlns:a="http://schemas.openxmlformats.org/drawingml/2006/main" xmlns:r="http://schemas.openxmlformats.org/officeDocument/2006/relationships" xmlns:p="http://schemas.openxmlformats.org/presentationml/2006/main">
   <p:cSld>
     <p:spTree>
       <p:nvGrpSpPr>
@@ -7907,7 +8476,9 @@
       <p:sp>
         <p:nvSpPr>
           <p:cNvPr id="223" name="Решение"/>
-          <p:cNvSpPr txBox="1"/>
+          <p:cNvSpPr txBox="1">
+            <a:spLocks noGrp="1"/>
+          </p:cNvSpPr>
           <p:nvPr>
             <p:ph type="body" idx="21"/>
           </p:nvPr>
@@ -7922,15 +8493,17 @@
           </a:prstGeom>
           <a:extLst>
             <a:ext uri="{C572A759-6A51-4108-AA02-DFA0A04FC94B}">
-              <ma14:wrappingTextBoxFlag xmlns:ma14="http://schemas.microsoft.com/office/mac/drawingml/2011/main" val="1"/>
+              <ma14:wrappingTextBoxFlag xmlns:ma14="http://schemas.microsoft.com/office/mac/drawingml/2011/main" xmlns:a14="http://schemas.microsoft.com/office/drawing/2010/main" xmlns:m="http://schemas.openxmlformats.org/officeDocument/2006/math" xmlns="" val="1"/>
             </a:ext>
           </a:extLst>
         </p:spPr>
         <p:txBody>
-          <a:bodyPr/>
+          <a:bodyPr>
+            <a:normAutofit lnSpcReduction="10000"/>
+          </a:bodyPr>
           <a:lstStyle>
             <a:lvl1pPr algn="l" defTabSz="817244">
-              <a:defRPr b="1" spc="-35" sz="3564">
+              <a:defRPr sz="3564" b="1" spc="-35">
                 <a:solidFill>
                   <a:srgbClr val="DE6734"/>
                 </a:solidFill>
@@ -7942,7 +8515,6 @@
             </a:lvl1pPr>
           </a:lstStyle>
           <a:p>
-            <a:pPr/>
             <a:r>
               <a:t>Решение</a:t>
             </a:r>
@@ -7952,7 +8524,9 @@
       <p:sp>
         <p:nvSpPr>
           <p:cNvPr id="224" name="Главная"/>
-          <p:cNvSpPr txBox="1"/>
+          <p:cNvSpPr txBox="1">
+            <a:spLocks noGrp="1"/>
+          </p:cNvSpPr>
           <p:nvPr>
             <p:ph type="ctrTitle"/>
           </p:nvPr>
@@ -7970,7 +8544,7 @@
           <a:bodyPr/>
           <a:lstStyle>
             <a:lvl1pPr algn="l">
-              <a:defRPr b="1" spc="-36" sz="3600">
+              <a:defRPr sz="3600" b="1" spc="-36">
                 <a:solidFill>
                   <a:srgbClr val="DE6734"/>
                 </a:solidFill>
@@ -7982,7 +8556,6 @@
             </a:lvl1pPr>
           </a:lstStyle>
           <a:p>
-            <a:pPr/>
             <a:r>
               <a:t>Главная</a:t>
             </a:r>
@@ -7992,7 +8565,9 @@
       <p:sp>
         <p:nvSpPr>
           <p:cNvPr id="225" name="Интерфейс выдержан в светлых тонах с оранжевыми акцентами…"/>
-          <p:cNvSpPr txBox="1"/>
+          <p:cNvSpPr txBox="1">
+            <a:spLocks noGrp="1"/>
+          </p:cNvSpPr>
           <p:nvPr>
             <p:ph type="subTitle" sz="quarter" idx="1"/>
           </p:nvPr>
@@ -8011,7 +8586,7 @@
           <a:lstStyle/>
           <a:p>
             <a:pPr algn="l">
-              <a:defRPr spc="-28" sz="2800">
+              <a:defRPr sz="2800" spc="-28">
                 <a:latin typeface="Arial"/>
                 <a:ea typeface="Arial"/>
                 <a:cs typeface="Arial"/>
@@ -8024,7 +8599,7 @@
           </a:p>
           <a:p>
             <a:pPr algn="l">
-              <a:defRPr spc="-28" sz="2800">
+              <a:defRPr sz="2800" spc="-28">
                 <a:latin typeface="Arial"/>
                 <a:ea typeface="Arial"/>
                 <a:cs typeface="Arial"/>
@@ -8056,7 +8631,7 @@
           </a:ln>
           <a:extLst>
             <a:ext uri="{C572A759-6A51-4108-AA02-DFA0A04FC94B}">
-              <ma14:wrappingTextBoxFlag xmlns:ma14="http://schemas.microsoft.com/office/mac/drawingml/2011/main" val="1"/>
+              <ma14:wrappingTextBoxFlag xmlns:ma14="http://schemas.microsoft.com/office/mac/drawingml/2011/main" xmlns:a14="http://schemas.microsoft.com/office/drawing/2010/main" xmlns:m="http://schemas.openxmlformats.org/officeDocument/2006/math" xmlns="" val="1"/>
             </a:ext>
           </a:extLst>
         </p:spPr>
@@ -8080,6 +8655,7 @@
                 <a:sym typeface="Helvetica"/>
               </a:defRPr>
             </a:pPr>
+            <a:endParaRPr/>
           </a:p>
         </p:txBody>
       </p:sp>
@@ -8092,10 +8668,8 @@
           <p:nvPr/>
         </p:nvPicPr>
         <p:blipFill>
-          <a:blip r:embed="rId2">
-            <a:extLst/>
-          </a:blip>
-          <a:srcRect l="0" t="0" r="0" b="0"/>
+          <a:blip r:embed="rId2"/>
+          <a:srcRect/>
           <a:stretch>
             <a:fillRect/>
           </a:stretch>
@@ -8132,7 +8706,7 @@
           </a:ln>
           <a:extLst>
             <a:ext uri="{C572A759-6A51-4108-AA02-DFA0A04FC94B}">
-              <ma14:wrappingTextBoxFlag xmlns:ma14="http://schemas.microsoft.com/office/mac/drawingml/2011/main" val="1"/>
+              <ma14:wrappingTextBoxFlag xmlns:ma14="http://schemas.microsoft.com/office/mac/drawingml/2011/main" xmlns:a14="http://schemas.microsoft.com/office/drawing/2010/main" xmlns:m="http://schemas.openxmlformats.org/officeDocument/2006/math" xmlns="" val="1"/>
             </a:ext>
           </a:extLst>
         </p:spPr>
@@ -8173,6 +8747,7 @@
                 <a:sym typeface="Helvetica"/>
               </a:defRPr>
             </a:pPr>
+            <a:endParaRPr u="sng"/>
           </a:p>
           <a:p>
             <a:pPr algn="l" defTabSz="457200">
@@ -8189,6 +8764,7 @@
                 <a:sym typeface="Helvetica"/>
               </a:defRPr>
             </a:pPr>
+            <a:endParaRPr u="sng"/>
           </a:p>
           <a:p>
             <a:pPr algn="l" defTabSz="457200">
@@ -8205,6 +8781,7 @@
                 <a:sym typeface="Helvetica"/>
               </a:defRPr>
             </a:pPr>
+            <a:endParaRPr u="sng"/>
           </a:p>
           <a:p>
             <a:pPr algn="l" defTabSz="457200">
@@ -8221,6 +8798,7 @@
                 <a:sym typeface="Helvetica"/>
               </a:defRPr>
             </a:pPr>
+            <a:endParaRPr u="sng"/>
           </a:p>
         </p:txBody>
       </p:sp>
@@ -8246,7 +8824,7 @@
           </a:ln>
           <a:extLst>
             <a:ext uri="{C572A759-6A51-4108-AA02-DFA0A04FC94B}">
-              <ma14:wrappingTextBoxFlag xmlns:ma14="http://schemas.microsoft.com/office/mac/drawingml/2011/main" val="1"/>
+              <ma14:wrappingTextBoxFlag xmlns:ma14="http://schemas.microsoft.com/office/mac/drawingml/2011/main" xmlns:a14="http://schemas.microsoft.com/office/drawing/2010/main" xmlns:m="http://schemas.openxmlformats.org/officeDocument/2006/math" xmlns="" val="1"/>
             </a:ext>
           </a:extLst>
         </p:spPr>
@@ -8257,7 +8835,7 @@
               <a:lnSpc>
                 <a:spcPct val="100000"/>
               </a:lnSpc>
-              <a:defRPr b="1" sz="4400">
+              <a:defRPr sz="4400" b="1">
                 <a:solidFill>
                   <a:srgbClr val="FFFFFF"/>
                 </a:solidFill>
@@ -8269,7 +8847,6 @@
             </a:lvl1pPr>
           </a:lstStyle>
           <a:p>
-            <a:pPr/>
             <a:r>
               <a:t>Интерфейс</a:t>
             </a:r>
@@ -8281,12 +8858,12 @@
   <p:clrMapOvr>
     <a:masterClrMapping/>
   </p:clrMapOvr>
-  <p:transition xmlns:p14="http://schemas.microsoft.com/office/powerpoint/2010/main" spd="med" advClick="1"/>
+  <p:transition spd="med"/>
 </p:sld>
 </file>
 
-<file path=ppt/slides/slide8.xml><?xml version="1.0" encoding="utf-8"?>
-<p:sld xmlns:a="http://schemas.openxmlformats.org/drawingml/2006/main" xmlns:r="http://schemas.openxmlformats.org/officeDocument/2006/relationships" xmlns:p="http://schemas.openxmlformats.org/presentationml/2006/main" xmlns:m="http://schemas.openxmlformats.org/officeDocument/2006/math" xmlns:a14="http://schemas.microsoft.com/office/drawing/2010/main" showMasterSp="1" showMasterPhAnim="1">
+<file path=ppt/slides/slide7.xml><?xml version="1.0" encoding="utf-8"?>
+<p:sld xmlns:a="http://schemas.openxmlformats.org/drawingml/2006/main" xmlns:r="http://schemas.openxmlformats.org/officeDocument/2006/relationships" xmlns:p="http://schemas.openxmlformats.org/presentationml/2006/main">
   <p:cSld>
     <p:spTree>
       <p:nvGrpSpPr>
@@ -8305,7 +8882,9 @@
       <p:sp>
         <p:nvSpPr>
           <p:cNvPr id="231" name="Решение"/>
-          <p:cNvSpPr txBox="1"/>
+          <p:cNvSpPr txBox="1">
+            <a:spLocks noGrp="1"/>
+          </p:cNvSpPr>
           <p:nvPr>
             <p:ph type="body" idx="21"/>
           </p:nvPr>
@@ -8320,15 +8899,17 @@
           </a:prstGeom>
           <a:extLst>
             <a:ext uri="{C572A759-6A51-4108-AA02-DFA0A04FC94B}">
-              <ma14:wrappingTextBoxFlag xmlns:ma14="http://schemas.microsoft.com/office/mac/drawingml/2011/main" val="1"/>
+              <ma14:wrappingTextBoxFlag xmlns:ma14="http://schemas.microsoft.com/office/mac/drawingml/2011/main" xmlns:a14="http://schemas.microsoft.com/office/drawing/2010/main" xmlns:m="http://schemas.openxmlformats.org/officeDocument/2006/math" xmlns="" val="1"/>
             </a:ext>
           </a:extLst>
         </p:spPr>
         <p:txBody>
-          <a:bodyPr/>
+          <a:bodyPr>
+            <a:normAutofit lnSpcReduction="10000"/>
+          </a:bodyPr>
           <a:lstStyle>
             <a:lvl1pPr algn="l" defTabSz="817244">
-              <a:defRPr b="1" spc="-35" sz="3564">
+              <a:defRPr sz="3564" b="1" spc="-35">
                 <a:solidFill>
                   <a:srgbClr val="DE6734"/>
                 </a:solidFill>
@@ -8340,7 +8921,6 @@
             </a:lvl1pPr>
           </a:lstStyle>
           <a:p>
-            <a:pPr/>
             <a:r>
               <a:t>Решение</a:t>
             </a:r>
@@ -8350,7 +8930,9 @@
       <p:sp>
         <p:nvSpPr>
           <p:cNvPr id="232" name="Категории"/>
-          <p:cNvSpPr txBox="1"/>
+          <p:cNvSpPr txBox="1">
+            <a:spLocks noGrp="1"/>
+          </p:cNvSpPr>
           <p:nvPr>
             <p:ph type="ctrTitle"/>
           </p:nvPr>
@@ -8368,7 +8950,7 @@
           <a:bodyPr/>
           <a:lstStyle>
             <a:lvl1pPr algn="l">
-              <a:defRPr b="1" spc="-36" sz="3600">
+              <a:defRPr sz="3600" b="1" spc="-36">
                 <a:solidFill>
                   <a:srgbClr val="DE6734"/>
                 </a:solidFill>
@@ -8380,7 +8962,6 @@
             </a:lvl1pPr>
           </a:lstStyle>
           <a:p>
-            <a:pPr/>
             <a:r>
               <a:t>Категории</a:t>
             </a:r>
@@ -8390,7 +8971,9 @@
       <p:sp>
         <p:nvSpPr>
           <p:cNvPr id="233" name="Категории представлены в виде квадратных карточек с названием сверху и визуальным изображением категории."/>
-          <p:cNvSpPr txBox="1"/>
+          <p:cNvSpPr txBox="1">
+            <a:spLocks noGrp="1"/>
+          </p:cNvSpPr>
           <p:nvPr>
             <p:ph type="subTitle" sz="quarter" idx="1"/>
           </p:nvPr>
@@ -8408,7 +8991,7 @@
           <a:bodyPr/>
           <a:lstStyle>
             <a:lvl1pPr algn="l">
-              <a:defRPr spc="-28" sz="2800">
+              <a:defRPr sz="2800" spc="-28">
                 <a:latin typeface="Arial"/>
                 <a:ea typeface="Arial"/>
                 <a:cs typeface="Arial"/>
@@ -8417,7 +9000,6 @@
             </a:lvl1pPr>
           </a:lstStyle>
           <a:p>
-            <a:pPr/>
             <a:r>
               <a:t>Категории представлены в виде квадратных карточек с названием сверху и визуальным изображением категории.</a:t>
             </a:r>
@@ -8443,7 +9025,7 @@
           </a:ln>
           <a:extLst>
             <a:ext uri="{C572A759-6A51-4108-AA02-DFA0A04FC94B}">
-              <ma14:wrappingTextBoxFlag xmlns:ma14="http://schemas.microsoft.com/office/mac/drawingml/2011/main" val="1"/>
+              <ma14:wrappingTextBoxFlag xmlns:ma14="http://schemas.microsoft.com/office/mac/drawingml/2011/main" xmlns:a14="http://schemas.microsoft.com/office/drawing/2010/main" xmlns:m="http://schemas.openxmlformats.org/officeDocument/2006/math" xmlns="" val="1"/>
             </a:ext>
           </a:extLst>
         </p:spPr>
@@ -8467,6 +9049,7 @@
                 <a:sym typeface="Helvetica"/>
               </a:defRPr>
             </a:pPr>
+            <a:endParaRPr/>
           </a:p>
         </p:txBody>
       </p:sp>
@@ -8479,10 +9062,8 @@
           <p:nvPr/>
         </p:nvPicPr>
         <p:blipFill>
-          <a:blip r:embed="rId2">
-            <a:extLst/>
-          </a:blip>
-          <a:srcRect l="0" t="0" r="0" b="0"/>
+          <a:blip r:embed="rId2"/>
+          <a:srcRect/>
           <a:stretch>
             <a:fillRect/>
           </a:stretch>
@@ -8519,7 +9100,7 @@
           </a:ln>
           <a:extLst>
             <a:ext uri="{C572A759-6A51-4108-AA02-DFA0A04FC94B}">
-              <ma14:wrappingTextBoxFlag xmlns:ma14="http://schemas.microsoft.com/office/mac/drawingml/2011/main" val="1"/>
+              <ma14:wrappingTextBoxFlag xmlns:ma14="http://schemas.microsoft.com/office/mac/drawingml/2011/main" xmlns:a14="http://schemas.microsoft.com/office/drawing/2010/main" xmlns:m="http://schemas.openxmlformats.org/officeDocument/2006/math" xmlns="" val="1"/>
             </a:ext>
           </a:extLst>
         </p:spPr>
@@ -8560,6 +9141,7 @@
                 <a:sym typeface="Helvetica"/>
               </a:defRPr>
             </a:pPr>
+            <a:endParaRPr u="sng"/>
           </a:p>
           <a:p>
             <a:pPr algn="l" defTabSz="457200">
@@ -8576,6 +9158,7 @@
                 <a:sym typeface="Helvetica"/>
               </a:defRPr>
             </a:pPr>
+            <a:endParaRPr u="sng"/>
           </a:p>
           <a:p>
             <a:pPr algn="l" defTabSz="457200">
@@ -8592,6 +9175,7 @@
                 <a:sym typeface="Helvetica"/>
               </a:defRPr>
             </a:pPr>
+            <a:endParaRPr u="sng"/>
           </a:p>
           <a:p>
             <a:pPr algn="l" defTabSz="457200">
@@ -8608,6 +9192,7 @@
                 <a:sym typeface="Helvetica"/>
               </a:defRPr>
             </a:pPr>
+            <a:endParaRPr u="sng"/>
           </a:p>
         </p:txBody>
       </p:sp>
@@ -8633,7 +9218,7 @@
           </a:ln>
           <a:extLst>
             <a:ext uri="{C572A759-6A51-4108-AA02-DFA0A04FC94B}">
-              <ma14:wrappingTextBoxFlag xmlns:ma14="http://schemas.microsoft.com/office/mac/drawingml/2011/main" val="1"/>
+              <ma14:wrappingTextBoxFlag xmlns:ma14="http://schemas.microsoft.com/office/mac/drawingml/2011/main" xmlns:a14="http://schemas.microsoft.com/office/drawing/2010/main" xmlns:m="http://schemas.openxmlformats.org/officeDocument/2006/math" xmlns="" val="1"/>
             </a:ext>
           </a:extLst>
         </p:spPr>
@@ -8644,7 +9229,7 @@
               <a:lnSpc>
                 <a:spcPct val="100000"/>
               </a:lnSpc>
-              <a:defRPr b="1" sz="4400">
+              <a:defRPr sz="4400" b="1">
                 <a:solidFill>
                   <a:srgbClr val="FFFFFF"/>
                 </a:solidFill>
@@ -8656,7 +9241,6 @@
             </a:lvl1pPr>
           </a:lstStyle>
           <a:p>
-            <a:pPr/>
             <a:r>
               <a:t>Интерфейс</a:t>
             </a:r>
@@ -8668,12 +9252,12 @@
   <p:clrMapOvr>
     <a:masterClrMapping/>
   </p:clrMapOvr>
-  <p:transition xmlns:p14="http://schemas.microsoft.com/office/powerpoint/2010/main" spd="med" advClick="1"/>
+  <p:transition spd="med"/>
 </p:sld>
 </file>
 
-<file path=ppt/slides/slide9.xml><?xml version="1.0" encoding="utf-8"?>
-<p:sld xmlns:a="http://schemas.openxmlformats.org/drawingml/2006/main" xmlns:r="http://schemas.openxmlformats.org/officeDocument/2006/relationships" xmlns:p="http://schemas.openxmlformats.org/presentationml/2006/main" xmlns:m="http://schemas.openxmlformats.org/officeDocument/2006/math" xmlns:a14="http://schemas.microsoft.com/office/drawing/2010/main" showMasterSp="1" showMasterPhAnim="1">
+<file path=ppt/slides/slide8.xml><?xml version="1.0" encoding="utf-8"?>
+<p:sld xmlns:a="http://schemas.openxmlformats.org/drawingml/2006/main" xmlns:r="http://schemas.openxmlformats.org/officeDocument/2006/relationships" xmlns:p="http://schemas.openxmlformats.org/presentationml/2006/main">
   <p:cSld>
     <p:spTree>
       <p:nvGrpSpPr>
@@ -8692,7 +9276,9 @@
       <p:sp>
         <p:nvSpPr>
           <p:cNvPr id="239" name="Решение"/>
-          <p:cNvSpPr txBox="1"/>
+          <p:cNvSpPr txBox="1">
+            <a:spLocks noGrp="1"/>
+          </p:cNvSpPr>
           <p:nvPr>
             <p:ph type="body" idx="21"/>
           </p:nvPr>
@@ -8707,15 +9293,17 @@
           </a:prstGeom>
           <a:extLst>
             <a:ext uri="{C572A759-6A51-4108-AA02-DFA0A04FC94B}">
-              <ma14:wrappingTextBoxFlag xmlns:ma14="http://schemas.microsoft.com/office/mac/drawingml/2011/main" val="1"/>
+              <ma14:wrappingTextBoxFlag xmlns:ma14="http://schemas.microsoft.com/office/mac/drawingml/2011/main" xmlns:a14="http://schemas.microsoft.com/office/drawing/2010/main" xmlns:m="http://schemas.openxmlformats.org/officeDocument/2006/math" xmlns="" val="1"/>
             </a:ext>
           </a:extLst>
         </p:spPr>
         <p:txBody>
-          <a:bodyPr/>
+          <a:bodyPr>
+            <a:normAutofit lnSpcReduction="10000"/>
+          </a:bodyPr>
           <a:lstStyle>
             <a:lvl1pPr algn="l" defTabSz="817244">
-              <a:defRPr b="1" spc="-35" sz="3564">
+              <a:defRPr sz="3564" b="1" spc="-35">
                 <a:solidFill>
                   <a:srgbClr val="DE6734"/>
                 </a:solidFill>
@@ -8727,7 +9315,6 @@
             </a:lvl1pPr>
           </a:lstStyle>
           <a:p>
-            <a:pPr/>
             <a:r>
               <a:t>Решение</a:t>
             </a:r>
@@ -8737,7 +9324,9 @@
       <p:sp>
         <p:nvSpPr>
           <p:cNvPr id="240" name="Рецепты и Карточка Рецепта"/>
-          <p:cNvSpPr txBox="1"/>
+          <p:cNvSpPr txBox="1">
+            <a:spLocks noGrp="1"/>
+          </p:cNvSpPr>
           <p:nvPr>
             <p:ph type="ctrTitle"/>
           </p:nvPr>
@@ -8755,7 +9344,7 @@
           <a:bodyPr/>
           <a:lstStyle>
             <a:lvl1pPr algn="l">
-              <a:defRPr b="1" spc="-36" sz="3600">
+              <a:defRPr sz="3600" b="1" spc="-36">
                 <a:solidFill>
                   <a:srgbClr val="DE6734"/>
                 </a:solidFill>
@@ -8767,7 +9356,6 @@
             </a:lvl1pPr>
           </a:lstStyle>
           <a:p>
-            <a:pPr/>
             <a:r>
               <a:t>Рецепты и Карточка Рецепта</a:t>
             </a:r>
@@ -8777,7 +9365,9 @@
       <p:sp>
         <p:nvSpPr>
           <p:cNvPr id="241" name="При переходе на категорию появляются соответствующие рецепты. Каждая плашка рецепта имеет Название, Изображение, Краткое описание и Количество лайков.…"/>
-          <p:cNvSpPr txBox="1"/>
+          <p:cNvSpPr txBox="1">
+            <a:spLocks noGrp="1"/>
+          </p:cNvSpPr>
           <p:nvPr>
             <p:ph type="subTitle" sz="quarter" idx="1"/>
           </p:nvPr>
@@ -8792,11 +9382,13 @@
           </a:prstGeom>
         </p:spPr>
         <p:txBody>
-          <a:bodyPr/>
+          <a:bodyPr>
+            <a:normAutofit lnSpcReduction="10000"/>
+          </a:bodyPr>
           <a:lstStyle/>
           <a:p>
             <a:pPr algn="l" defTabSz="792479">
-              <a:defRPr spc="-26" sz="2688">
+              <a:defRPr sz="2688" spc="-26">
                 <a:latin typeface="Arial"/>
                 <a:ea typeface="Arial"/>
                 <a:cs typeface="Arial"/>
@@ -8809,17 +9401,18 @@
           </a:p>
           <a:p>
             <a:pPr algn="l" defTabSz="792479">
-              <a:defRPr spc="-26" sz="2688">
+              <a:defRPr sz="2688" spc="-26">
                 <a:latin typeface="Arial"/>
                 <a:ea typeface="Arial"/>
                 <a:cs typeface="Arial"/>
                 <a:sym typeface="Arial"/>
               </a:defRPr>
             </a:pPr>
+            <a:endParaRPr/>
           </a:p>
           <a:p>
             <a:pPr algn="l" defTabSz="792479">
-              <a:defRPr spc="-26" sz="2688">
+              <a:defRPr sz="2688" spc="-26">
                 <a:latin typeface="Arial"/>
                 <a:ea typeface="Arial"/>
                 <a:cs typeface="Arial"/>
@@ -8851,7 +9444,7 @@
           </a:ln>
           <a:extLst>
             <a:ext uri="{C572A759-6A51-4108-AA02-DFA0A04FC94B}">
-              <ma14:wrappingTextBoxFlag xmlns:ma14="http://schemas.microsoft.com/office/mac/drawingml/2011/main" val="1"/>
+              <ma14:wrappingTextBoxFlag xmlns:ma14="http://schemas.microsoft.com/office/mac/drawingml/2011/main" xmlns:a14="http://schemas.microsoft.com/office/drawing/2010/main" xmlns:m="http://schemas.openxmlformats.org/officeDocument/2006/math" xmlns="" val="1"/>
             </a:ext>
           </a:extLst>
         </p:spPr>
@@ -8875,6 +9468,7 @@
                 <a:sym typeface="Helvetica"/>
               </a:defRPr>
             </a:pPr>
+            <a:endParaRPr/>
           </a:p>
         </p:txBody>
       </p:sp>
@@ -8887,10 +9481,8 @@
           <p:nvPr/>
         </p:nvPicPr>
         <p:blipFill>
-          <a:blip r:embed="rId2">
-            <a:extLst/>
-          </a:blip>
-          <a:srcRect l="0" t="0" r="0" b="0"/>
+          <a:blip r:embed="rId2"/>
+          <a:srcRect/>
           <a:stretch>
             <a:fillRect/>
           </a:stretch>
@@ -8927,7 +9519,7 @@
           </a:ln>
           <a:extLst>
             <a:ext uri="{C572A759-6A51-4108-AA02-DFA0A04FC94B}">
-              <ma14:wrappingTextBoxFlag xmlns:ma14="http://schemas.microsoft.com/office/mac/drawingml/2011/main" val="1"/>
+              <ma14:wrappingTextBoxFlag xmlns:ma14="http://schemas.microsoft.com/office/mac/drawingml/2011/main" xmlns:a14="http://schemas.microsoft.com/office/drawing/2010/main" xmlns:m="http://schemas.openxmlformats.org/officeDocument/2006/math" xmlns="" val="1"/>
             </a:ext>
           </a:extLst>
         </p:spPr>
@@ -8968,6 +9560,7 @@
                 <a:sym typeface="Helvetica"/>
               </a:defRPr>
             </a:pPr>
+            <a:endParaRPr u="sng"/>
           </a:p>
           <a:p>
             <a:pPr algn="l" defTabSz="457200">
@@ -8984,6 +9577,7 @@
                 <a:sym typeface="Helvetica"/>
               </a:defRPr>
             </a:pPr>
+            <a:endParaRPr u="sng"/>
           </a:p>
           <a:p>
             <a:pPr algn="l" defTabSz="457200">
@@ -9000,6 +9594,7 @@
                 <a:sym typeface="Helvetica"/>
               </a:defRPr>
             </a:pPr>
+            <a:endParaRPr u="sng"/>
           </a:p>
           <a:p>
             <a:pPr algn="l" defTabSz="457200">
@@ -9016,6 +9611,7 @@
                 <a:sym typeface="Helvetica"/>
               </a:defRPr>
             </a:pPr>
+            <a:endParaRPr u="sng"/>
           </a:p>
         </p:txBody>
       </p:sp>
@@ -9041,7 +9637,7 @@
           </a:ln>
           <a:extLst>
             <a:ext uri="{C572A759-6A51-4108-AA02-DFA0A04FC94B}">
-              <ma14:wrappingTextBoxFlag xmlns:ma14="http://schemas.microsoft.com/office/mac/drawingml/2011/main" val="1"/>
+              <ma14:wrappingTextBoxFlag xmlns:ma14="http://schemas.microsoft.com/office/mac/drawingml/2011/main" xmlns:a14="http://schemas.microsoft.com/office/drawing/2010/main" xmlns:m="http://schemas.openxmlformats.org/officeDocument/2006/math" xmlns="" val="1"/>
             </a:ext>
           </a:extLst>
         </p:spPr>
@@ -9052,7 +9648,7 @@
               <a:lnSpc>
                 <a:spcPct val="100000"/>
               </a:lnSpc>
-              <a:defRPr b="1" sz="4400">
+              <a:defRPr sz="4400" b="1">
                 <a:solidFill>
                   <a:srgbClr val="FFFFFF"/>
                 </a:solidFill>
@@ -9064,7 +9660,6 @@
             </a:lvl1pPr>
           </a:lstStyle>
           <a:p>
-            <a:pPr/>
             <a:r>
               <a:t>Интерфейс</a:t>
             </a:r>
@@ -9080,10 +9675,8 @@
           <p:nvPr/>
         </p:nvPicPr>
         <p:blipFill>
-          <a:blip r:embed="rId2">
-            <a:extLst/>
-          </a:blip>
-          <a:srcRect l="0" t="0" r="0" b="0"/>
+          <a:blip r:embed="rId2"/>
+          <a:srcRect/>
           <a:stretch>
             <a:fillRect/>
           </a:stretch>
@@ -9106,12 +9699,147 @@
   <p:clrMapOvr>
     <a:masterClrMapping/>
   </p:clrMapOvr>
-  <p:transition xmlns:p14="http://schemas.microsoft.com/office/powerpoint/2010/main" spd="med" advClick="1"/>
+  <p:transition spd="med"/>
+</p:sld>
+</file>
+
+<file path=ppt/slides/slide9.xml><?xml version="1.0" encoding="utf-8"?>
+<p:sld xmlns:a="http://schemas.openxmlformats.org/drawingml/2006/main" xmlns:r="http://schemas.openxmlformats.org/officeDocument/2006/relationships" xmlns:p="http://schemas.openxmlformats.org/presentationml/2006/main">
+  <p:cSld>
+    <p:spTree>
+      <p:nvGrpSpPr>
+        <p:cNvPr id="1" name=""/>
+        <p:cNvGrpSpPr/>
+        <p:nvPr/>
+      </p:nvGrpSpPr>
+      <p:grpSpPr>
+        <a:xfrm>
+          <a:off x="0" y="0"/>
+          <a:ext cx="0" cy="0"/>
+          <a:chOff x="0" y="0"/>
+          <a:chExt cx="0" cy="0"/>
+        </a:xfrm>
+      </p:grpSpPr>
+      <p:sp>
+        <p:nvSpPr>
+          <p:cNvPr id="2" name="Рисунок 1">
+            <a:extLst>
+              <a:ext uri="{FF2B5EF4-FFF2-40B4-BE49-F238E27FC236}">
+                <a16:creationId xmlns:a16="http://schemas.microsoft.com/office/drawing/2014/main" id="{70CEEEC3-3BCB-431D-8828-EA77E61CAC51}"/>
+              </a:ext>
+            </a:extLst>
+          </p:cNvPr>
+          <p:cNvSpPr>
+            <a:spLocks noGrp="1"/>
+          </p:cNvSpPr>
+          <p:nvPr>
+            <p:ph type="pic" idx="21"/>
+          </p:nvPr>
+        </p:nvSpPr>
+        <p:spPr/>
+      </p:sp>
+      <p:sp>
+        <p:nvSpPr>
+          <p:cNvPr id="3" name="Заголовок 2">
+            <a:extLst>
+              <a:ext uri="{FF2B5EF4-FFF2-40B4-BE49-F238E27FC236}">
+                <a16:creationId xmlns:a16="http://schemas.microsoft.com/office/drawing/2014/main" id="{C175AD78-71FB-4043-837D-7CE3CBE6A28F}"/>
+              </a:ext>
+            </a:extLst>
+          </p:cNvPr>
+          <p:cNvSpPr>
+            <a:spLocks noGrp="1"/>
+          </p:cNvSpPr>
+          <p:nvPr>
+            <p:ph type="title"/>
+          </p:nvPr>
+        </p:nvSpPr>
+        <p:spPr/>
+        <p:txBody>
+          <a:bodyPr/>
+          <a:lstStyle/>
+          <a:p>
+            <a:r>
+              <a:rPr lang="ru-RU" dirty="0">
+                <a:solidFill>
+                  <a:srgbClr val="FF0000"/>
+                </a:solidFill>
+              </a:rPr>
+              <a:t>Проек</a:t>
+            </a:r>
+            <a:r>
+              <a:rPr lang="ru-RU" dirty="0"/>
+              <a:t>т</a:t>
+            </a:r>
+          </a:p>
+        </p:txBody>
+      </p:sp>
+      <p:sp>
+        <p:nvSpPr>
+          <p:cNvPr id="4" name="Текст 3">
+            <a:extLst>
+              <a:ext uri="{FF2B5EF4-FFF2-40B4-BE49-F238E27FC236}">
+                <a16:creationId xmlns:a16="http://schemas.microsoft.com/office/drawing/2014/main" id="{F47011D1-C8C4-48BB-AA55-7BEA7FF93726}"/>
+              </a:ext>
+            </a:extLst>
+          </p:cNvPr>
+          <p:cNvSpPr>
+            <a:spLocks noGrp="1"/>
+          </p:cNvSpPr>
+          <p:nvPr>
+            <p:ph type="body" sz="quarter" idx="1"/>
+          </p:nvPr>
+        </p:nvSpPr>
+        <p:spPr/>
+        <p:txBody>
+          <a:bodyPr/>
+          <a:lstStyle/>
+          <a:p>
+            <a:endParaRPr lang="ru-RU"/>
+          </a:p>
+        </p:txBody>
+      </p:sp>
+      <p:sp>
+        <p:nvSpPr>
+          <p:cNvPr id="5" name="Текст 4">
+            <a:extLst>
+              <a:ext uri="{FF2B5EF4-FFF2-40B4-BE49-F238E27FC236}">
+                <a16:creationId xmlns:a16="http://schemas.microsoft.com/office/drawing/2014/main" id="{223E9F57-1691-4107-AE7A-632213315E9B}"/>
+              </a:ext>
+            </a:extLst>
+          </p:cNvPr>
+          <p:cNvSpPr>
+            <a:spLocks noGrp="1"/>
+          </p:cNvSpPr>
+          <p:nvPr>
+            <p:ph type="body" sz="quarter" idx="22"/>
+          </p:nvPr>
+        </p:nvSpPr>
+        <p:spPr/>
+        <p:txBody>
+          <a:bodyPr/>
+          <a:lstStyle/>
+          <a:p>
+            <a:endParaRPr lang="ru-RU"/>
+          </a:p>
+        </p:txBody>
+      </p:sp>
+    </p:spTree>
+    <p:extLst>
+      <p:ext uri="{BB962C8B-B14F-4D97-AF65-F5344CB8AC3E}">
+        <p14:creationId xmlns:p14="http://schemas.microsoft.com/office/powerpoint/2010/main" val="1876506497"/>
+      </p:ext>
+    </p:extLst>
+  </p:cSld>
+  <p:clrMapOvr>
+    <a:masterClrMapping/>
+  </p:clrMapOvr>
+  <p:transition spd="med"/>
 </p:sld>
 </file>
 
 <file path=ppt/theme/theme1.xml><?xml version="1.0" encoding="utf-8"?>
-<a:theme xmlns:a="http://schemas.openxmlformats.org/drawingml/2006/main" xmlns:r="http://schemas.openxmlformats.org/officeDocument/2006/relationships" name="23_ClassicWhite">
+<a:theme xmlns:a="http://schemas.openxmlformats.org/drawingml/2006/main" name="23_ClassicWhite">
   <a:themeElements>
     <a:clrScheme name="23_ClassicWhite">
       <a:dk1>
@@ -9310,7 +10038,7 @@
         <a:effectLst/>
         <a:sp3d/>
       </a:spPr>
-      <a:bodyPr rot="0" spcFirstLastPara="1" vertOverflow="overflow" horzOverflow="overflow" vert="horz" wrap="square" lIns="50800" tIns="50800" rIns="50800" bIns="50800" numCol="1" spcCol="38100" rtlCol="0" anchor="ctr" upright="0">
+      <a:bodyPr rot="0" spcFirstLastPara="1" vertOverflow="overflow" horzOverflow="overflow" vert="horz" wrap="square" lIns="50800" tIns="50800" rIns="50800" bIns="50800" numCol="1" spcCol="38100" rtlCol="0" anchor="ctr">
         <a:spAutoFit/>
       </a:bodyPr>
       <a:lstStyle>
@@ -9329,7 +10057,7 @@
           <a:buFontTx/>
           <a:buNone/>
           <a:tabLst/>
-          <a:defRPr b="0" baseline="0" cap="none" i="0" spc="0" strike="noStrike" sz="3200" u="none" kumimoji="0" normalizeH="0">
+          <a:defRPr kumimoji="0" sz="3200" b="0" i="0" u="none" strike="noStrike" cap="none" spc="0" normalizeH="0" baseline="0">
             <a:ln>
               <a:noFill/>
             </a:ln>
@@ -9359,7 +10087,7 @@
           <a:buFontTx/>
           <a:buNone/>
           <a:tabLst/>
-          <a:defRPr b="0" baseline="0" cap="none" i="0" spc="0" strike="noStrike" sz="1800" u="none" kumimoji="0" normalizeH="0">
+          <a:defRPr kumimoji="0" sz="1800" b="0" i="0" u="none" strike="noStrike" cap="none" spc="0" normalizeH="0" baseline="0">
             <a:ln>
               <a:noFill/>
             </a:ln>
@@ -9385,7 +10113,7 @@
           <a:buFontTx/>
           <a:buNone/>
           <a:tabLst/>
-          <a:defRPr b="0" baseline="0" cap="none" i="0" spc="0" strike="noStrike" sz="1800" u="none" kumimoji="0" normalizeH="0">
+          <a:defRPr kumimoji="0" sz="1800" b="0" i="0" u="none" strike="noStrike" cap="none" spc="0" normalizeH="0" baseline="0">
             <a:ln>
               <a:noFill/>
             </a:ln>
@@ -9411,7 +10139,7 @@
           <a:buFontTx/>
           <a:buNone/>
           <a:tabLst/>
-          <a:defRPr b="0" baseline="0" cap="none" i="0" spc="0" strike="noStrike" sz="1800" u="none" kumimoji="0" normalizeH="0">
+          <a:defRPr kumimoji="0" sz="1800" b="0" i="0" u="none" strike="noStrike" cap="none" spc="0" normalizeH="0" baseline="0">
             <a:ln>
               <a:noFill/>
             </a:ln>
@@ -9437,7 +10165,7 @@
           <a:buFontTx/>
           <a:buNone/>
           <a:tabLst/>
-          <a:defRPr b="0" baseline="0" cap="none" i="0" spc="0" strike="noStrike" sz="1800" u="none" kumimoji="0" normalizeH="0">
+          <a:defRPr kumimoji="0" sz="1800" b="0" i="0" u="none" strike="noStrike" cap="none" spc="0" normalizeH="0" baseline="0">
             <a:ln>
               <a:noFill/>
             </a:ln>
@@ -9463,7 +10191,7 @@
           <a:buFontTx/>
           <a:buNone/>
           <a:tabLst/>
-          <a:defRPr b="0" baseline="0" cap="none" i="0" spc="0" strike="noStrike" sz="1800" u="none" kumimoji="0" normalizeH="0">
+          <a:defRPr kumimoji="0" sz="1800" b="0" i="0" u="none" strike="noStrike" cap="none" spc="0" normalizeH="0" baseline="0">
             <a:ln>
               <a:noFill/>
             </a:ln>
@@ -9489,7 +10217,7 @@
           <a:buFontTx/>
           <a:buNone/>
           <a:tabLst/>
-          <a:defRPr b="0" baseline="0" cap="none" i="0" spc="0" strike="noStrike" sz="1800" u="none" kumimoji="0" normalizeH="0">
+          <a:defRPr kumimoji="0" sz="1800" b="0" i="0" u="none" strike="noStrike" cap="none" spc="0" normalizeH="0" baseline="0">
             <a:ln>
               <a:noFill/>
             </a:ln>
@@ -9515,7 +10243,7 @@
           <a:buFontTx/>
           <a:buNone/>
           <a:tabLst/>
-          <a:defRPr b="0" baseline="0" cap="none" i="0" spc="0" strike="noStrike" sz="1800" u="none" kumimoji="0" normalizeH="0">
+          <a:defRPr kumimoji="0" sz="1800" b="0" i="0" u="none" strike="noStrike" cap="none" spc="0" normalizeH="0" baseline="0">
             <a:ln>
               <a:noFill/>
             </a:ln>
@@ -9541,7 +10269,7 @@
           <a:buFontTx/>
           <a:buNone/>
           <a:tabLst/>
-          <a:defRPr b="0" baseline="0" cap="none" i="0" spc="0" strike="noStrike" sz="1800" u="none" kumimoji="0" normalizeH="0">
+          <a:defRPr kumimoji="0" sz="1800" b="0" i="0" u="none" strike="noStrike" cap="none" spc="0" normalizeH="0" baseline="0">
             <a:ln>
               <a:noFill/>
             </a:ln>
@@ -9567,7 +10295,7 @@
           <a:buFontTx/>
           <a:buNone/>
           <a:tabLst/>
-          <a:defRPr b="0" baseline="0" cap="none" i="0" spc="0" strike="noStrike" sz="1800" u="none" kumimoji="0" normalizeH="0">
+          <a:defRPr kumimoji="0" sz="1800" b="0" i="0" u="none" strike="noStrike" cap="none" spc="0" normalizeH="0" baseline="0">
             <a:ln>
               <a:noFill/>
             </a:ln>
@@ -9580,9 +10308,15 @@
         </a:lvl9pPr>
       </a:lstStyle>
       <a:style>
-        <a:lnRef idx="0"/>
-        <a:fillRef idx="0"/>
-        <a:effectRef idx="0"/>
+        <a:lnRef idx="0">
+          <a:scrgbClr r="0" g="0" b="0"/>
+        </a:lnRef>
+        <a:fillRef idx="0">
+          <a:scrgbClr r="0" g="0" b="0"/>
+        </a:fillRef>
+        <a:effectRef idx="0">
+          <a:scrgbClr r="0" g="0" b="0"/>
+        </a:effectRef>
         <a:fontRef idx="none"/>
       </a:style>
     </a:spDef>
@@ -9599,7 +10333,7 @@
         <a:effectLst/>
         <a:sp3d/>
       </a:spPr>
-      <a:bodyPr rot="0" spcFirstLastPara="1" vertOverflow="overflow" horzOverflow="overflow" vert="horz" wrap="square" lIns="91439" tIns="45719" rIns="91439" bIns="45719" numCol="1" spcCol="38100" rtlCol="0" anchor="t" upright="0">
+      <a:bodyPr rot="0" spcFirstLastPara="1" vertOverflow="overflow" horzOverflow="overflow" vert="horz" wrap="square" lIns="91439" tIns="45719" rIns="91439" bIns="45719" numCol="1" spcCol="38100" rtlCol="0" anchor="t">
         <a:noAutofit/>
       </a:bodyPr>
       <a:lstStyle>
@@ -9618,7 +10352,7 @@
           <a:buFontTx/>
           <a:buNone/>
           <a:tabLst/>
-          <a:defRPr b="0" baseline="0" cap="none" i="0" spc="0" strike="noStrike" sz="1800" u="none" kumimoji="0" normalizeH="0">
+          <a:defRPr kumimoji="0" sz="1800" b="0" i="0" u="none" strike="noStrike" cap="none" spc="0" normalizeH="0" baseline="0">
             <a:ln>
               <a:noFill/>
             </a:ln>
@@ -9644,7 +10378,7 @@
           <a:buFontTx/>
           <a:buNone/>
           <a:tabLst/>
-          <a:defRPr b="0" baseline="0" cap="none" i="0" spc="0" strike="noStrike" sz="1800" u="none" kumimoji="0" normalizeH="0">
+          <a:defRPr kumimoji="0" sz="1800" b="0" i="0" u="none" strike="noStrike" cap="none" spc="0" normalizeH="0" baseline="0">
             <a:ln>
               <a:noFill/>
             </a:ln>
@@ -9670,7 +10404,7 @@
           <a:buFontTx/>
           <a:buNone/>
           <a:tabLst/>
-          <a:defRPr b="0" baseline="0" cap="none" i="0" spc="0" strike="noStrike" sz="1800" u="none" kumimoji="0" normalizeH="0">
+          <a:defRPr kumimoji="0" sz="1800" b="0" i="0" u="none" strike="noStrike" cap="none" spc="0" normalizeH="0" baseline="0">
             <a:ln>
               <a:noFill/>
             </a:ln>
@@ -9696,7 +10430,7 @@
           <a:buFontTx/>
           <a:buNone/>
           <a:tabLst/>
-          <a:defRPr b="0" baseline="0" cap="none" i="0" spc="0" strike="noStrike" sz="1800" u="none" kumimoji="0" normalizeH="0">
+          <a:defRPr kumimoji="0" sz="1800" b="0" i="0" u="none" strike="noStrike" cap="none" spc="0" normalizeH="0" baseline="0">
             <a:ln>
               <a:noFill/>
             </a:ln>
@@ -9722,7 +10456,7 @@
           <a:buFontTx/>
           <a:buNone/>
           <a:tabLst/>
-          <a:defRPr b="0" baseline="0" cap="none" i="0" spc="0" strike="noStrike" sz="1800" u="none" kumimoji="0" normalizeH="0">
+          <a:defRPr kumimoji="0" sz="1800" b="0" i="0" u="none" strike="noStrike" cap="none" spc="0" normalizeH="0" baseline="0">
             <a:ln>
               <a:noFill/>
             </a:ln>
@@ -9748,7 +10482,7 @@
           <a:buFontTx/>
           <a:buNone/>
           <a:tabLst/>
-          <a:defRPr b="0" baseline="0" cap="none" i="0" spc="0" strike="noStrike" sz="1800" u="none" kumimoji="0" normalizeH="0">
+          <a:defRPr kumimoji="0" sz="1800" b="0" i="0" u="none" strike="noStrike" cap="none" spc="0" normalizeH="0" baseline="0">
             <a:ln>
               <a:noFill/>
             </a:ln>
@@ -9774,7 +10508,7 @@
           <a:buFontTx/>
           <a:buNone/>
           <a:tabLst/>
-          <a:defRPr b="0" baseline="0" cap="none" i="0" spc="0" strike="noStrike" sz="1800" u="none" kumimoji="0" normalizeH="0">
+          <a:defRPr kumimoji="0" sz="1800" b="0" i="0" u="none" strike="noStrike" cap="none" spc="0" normalizeH="0" baseline="0">
             <a:ln>
               <a:noFill/>
             </a:ln>
@@ -9800,7 +10534,7 @@
           <a:buFontTx/>
           <a:buNone/>
           <a:tabLst/>
-          <a:defRPr b="0" baseline="0" cap="none" i="0" spc="0" strike="noStrike" sz="1800" u="none" kumimoji="0" normalizeH="0">
+          <a:defRPr kumimoji="0" sz="1800" b="0" i="0" u="none" strike="noStrike" cap="none" spc="0" normalizeH="0" baseline="0">
             <a:ln>
               <a:noFill/>
             </a:ln>
@@ -9826,7 +10560,7 @@
           <a:buFontTx/>
           <a:buNone/>
           <a:tabLst/>
-          <a:defRPr b="0" baseline="0" cap="none" i="0" spc="0" strike="noStrike" sz="1800" u="none" kumimoji="0" normalizeH="0">
+          <a:defRPr kumimoji="0" sz="1800" b="0" i="0" u="none" strike="noStrike" cap="none" spc="0" normalizeH="0" baseline="0">
             <a:ln>
               <a:noFill/>
             </a:ln>
@@ -9852,7 +10586,7 @@
           <a:buFontTx/>
           <a:buNone/>
           <a:tabLst/>
-          <a:defRPr b="0" baseline="0" cap="none" i="0" spc="0" strike="noStrike" sz="1800" u="none" kumimoji="0" normalizeH="0">
+          <a:defRPr kumimoji="0" sz="1800" b="0" i="0" u="none" strike="noStrike" cap="none" spc="0" normalizeH="0" baseline="0">
             <a:ln>
               <a:noFill/>
             </a:ln>
@@ -9865,9 +10599,15 @@
         </a:lvl9pPr>
       </a:lstStyle>
       <a:style>
-        <a:lnRef idx="0"/>
-        <a:fillRef idx="0"/>
-        <a:effectRef idx="0"/>
+        <a:lnRef idx="0">
+          <a:scrgbClr r="0" g="0" b="0"/>
+        </a:lnRef>
+        <a:fillRef idx="0">
+          <a:scrgbClr r="0" g="0" b="0"/>
+        </a:fillRef>
+        <a:effectRef idx="0">
+          <a:scrgbClr r="0" g="0" b="0"/>
+        </a:effectRef>
         <a:fontRef idx="none"/>
       </a:style>
     </a:lnDef>
@@ -9881,7 +10621,7 @@
         <a:effectLst/>
         <a:sp3d/>
       </a:spPr>
-      <a:bodyPr rot="0" spcFirstLastPara="1" vertOverflow="overflow" horzOverflow="overflow" vert="horz" wrap="square" lIns="50800" tIns="50800" rIns="50800" bIns="50800" numCol="1" spcCol="38100" rtlCol="0" anchor="ctr" upright="0">
+      <a:bodyPr rot="0" spcFirstLastPara="1" vertOverflow="overflow" horzOverflow="overflow" vert="horz" wrap="square" lIns="50800" tIns="50800" rIns="50800" bIns="50800" numCol="1" spcCol="38100" rtlCol="0" anchor="ctr">
         <a:spAutoFit/>
       </a:bodyPr>
       <a:lstStyle>
@@ -9900,7 +10640,7 @@
           <a:buFontTx/>
           <a:buNone/>
           <a:tabLst/>
-          <a:defRPr b="0" baseline="0" cap="none" i="0" spc="0" strike="noStrike" sz="2400" u="none" kumimoji="0" normalizeH="0">
+          <a:defRPr kumimoji="0" sz="2400" b="0" i="0" u="none" strike="noStrike" cap="none" spc="0" normalizeH="0" baseline="0">
             <a:ln>
               <a:noFill/>
             </a:ln>
@@ -9930,7 +10670,7 @@
           <a:buFontTx/>
           <a:buNone/>
           <a:tabLst/>
-          <a:defRPr b="0" baseline="0" cap="none" i="0" spc="0" strike="noStrike" sz="1800" u="none" kumimoji="0" normalizeH="0">
+          <a:defRPr kumimoji="0" sz="1800" b="0" i="0" u="none" strike="noStrike" cap="none" spc="0" normalizeH="0" baseline="0">
             <a:ln>
               <a:noFill/>
             </a:ln>
@@ -9956,7 +10696,7 @@
           <a:buFontTx/>
           <a:buNone/>
           <a:tabLst/>
-          <a:defRPr b="0" baseline="0" cap="none" i="0" spc="0" strike="noStrike" sz="1800" u="none" kumimoji="0" normalizeH="0">
+          <a:defRPr kumimoji="0" sz="1800" b="0" i="0" u="none" strike="noStrike" cap="none" spc="0" normalizeH="0" baseline="0">
             <a:ln>
               <a:noFill/>
             </a:ln>
@@ -9982,7 +10722,7 @@
           <a:buFontTx/>
           <a:buNone/>
           <a:tabLst/>
-          <a:defRPr b="0" baseline="0" cap="none" i="0" spc="0" strike="noStrike" sz="1800" u="none" kumimoji="0" normalizeH="0">
+          <a:defRPr kumimoji="0" sz="1800" b="0" i="0" u="none" strike="noStrike" cap="none" spc="0" normalizeH="0" baseline="0">
             <a:ln>
               <a:noFill/>
             </a:ln>
@@ -10008,7 +10748,7 @@
           <a:buFontTx/>
           <a:buNone/>
           <a:tabLst/>
-          <a:defRPr b="0" baseline="0" cap="none" i="0" spc="0" strike="noStrike" sz="1800" u="none" kumimoji="0" normalizeH="0">
+          <a:defRPr kumimoji="0" sz="1800" b="0" i="0" u="none" strike="noStrike" cap="none" spc="0" normalizeH="0" baseline="0">
             <a:ln>
               <a:noFill/>
             </a:ln>
@@ -10034,7 +10774,7 @@
           <a:buFontTx/>
           <a:buNone/>
           <a:tabLst/>
-          <a:defRPr b="0" baseline="0" cap="none" i="0" spc="0" strike="noStrike" sz="1800" u="none" kumimoji="0" normalizeH="0">
+          <a:defRPr kumimoji="0" sz="1800" b="0" i="0" u="none" strike="noStrike" cap="none" spc="0" normalizeH="0" baseline="0">
             <a:ln>
               <a:noFill/>
             </a:ln>
@@ -10060,7 +10800,7 @@
           <a:buFontTx/>
           <a:buNone/>
           <a:tabLst/>
-          <a:defRPr b="0" baseline="0" cap="none" i="0" spc="0" strike="noStrike" sz="1800" u="none" kumimoji="0" normalizeH="0">
+          <a:defRPr kumimoji="0" sz="1800" b="0" i="0" u="none" strike="noStrike" cap="none" spc="0" normalizeH="0" baseline="0">
             <a:ln>
               <a:noFill/>
             </a:ln>
@@ -10086,7 +10826,7 @@
           <a:buFontTx/>
           <a:buNone/>
           <a:tabLst/>
-          <a:defRPr b="0" baseline="0" cap="none" i="0" spc="0" strike="noStrike" sz="1800" u="none" kumimoji="0" normalizeH="0">
+          <a:defRPr kumimoji="0" sz="1800" b="0" i="0" u="none" strike="noStrike" cap="none" spc="0" normalizeH="0" baseline="0">
             <a:ln>
               <a:noFill/>
             </a:ln>
@@ -10112,7 +10852,7 @@
           <a:buFontTx/>
           <a:buNone/>
           <a:tabLst/>
-          <a:defRPr b="0" baseline="0" cap="none" i="0" spc="0" strike="noStrike" sz="1800" u="none" kumimoji="0" normalizeH="0">
+          <a:defRPr kumimoji="0" sz="1800" b="0" i="0" u="none" strike="noStrike" cap="none" spc="0" normalizeH="0" baseline="0">
             <a:ln>
               <a:noFill/>
             </a:ln>
@@ -10138,7 +10878,7 @@
           <a:buFontTx/>
           <a:buNone/>
           <a:tabLst/>
-          <a:defRPr b="0" baseline="0" cap="none" i="0" spc="0" strike="noStrike" sz="1800" u="none" kumimoji="0" normalizeH="0">
+          <a:defRPr kumimoji="0" sz="1800" b="0" i="0" u="none" strike="noStrike" cap="none" spc="0" normalizeH="0" baseline="0">
             <a:ln>
               <a:noFill/>
             </a:ln>
@@ -10151,18 +10891,25 @@
         </a:lvl9pPr>
       </a:lstStyle>
       <a:style>
-        <a:lnRef idx="0"/>
-        <a:fillRef idx="0"/>
-        <a:effectRef idx="0"/>
+        <a:lnRef idx="0">
+          <a:scrgbClr r="0" g="0" b="0"/>
+        </a:lnRef>
+        <a:fillRef idx="0">
+          <a:scrgbClr r="0" g="0" b="0"/>
+        </a:fillRef>
+        <a:effectRef idx="0">
+          <a:scrgbClr r="0" g="0" b="0"/>
+        </a:effectRef>
         <a:fontRef idx="none"/>
       </a:style>
     </a:txDef>
   </a:objectDefaults>
+  <a:extraClrSchemeLst/>
 </a:theme>
 </file>
 
 <file path=ppt/theme/theme2.xml><?xml version="1.0" encoding="utf-8"?>
-<a:theme xmlns:a="http://schemas.openxmlformats.org/drawingml/2006/main" xmlns:r="http://schemas.openxmlformats.org/officeDocument/2006/relationships" name="23_ClassicWhite">
+<a:theme xmlns:a="http://schemas.openxmlformats.org/drawingml/2006/main" name="23_ClassicWhite">
   <a:themeElements>
     <a:clrScheme name="23_ClassicWhite">
       <a:dk1>
@@ -10361,7 +11108,7 @@
         <a:effectLst/>
         <a:sp3d/>
       </a:spPr>
-      <a:bodyPr rot="0" spcFirstLastPara="1" vertOverflow="overflow" horzOverflow="overflow" vert="horz" wrap="square" lIns="50800" tIns="50800" rIns="50800" bIns="50800" numCol="1" spcCol="38100" rtlCol="0" anchor="ctr" upright="0">
+      <a:bodyPr rot="0" spcFirstLastPara="1" vertOverflow="overflow" horzOverflow="overflow" vert="horz" wrap="square" lIns="50800" tIns="50800" rIns="50800" bIns="50800" numCol="1" spcCol="38100" rtlCol="0" anchor="ctr">
         <a:spAutoFit/>
       </a:bodyPr>
       <a:lstStyle>
@@ -10380,7 +11127,7 @@
           <a:buFontTx/>
           <a:buNone/>
           <a:tabLst/>
-          <a:defRPr b="0" baseline="0" cap="none" i="0" spc="0" strike="noStrike" sz="3200" u="none" kumimoji="0" normalizeH="0">
+          <a:defRPr kumimoji="0" sz="3200" b="0" i="0" u="none" strike="noStrike" cap="none" spc="0" normalizeH="0" baseline="0">
             <a:ln>
               <a:noFill/>
             </a:ln>
@@ -10410,7 +11157,7 @@
           <a:buFontTx/>
           <a:buNone/>
           <a:tabLst/>
-          <a:defRPr b="0" baseline="0" cap="none" i="0" spc="0" strike="noStrike" sz="1800" u="none" kumimoji="0" normalizeH="0">
+          <a:defRPr kumimoji="0" sz="1800" b="0" i="0" u="none" strike="noStrike" cap="none" spc="0" normalizeH="0" baseline="0">
             <a:ln>
               <a:noFill/>
             </a:ln>
@@ -10436,7 +11183,7 @@
           <a:buFontTx/>
           <a:buNone/>
           <a:tabLst/>
-          <a:defRPr b="0" baseline="0" cap="none" i="0" spc="0" strike="noStrike" sz="1800" u="none" kumimoji="0" normalizeH="0">
+          <a:defRPr kumimoji="0" sz="1800" b="0" i="0" u="none" strike="noStrike" cap="none" spc="0" normalizeH="0" baseline="0">
             <a:ln>
               <a:noFill/>
             </a:ln>
@@ -10462,7 +11209,7 @@
           <a:buFontTx/>
           <a:buNone/>
           <a:tabLst/>
-          <a:defRPr b="0" baseline="0" cap="none" i="0" spc="0" strike="noStrike" sz="1800" u="none" kumimoji="0" normalizeH="0">
+          <a:defRPr kumimoji="0" sz="1800" b="0" i="0" u="none" strike="noStrike" cap="none" spc="0" normalizeH="0" baseline="0">
             <a:ln>
               <a:noFill/>
             </a:ln>
@@ -10488,7 +11235,7 @@
           <a:buFontTx/>
           <a:buNone/>
           <a:tabLst/>
-          <a:defRPr b="0" baseline="0" cap="none" i="0" spc="0" strike="noStrike" sz="1800" u="none" kumimoji="0" normalizeH="0">
+          <a:defRPr kumimoji="0" sz="1800" b="0" i="0" u="none" strike="noStrike" cap="none" spc="0" normalizeH="0" baseline="0">
             <a:ln>
               <a:noFill/>
             </a:ln>
@@ -10514,7 +11261,7 @@
           <a:buFontTx/>
           <a:buNone/>
           <a:tabLst/>
-          <a:defRPr b="0" baseline="0" cap="none" i="0" spc="0" strike="noStrike" sz="1800" u="none" kumimoji="0" normalizeH="0">
+          <a:defRPr kumimoji="0" sz="1800" b="0" i="0" u="none" strike="noStrike" cap="none" spc="0" normalizeH="0" baseline="0">
             <a:ln>
               <a:noFill/>
             </a:ln>
@@ -10540,7 +11287,7 @@
           <a:buFontTx/>
           <a:buNone/>
           <a:tabLst/>
-          <a:defRPr b="0" baseline="0" cap="none" i="0" spc="0" strike="noStrike" sz="1800" u="none" kumimoji="0" normalizeH="0">
+          <a:defRPr kumimoji="0" sz="1800" b="0" i="0" u="none" strike="noStrike" cap="none" spc="0" normalizeH="0" baseline="0">
             <a:ln>
               <a:noFill/>
             </a:ln>
@@ -10566,7 +11313,7 @@
           <a:buFontTx/>
           <a:buNone/>
           <a:tabLst/>
-          <a:defRPr b="0" baseline="0" cap="none" i="0" spc="0" strike="noStrike" sz="1800" u="none" kumimoji="0" normalizeH="0">
+          <a:defRPr kumimoji="0" sz="1800" b="0" i="0" u="none" strike="noStrike" cap="none" spc="0" normalizeH="0" baseline="0">
             <a:ln>
               <a:noFill/>
             </a:ln>
@@ -10592,7 +11339,7 @@
           <a:buFontTx/>
           <a:buNone/>
           <a:tabLst/>
-          <a:defRPr b="0" baseline="0" cap="none" i="0" spc="0" strike="noStrike" sz="1800" u="none" kumimoji="0" normalizeH="0">
+          <a:defRPr kumimoji="0" sz="1800" b="0" i="0" u="none" strike="noStrike" cap="none" spc="0" normalizeH="0" baseline="0">
             <a:ln>
               <a:noFill/>
             </a:ln>
@@ -10618,7 +11365,7 @@
           <a:buFontTx/>
           <a:buNone/>
           <a:tabLst/>
-          <a:defRPr b="0" baseline="0" cap="none" i="0" spc="0" strike="noStrike" sz="1800" u="none" kumimoji="0" normalizeH="0">
+          <a:defRPr kumimoji="0" sz="1800" b="0" i="0" u="none" strike="noStrike" cap="none" spc="0" normalizeH="0" baseline="0">
             <a:ln>
               <a:noFill/>
             </a:ln>
@@ -10631,9 +11378,15 @@
         </a:lvl9pPr>
       </a:lstStyle>
       <a:style>
-        <a:lnRef idx="0"/>
-        <a:fillRef idx="0"/>
-        <a:effectRef idx="0"/>
+        <a:lnRef idx="0">
+          <a:scrgbClr r="0" g="0" b="0"/>
+        </a:lnRef>
+        <a:fillRef idx="0">
+          <a:scrgbClr r="0" g="0" b="0"/>
+        </a:fillRef>
+        <a:effectRef idx="0">
+          <a:scrgbClr r="0" g="0" b="0"/>
+        </a:effectRef>
         <a:fontRef idx="none"/>
       </a:style>
     </a:spDef>
@@ -10650,7 +11403,7 @@
         <a:effectLst/>
         <a:sp3d/>
       </a:spPr>
-      <a:bodyPr rot="0" spcFirstLastPara="1" vertOverflow="overflow" horzOverflow="overflow" vert="horz" wrap="square" lIns="91439" tIns="45719" rIns="91439" bIns="45719" numCol="1" spcCol="38100" rtlCol="0" anchor="t" upright="0">
+      <a:bodyPr rot="0" spcFirstLastPara="1" vertOverflow="overflow" horzOverflow="overflow" vert="horz" wrap="square" lIns="91439" tIns="45719" rIns="91439" bIns="45719" numCol="1" spcCol="38100" rtlCol="0" anchor="t">
         <a:noAutofit/>
       </a:bodyPr>
       <a:lstStyle>
@@ -10669,7 +11422,7 @@
           <a:buFontTx/>
           <a:buNone/>
           <a:tabLst/>
-          <a:defRPr b="0" baseline="0" cap="none" i="0" spc="0" strike="noStrike" sz="1800" u="none" kumimoji="0" normalizeH="0">
+          <a:defRPr kumimoji="0" sz="1800" b="0" i="0" u="none" strike="noStrike" cap="none" spc="0" normalizeH="0" baseline="0">
             <a:ln>
               <a:noFill/>
             </a:ln>
@@ -10695,7 +11448,7 @@
           <a:buFontTx/>
           <a:buNone/>
           <a:tabLst/>
-          <a:defRPr b="0" baseline="0" cap="none" i="0" spc="0" strike="noStrike" sz="1800" u="none" kumimoji="0" normalizeH="0">
+          <a:defRPr kumimoji="0" sz="1800" b="0" i="0" u="none" strike="noStrike" cap="none" spc="0" normalizeH="0" baseline="0">
             <a:ln>
               <a:noFill/>
             </a:ln>
@@ -10721,7 +11474,7 @@
           <a:buFontTx/>
           <a:buNone/>
           <a:tabLst/>
-          <a:defRPr b="0" baseline="0" cap="none" i="0" spc="0" strike="noStrike" sz="1800" u="none" kumimoji="0" normalizeH="0">
+          <a:defRPr kumimoji="0" sz="1800" b="0" i="0" u="none" strike="noStrike" cap="none" spc="0" normalizeH="0" baseline="0">
             <a:ln>
               <a:noFill/>
             </a:ln>
@@ -10747,7 +11500,7 @@
           <a:buFontTx/>
           <a:buNone/>
           <a:tabLst/>
-          <a:defRPr b="0" baseline="0" cap="none" i="0" spc="0" strike="noStrike" sz="1800" u="none" kumimoji="0" normalizeH="0">
+          <a:defRPr kumimoji="0" sz="1800" b="0" i="0" u="none" strike="noStrike" cap="none" spc="0" normalizeH="0" baseline="0">
             <a:ln>
               <a:noFill/>
             </a:ln>
@@ -10773,7 +11526,7 @@
           <a:buFontTx/>
           <a:buNone/>
           <a:tabLst/>
-          <a:defRPr b="0" baseline="0" cap="none" i="0" spc="0" strike="noStrike" sz="1800" u="none" kumimoji="0" normalizeH="0">
+          <a:defRPr kumimoji="0" sz="1800" b="0" i="0" u="none" strike="noStrike" cap="none" spc="0" normalizeH="0" baseline="0">
             <a:ln>
               <a:noFill/>
             </a:ln>
@@ -10799,7 +11552,7 @@
           <a:buFontTx/>
           <a:buNone/>
           <a:tabLst/>
-          <a:defRPr b="0" baseline="0" cap="none" i="0" spc="0" strike="noStrike" sz="1800" u="none" kumimoji="0" normalizeH="0">
+          <a:defRPr kumimoji="0" sz="1800" b="0" i="0" u="none" strike="noStrike" cap="none" spc="0" normalizeH="0" baseline="0">
             <a:ln>
               <a:noFill/>
             </a:ln>
@@ -10825,7 +11578,7 @@
           <a:buFontTx/>
           <a:buNone/>
           <a:tabLst/>
-          <a:defRPr b="0" baseline="0" cap="none" i="0" spc="0" strike="noStrike" sz="1800" u="none" kumimoji="0" normalizeH="0">
+          <a:defRPr kumimoji="0" sz="1800" b="0" i="0" u="none" strike="noStrike" cap="none" spc="0" normalizeH="0" baseline="0">
             <a:ln>
               <a:noFill/>
             </a:ln>
@@ -10851,7 +11604,7 @@
           <a:buFontTx/>
           <a:buNone/>
           <a:tabLst/>
-          <a:defRPr b="0" baseline="0" cap="none" i="0" spc="0" strike="noStrike" sz="1800" u="none" kumimoji="0" normalizeH="0">
+          <a:defRPr kumimoji="0" sz="1800" b="0" i="0" u="none" strike="noStrike" cap="none" spc="0" normalizeH="0" baseline="0">
             <a:ln>
               <a:noFill/>
             </a:ln>
@@ -10877,7 +11630,7 @@
           <a:buFontTx/>
           <a:buNone/>
           <a:tabLst/>
-          <a:defRPr b="0" baseline="0" cap="none" i="0" spc="0" strike="noStrike" sz="1800" u="none" kumimoji="0" normalizeH="0">
+          <a:defRPr kumimoji="0" sz="1800" b="0" i="0" u="none" strike="noStrike" cap="none" spc="0" normalizeH="0" baseline="0">
             <a:ln>
               <a:noFill/>
             </a:ln>
@@ -10903,7 +11656,7 @@
           <a:buFontTx/>
           <a:buNone/>
           <a:tabLst/>
-          <a:defRPr b="0" baseline="0" cap="none" i="0" spc="0" strike="noStrike" sz="1800" u="none" kumimoji="0" normalizeH="0">
+          <a:defRPr kumimoji="0" sz="1800" b="0" i="0" u="none" strike="noStrike" cap="none" spc="0" normalizeH="0" baseline="0">
             <a:ln>
               <a:noFill/>
             </a:ln>
@@ -10916,9 +11669,15 @@
         </a:lvl9pPr>
       </a:lstStyle>
       <a:style>
-        <a:lnRef idx="0"/>
-        <a:fillRef idx="0"/>
-        <a:effectRef idx="0"/>
+        <a:lnRef idx="0">
+          <a:scrgbClr r="0" g="0" b="0"/>
+        </a:lnRef>
+        <a:fillRef idx="0">
+          <a:scrgbClr r="0" g="0" b="0"/>
+        </a:fillRef>
+        <a:effectRef idx="0">
+          <a:scrgbClr r="0" g="0" b="0"/>
+        </a:effectRef>
         <a:fontRef idx="none"/>
       </a:style>
     </a:lnDef>
@@ -10932,7 +11691,7 @@
         <a:effectLst/>
         <a:sp3d/>
       </a:spPr>
-      <a:bodyPr rot="0" spcFirstLastPara="1" vertOverflow="overflow" horzOverflow="overflow" vert="horz" wrap="square" lIns="50800" tIns="50800" rIns="50800" bIns="50800" numCol="1" spcCol="38100" rtlCol="0" anchor="ctr" upright="0">
+      <a:bodyPr rot="0" spcFirstLastPara="1" vertOverflow="overflow" horzOverflow="overflow" vert="horz" wrap="square" lIns="50800" tIns="50800" rIns="50800" bIns="50800" numCol="1" spcCol="38100" rtlCol="0" anchor="ctr">
         <a:spAutoFit/>
       </a:bodyPr>
       <a:lstStyle>
@@ -10951,7 +11710,7 @@
           <a:buFontTx/>
           <a:buNone/>
           <a:tabLst/>
-          <a:defRPr b="0" baseline="0" cap="none" i="0" spc="0" strike="noStrike" sz="2400" u="none" kumimoji="0" normalizeH="0">
+          <a:defRPr kumimoji="0" sz="2400" b="0" i="0" u="none" strike="noStrike" cap="none" spc="0" normalizeH="0" baseline="0">
             <a:ln>
               <a:noFill/>
             </a:ln>
@@ -10981,7 +11740,7 @@
           <a:buFontTx/>
           <a:buNone/>
           <a:tabLst/>
-          <a:defRPr b="0" baseline="0" cap="none" i="0" spc="0" strike="noStrike" sz="1800" u="none" kumimoji="0" normalizeH="0">
+          <a:defRPr kumimoji="0" sz="1800" b="0" i="0" u="none" strike="noStrike" cap="none" spc="0" normalizeH="0" baseline="0">
             <a:ln>
               <a:noFill/>
             </a:ln>
@@ -11007,7 +11766,7 @@
           <a:buFontTx/>
           <a:buNone/>
           <a:tabLst/>
-          <a:defRPr b="0" baseline="0" cap="none" i="0" spc="0" strike="noStrike" sz="1800" u="none" kumimoji="0" normalizeH="0">
+          <a:defRPr kumimoji="0" sz="1800" b="0" i="0" u="none" strike="noStrike" cap="none" spc="0" normalizeH="0" baseline="0">
             <a:ln>
               <a:noFill/>
             </a:ln>
@@ -11033,7 +11792,7 @@
           <a:buFontTx/>
           <a:buNone/>
           <a:tabLst/>
-          <a:defRPr b="0" baseline="0" cap="none" i="0" spc="0" strike="noStrike" sz="1800" u="none" kumimoji="0" normalizeH="0">
+          <a:defRPr kumimoji="0" sz="1800" b="0" i="0" u="none" strike="noStrike" cap="none" spc="0" normalizeH="0" baseline="0">
             <a:ln>
               <a:noFill/>
             </a:ln>
@@ -11059,7 +11818,7 @@
           <a:buFontTx/>
           <a:buNone/>
           <a:tabLst/>
-          <a:defRPr b="0" baseline="0" cap="none" i="0" spc="0" strike="noStrike" sz="1800" u="none" kumimoji="0" normalizeH="0">
+          <a:defRPr kumimoji="0" sz="1800" b="0" i="0" u="none" strike="noStrike" cap="none" spc="0" normalizeH="0" baseline="0">
             <a:ln>
               <a:noFill/>
             </a:ln>
@@ -11085,7 +11844,7 @@
           <a:buFontTx/>
           <a:buNone/>
           <a:tabLst/>
-          <a:defRPr b="0" baseline="0" cap="none" i="0" spc="0" strike="noStrike" sz="1800" u="none" kumimoji="0" normalizeH="0">
+          <a:defRPr kumimoji="0" sz="1800" b="0" i="0" u="none" strike="noStrike" cap="none" spc="0" normalizeH="0" baseline="0">
             <a:ln>
               <a:noFill/>
             </a:ln>
@@ -11111,7 +11870,7 @@
           <a:buFontTx/>
           <a:buNone/>
           <a:tabLst/>
-          <a:defRPr b="0" baseline="0" cap="none" i="0" spc="0" strike="noStrike" sz="1800" u="none" kumimoji="0" normalizeH="0">
+          <a:defRPr kumimoji="0" sz="1800" b="0" i="0" u="none" strike="noStrike" cap="none" spc="0" normalizeH="0" baseline="0">
             <a:ln>
               <a:noFill/>
             </a:ln>
@@ -11137,7 +11896,7 @@
           <a:buFontTx/>
           <a:buNone/>
           <a:tabLst/>
-          <a:defRPr b="0" baseline="0" cap="none" i="0" spc="0" strike="noStrike" sz="1800" u="none" kumimoji="0" normalizeH="0">
+          <a:defRPr kumimoji="0" sz="1800" b="0" i="0" u="none" strike="noStrike" cap="none" spc="0" normalizeH="0" baseline="0">
             <a:ln>
               <a:noFill/>
             </a:ln>
@@ -11163,7 +11922,7 @@
           <a:buFontTx/>
           <a:buNone/>
           <a:tabLst/>
-          <a:defRPr b="0" baseline="0" cap="none" i="0" spc="0" strike="noStrike" sz="1800" u="none" kumimoji="0" normalizeH="0">
+          <a:defRPr kumimoji="0" sz="1800" b="0" i="0" u="none" strike="noStrike" cap="none" spc="0" normalizeH="0" baseline="0">
             <a:ln>
               <a:noFill/>
             </a:ln>
@@ -11189,7 +11948,7 @@
           <a:buFontTx/>
           <a:buNone/>
           <a:tabLst/>
-          <a:defRPr b="0" baseline="0" cap="none" i="0" spc="0" strike="noStrike" sz="1800" u="none" kumimoji="0" normalizeH="0">
+          <a:defRPr kumimoji="0" sz="1800" b="0" i="0" u="none" strike="noStrike" cap="none" spc="0" normalizeH="0" baseline="0">
             <a:ln>
               <a:noFill/>
             </a:ln>
@@ -11202,12 +11961,19 @@
         </a:lvl9pPr>
       </a:lstStyle>
       <a:style>
-        <a:lnRef idx="0"/>
-        <a:fillRef idx="0"/>
-        <a:effectRef idx="0"/>
+        <a:lnRef idx="0">
+          <a:scrgbClr r="0" g="0" b="0"/>
+        </a:lnRef>
+        <a:fillRef idx="0">
+          <a:scrgbClr r="0" g="0" b="0"/>
+        </a:fillRef>
+        <a:effectRef idx="0">
+          <a:scrgbClr r="0" g="0" b="0"/>
+        </a:effectRef>
         <a:fontRef idx="none"/>
       </a:style>
     </a:txDef>
   </a:objectDefaults>
+  <a:extraClrSchemeLst/>
 </a:theme>
 </file>